--- a/slides/C24_Regressão_logística.pptx
+++ b/slides/C24_Regressão_logística.pptx
@@ -5,23 +5,27 @@
     <p:sldMasterId id="2147483648" r:id="rId1"/>
   </p:sldMasterIdLst>
   <p:notesMasterIdLst>
-    <p:notesMasterId r:id="rId13"/>
+    <p:notesMasterId r:id="rId17"/>
   </p:notesMasterIdLst>
   <p:handoutMasterIdLst>
-    <p:handoutMasterId r:id="rId14"/>
+    <p:handoutMasterId r:id="rId18"/>
   </p:handoutMasterIdLst>
   <p:sldIdLst>
     <p:sldId id="256" r:id="rId2"/>
-    <p:sldId id="307" r:id="rId3"/>
-    <p:sldId id="308" r:id="rId4"/>
-    <p:sldId id="309" r:id="rId5"/>
-    <p:sldId id="310" r:id="rId6"/>
-    <p:sldId id="311" r:id="rId7"/>
-    <p:sldId id="312" r:id="rId8"/>
-    <p:sldId id="313" r:id="rId9"/>
-    <p:sldId id="293" r:id="rId10"/>
-    <p:sldId id="314" r:id="rId11"/>
-    <p:sldId id="306" r:id="rId12"/>
+    <p:sldId id="347" r:id="rId3"/>
+    <p:sldId id="348" r:id="rId4"/>
+    <p:sldId id="329" r:id="rId5"/>
+    <p:sldId id="351" r:id="rId6"/>
+    <p:sldId id="350" r:id="rId7"/>
+    <p:sldId id="353" r:id="rId8"/>
+    <p:sldId id="349" r:id="rId9"/>
+    <p:sldId id="355" r:id="rId10"/>
+    <p:sldId id="354" r:id="rId11"/>
+    <p:sldId id="332" r:id="rId12"/>
+    <p:sldId id="356" r:id="rId13"/>
+    <p:sldId id="352" r:id="rId14"/>
+    <p:sldId id="293" r:id="rId15"/>
+    <p:sldId id="306" r:id="rId16"/>
   </p:sldIdLst>
   <p:sldSz cx="12192000" cy="6858000"/>
   <p:notesSz cx="7315200" cy="9601200"/>
@@ -285,7 +289,7 @@
           <a:p>
             <a:fld id="{144F1436-6906-4D93-B7A2-786C327BFA14}" type="datetimeFigureOut">
               <a:rPr lang="nl-BE" smtClean="0"/>
-              <a:t>6/01/2026</a:t>
+              <a:t>18/02/2026</a:t>
             </a:fld>
             <a:endParaRPr lang="nl-BE"/>
           </a:p>
@@ -351,7 +355,7 @@
           <a:p>
             <a:fld id="{F7E56D9B-79AD-444A-AFED-DEC23408F8B4}" type="slidenum">
               <a:rPr lang="nl-BE" smtClean="0"/>
-              <a:t>‹nº›</a:t>
+              <a:t>‹#›</a:t>
             </a:fld>
             <a:endParaRPr lang="nl-BE"/>
           </a:p>
@@ -450,7 +454,7 @@
           <a:p>
             <a:fld id="{AA8CD09E-2914-4F47-B6C1-51B2C31814C9}" type="datetimeFigureOut">
               <a:rPr lang="pt-BR" smtClean="0"/>
-              <a:t>06/01/2026</a:t>
+              <a:t>18/02/2026</a:t>
             </a:fld>
             <a:endParaRPr lang="pt-BR"/>
           </a:p>
@@ -608,7 +612,7 @@
           <a:p>
             <a:fld id="{6FC8D850-966F-45A6-8DE7-15B891E7D40D}" type="slidenum">
               <a:rPr lang="pt-BR" smtClean="0"/>
-              <a:t>‹nº›</a:t>
+              <a:t>‹#›</a:t>
             </a:fld>
             <a:endParaRPr lang="pt-BR"/>
           </a:p>
@@ -801,6 +805,322 @@
 </p:notes>
 </file>
 
+<file path=ppt/notesSlides/notesSlide2.xml><?xml version="1.0" encoding="utf-8"?>
+<p:notes xmlns:a="http://schemas.openxmlformats.org/drawingml/2006/main" xmlns:r="http://schemas.openxmlformats.org/officeDocument/2006/relationships" xmlns:p="http://schemas.openxmlformats.org/presentationml/2006/main">
+  <p:cSld>
+    <p:spTree>
+      <p:nvGrpSpPr>
+        <p:cNvPr id="1" name=""/>
+        <p:cNvGrpSpPr/>
+        <p:nvPr/>
+      </p:nvGrpSpPr>
+      <p:grpSpPr>
+        <a:xfrm>
+          <a:off x="0" y="0"/>
+          <a:ext cx="0" cy="0"/>
+          <a:chOff x="0" y="0"/>
+          <a:chExt cx="0" cy="0"/>
+        </a:xfrm>
+      </p:grpSpPr>
+      <p:sp>
+        <p:nvSpPr>
+          <p:cNvPr id="2" name="Espaço Reservado para Imagem de Slide 1"/>
+          <p:cNvSpPr>
+            <a:spLocks noGrp="1" noRot="1" noChangeAspect="1"/>
+          </p:cNvSpPr>
+          <p:nvPr>
+            <p:ph type="sldImg"/>
+          </p:nvPr>
+        </p:nvSpPr>
+        <p:spPr/>
+      </p:sp>
+      <p:sp>
+        <p:nvSpPr>
+          <p:cNvPr id="3" name="Espaço Reservado para Anotações 2"/>
+          <p:cNvSpPr>
+            <a:spLocks noGrp="1"/>
+          </p:cNvSpPr>
+          <p:nvPr>
+            <p:ph type="body" idx="1"/>
+          </p:nvPr>
+        </p:nvSpPr>
+        <p:spPr/>
+        <p:txBody>
+          <a:bodyPr/>
+          <a:lstStyle/>
+          <a:p>
+            <a:pPr marL="0" marR="0" lvl="0" indent="0" algn="l" defTabSz="914400" rtl="0" eaLnBrk="1" fontAlgn="auto" latinLnBrk="0" hangingPunct="1">
+              <a:lnSpc>
+                <a:spcPct val="100000"/>
+              </a:lnSpc>
+              <a:spcBef>
+                <a:spcPts val="0"/>
+              </a:spcBef>
+              <a:spcAft>
+                <a:spcPts val="0"/>
+              </a:spcAft>
+              <a:buClrTx/>
+              <a:buSzTx/>
+              <a:buFontTx/>
+              <a:buNone/>
+              <a:tabLst/>
+              <a:defRPr/>
+            </a:pPr>
+            <a:r>
+              <a:rPr lang="pt-BR" dirty="0" err="1"/>
+              <a:t>Motivacão</a:t>
+            </a:r>
+            <a:r>
+              <a:rPr lang="pt-BR" dirty="0"/>
+              <a:t>:</a:t>
+            </a:r>
+            <a:r>
+              <a:rPr lang="pt-BR" baseline="0" dirty="0"/>
+              <a:t> </a:t>
+            </a:r>
+            <a:r>
+              <a:rPr lang="pt-BR" baseline="0" dirty="0" err="1"/>
+              <a:t>classificacão</a:t>
+            </a:r>
+            <a:r>
+              <a:rPr lang="pt-BR" baseline="0" dirty="0"/>
+              <a:t> de e-mails, detecção de símbolos, classificação de modulações, etc.</a:t>
+            </a:r>
+            <a:endParaRPr lang="pt-BR" dirty="0"/>
+          </a:p>
+          <a:p>
+            <a:endParaRPr lang="en-US" dirty="0"/>
+          </a:p>
+        </p:txBody>
+      </p:sp>
+      <p:sp>
+        <p:nvSpPr>
+          <p:cNvPr id="4" name="Espaço Reservado para Número de Slide 3"/>
+          <p:cNvSpPr>
+            <a:spLocks noGrp="1"/>
+          </p:cNvSpPr>
+          <p:nvPr>
+            <p:ph type="sldNum" sz="quarter" idx="10"/>
+          </p:nvPr>
+        </p:nvSpPr>
+        <p:spPr/>
+        <p:txBody>
+          <a:bodyPr/>
+          <a:lstStyle/>
+          <a:p>
+            <a:fld id="{6FC8D850-966F-45A6-8DE7-15B891E7D40D}" type="slidenum">
+              <a:rPr lang="pt-BR" smtClean="0"/>
+              <a:t>3</a:t>
+            </a:fld>
+            <a:endParaRPr lang="pt-BR"/>
+          </a:p>
+        </p:txBody>
+      </p:sp>
+    </p:spTree>
+    <p:extLst>
+      <p:ext uri="{BB962C8B-B14F-4D97-AF65-F5344CB8AC3E}">
+        <p14:creationId xmlns:p14="http://schemas.microsoft.com/office/powerpoint/2010/main" val="3422863581"/>
+      </p:ext>
+    </p:extLst>
+  </p:cSld>
+  <p:clrMapOvr>
+    <a:masterClrMapping/>
+  </p:clrMapOvr>
+</p:notes>
+</file>
+
+<file path=ppt/notesSlides/notesSlide3.xml><?xml version="1.0" encoding="utf-8"?>
+<p:notes xmlns:a="http://schemas.openxmlformats.org/drawingml/2006/main" xmlns:r="http://schemas.openxmlformats.org/officeDocument/2006/relationships" xmlns:p="http://schemas.openxmlformats.org/presentationml/2006/main">
+  <p:cSld>
+    <p:spTree>
+      <p:nvGrpSpPr>
+        <p:cNvPr id="1" name=""/>
+        <p:cNvGrpSpPr/>
+        <p:nvPr/>
+      </p:nvGrpSpPr>
+      <p:grpSpPr>
+        <a:xfrm>
+          <a:off x="0" y="0"/>
+          <a:ext cx="0" cy="0"/>
+          <a:chOff x="0" y="0"/>
+          <a:chExt cx="0" cy="0"/>
+        </a:xfrm>
+      </p:grpSpPr>
+      <p:sp>
+        <p:nvSpPr>
+          <p:cNvPr id="2" name="Slide Image Placeholder 1"/>
+          <p:cNvSpPr>
+            <a:spLocks noGrp="1" noRot="1" noChangeAspect="1"/>
+          </p:cNvSpPr>
+          <p:nvPr>
+            <p:ph type="sldImg"/>
+          </p:nvPr>
+        </p:nvSpPr>
+        <p:spPr/>
+      </p:sp>
+      <p:sp>
+        <p:nvSpPr>
+          <p:cNvPr id="3" name="Notes Placeholder 2"/>
+          <p:cNvSpPr>
+            <a:spLocks noGrp="1"/>
+          </p:cNvSpPr>
+          <p:nvPr>
+            <p:ph type="body" idx="1"/>
+          </p:nvPr>
+        </p:nvSpPr>
+        <p:spPr/>
+        <p:txBody>
+          <a:bodyPr/>
+          <a:lstStyle/>
+          <a:p>
+            <a:endParaRPr lang="en-US" dirty="0"/>
+          </a:p>
+        </p:txBody>
+      </p:sp>
+      <p:sp>
+        <p:nvSpPr>
+          <p:cNvPr id="4" name="Slide Number Placeholder 3"/>
+          <p:cNvSpPr>
+            <a:spLocks noGrp="1"/>
+          </p:cNvSpPr>
+          <p:nvPr>
+            <p:ph type="sldNum" sz="quarter" idx="5"/>
+          </p:nvPr>
+        </p:nvSpPr>
+        <p:spPr/>
+        <p:txBody>
+          <a:bodyPr/>
+          <a:lstStyle/>
+          <a:p>
+            <a:fld id="{6FC8D850-966F-45A6-8DE7-15B891E7D40D}" type="slidenum">
+              <a:rPr lang="pt-BR" smtClean="0"/>
+              <a:t>6</a:t>
+            </a:fld>
+            <a:endParaRPr lang="pt-BR"/>
+          </a:p>
+        </p:txBody>
+      </p:sp>
+    </p:spTree>
+    <p:extLst>
+      <p:ext uri="{BB962C8B-B14F-4D97-AF65-F5344CB8AC3E}">
+        <p14:creationId xmlns:p14="http://schemas.microsoft.com/office/powerpoint/2010/main" val="2935174336"/>
+      </p:ext>
+    </p:extLst>
+  </p:cSld>
+  <p:clrMapOvr>
+    <a:masterClrMapping/>
+  </p:clrMapOvr>
+</p:notes>
+</file>
+
+<file path=ppt/notesSlides/notesSlide4.xml><?xml version="1.0" encoding="utf-8"?>
+<p:notes xmlns:a="http://schemas.openxmlformats.org/drawingml/2006/main" xmlns:r="http://schemas.openxmlformats.org/officeDocument/2006/relationships" xmlns:p="http://schemas.openxmlformats.org/presentationml/2006/main">
+  <p:cSld>
+    <p:spTree>
+      <p:nvGrpSpPr>
+        <p:cNvPr id="1" name="">
+          <a:extLst>
+            <a:ext uri="{FF2B5EF4-FFF2-40B4-BE49-F238E27FC236}">
+              <a16:creationId xmlns:a16="http://schemas.microsoft.com/office/drawing/2014/main" id="{232DA5E1-00E0-2F8D-E426-C2BE1BC8766D}"/>
+            </a:ext>
+          </a:extLst>
+        </p:cNvPr>
+        <p:cNvGrpSpPr/>
+        <p:nvPr/>
+      </p:nvGrpSpPr>
+      <p:grpSpPr>
+        <a:xfrm>
+          <a:off x="0" y="0"/>
+          <a:ext cx="0" cy="0"/>
+          <a:chOff x="0" y="0"/>
+          <a:chExt cx="0" cy="0"/>
+        </a:xfrm>
+      </p:grpSpPr>
+      <p:sp>
+        <p:nvSpPr>
+          <p:cNvPr id="2" name="Slide Image Placeholder 1">
+            <a:extLst>
+              <a:ext uri="{FF2B5EF4-FFF2-40B4-BE49-F238E27FC236}">
+                <a16:creationId xmlns:a16="http://schemas.microsoft.com/office/drawing/2014/main" id="{755444DB-79D2-76F0-537D-343DD7EF78F8}"/>
+              </a:ext>
+            </a:extLst>
+          </p:cNvPr>
+          <p:cNvSpPr>
+            <a:spLocks noGrp="1" noRot="1" noChangeAspect="1"/>
+          </p:cNvSpPr>
+          <p:nvPr>
+            <p:ph type="sldImg"/>
+          </p:nvPr>
+        </p:nvSpPr>
+        <p:spPr/>
+      </p:sp>
+      <p:sp>
+        <p:nvSpPr>
+          <p:cNvPr id="3" name="Notes Placeholder 2">
+            <a:extLst>
+              <a:ext uri="{FF2B5EF4-FFF2-40B4-BE49-F238E27FC236}">
+                <a16:creationId xmlns:a16="http://schemas.microsoft.com/office/drawing/2014/main" id="{FA229730-5EFD-DF7F-FC23-84032A9E7498}"/>
+              </a:ext>
+            </a:extLst>
+          </p:cNvPr>
+          <p:cNvSpPr>
+            <a:spLocks noGrp="1"/>
+          </p:cNvSpPr>
+          <p:nvPr>
+            <p:ph type="body" idx="1"/>
+          </p:nvPr>
+        </p:nvSpPr>
+        <p:spPr/>
+        <p:txBody>
+          <a:bodyPr/>
+          <a:lstStyle/>
+          <a:p>
+            <a:endParaRPr lang="en-US" dirty="0"/>
+          </a:p>
+        </p:txBody>
+      </p:sp>
+      <p:sp>
+        <p:nvSpPr>
+          <p:cNvPr id="4" name="Slide Number Placeholder 3">
+            <a:extLst>
+              <a:ext uri="{FF2B5EF4-FFF2-40B4-BE49-F238E27FC236}">
+                <a16:creationId xmlns:a16="http://schemas.microsoft.com/office/drawing/2014/main" id="{B47740AF-93D3-5439-F324-AEC42AF75759}"/>
+              </a:ext>
+            </a:extLst>
+          </p:cNvPr>
+          <p:cNvSpPr>
+            <a:spLocks noGrp="1"/>
+          </p:cNvSpPr>
+          <p:nvPr>
+            <p:ph type="sldNum" sz="quarter" idx="5"/>
+          </p:nvPr>
+        </p:nvSpPr>
+        <p:spPr/>
+        <p:txBody>
+          <a:bodyPr/>
+          <a:lstStyle/>
+          <a:p>
+            <a:fld id="{6FC8D850-966F-45A6-8DE7-15B891E7D40D}" type="slidenum">
+              <a:rPr lang="pt-BR" smtClean="0"/>
+              <a:t>7</a:t>
+            </a:fld>
+            <a:endParaRPr lang="pt-BR"/>
+          </a:p>
+        </p:txBody>
+      </p:sp>
+    </p:spTree>
+    <p:extLst>
+      <p:ext uri="{BB962C8B-B14F-4D97-AF65-F5344CB8AC3E}">
+        <p14:creationId xmlns:p14="http://schemas.microsoft.com/office/powerpoint/2010/main" val="2016814869"/>
+      </p:ext>
+    </p:extLst>
+  </p:cSld>
+  <p:clrMapOvr>
+    <a:masterClrMapping/>
+  </p:clrMapOvr>
+</p:notes>
+</file>
+
 <file path=ppt/slideLayouts/slideLayout1.xml><?xml version="1.0" encoding="utf-8"?>
 <p:sldLayout xmlns:a="http://schemas.openxmlformats.org/drawingml/2006/main" xmlns:r="http://schemas.openxmlformats.org/officeDocument/2006/relationships" xmlns:p="http://schemas.openxmlformats.org/presentationml/2006/main" type="title" preserve="1">
   <p:cSld name="Slide de Título">
@@ -823,7 +1143,7 @@
           <p:cNvPr id="2" name="Título 1">
             <a:extLst>
               <a:ext uri="{FF2B5EF4-FFF2-40B4-BE49-F238E27FC236}">
-                <a16:creationId xmlns="" xmlns:a16="http://schemas.microsoft.com/office/drawing/2014/main" id="{1DB9B4FF-B06E-403C-A326-BDC64D8FF94E}"/>
+                <a16:creationId xmlns:a16="http://schemas.microsoft.com/office/drawing/2014/main" id="{1DB9B4FF-B06E-403C-A326-BDC64D8FF94E}"/>
               </a:ext>
             </a:extLst>
           </p:cNvPr>
@@ -860,7 +1180,7 @@
           <p:cNvPr id="3" name="Subtítulo 2">
             <a:extLst>
               <a:ext uri="{FF2B5EF4-FFF2-40B4-BE49-F238E27FC236}">
-                <a16:creationId xmlns="" xmlns:a16="http://schemas.microsoft.com/office/drawing/2014/main" id="{247BDFCE-746E-45BF-A319-4733D58D1632}"/>
+                <a16:creationId xmlns:a16="http://schemas.microsoft.com/office/drawing/2014/main" id="{247BDFCE-746E-45BF-A319-4733D58D1632}"/>
               </a:ext>
             </a:extLst>
           </p:cNvPr>
@@ -930,7 +1250,7 @@
           <p:cNvPr id="4" name="Espaço Reservado para Data 3">
             <a:extLst>
               <a:ext uri="{FF2B5EF4-FFF2-40B4-BE49-F238E27FC236}">
-                <a16:creationId xmlns="" xmlns:a16="http://schemas.microsoft.com/office/drawing/2014/main" id="{9EDE2778-5372-4104-B96D-968184DA8288}"/>
+                <a16:creationId xmlns:a16="http://schemas.microsoft.com/office/drawing/2014/main" id="{9EDE2778-5372-4104-B96D-968184DA8288}"/>
               </a:ext>
             </a:extLst>
           </p:cNvPr>
@@ -948,7 +1268,7 @@
           <a:p>
             <a:fld id="{63289F7E-B80B-496E-81B4-D396C37C9454}" type="datetimeFigureOut">
               <a:rPr lang="pt-BR" smtClean="0"/>
-              <a:t>06/01/2026</a:t>
+              <a:t>18/02/2026</a:t>
             </a:fld>
             <a:endParaRPr lang="pt-BR"/>
           </a:p>
@@ -959,7 +1279,7 @@
           <p:cNvPr id="5" name="Espaço Reservado para Rodapé 4">
             <a:extLst>
               <a:ext uri="{FF2B5EF4-FFF2-40B4-BE49-F238E27FC236}">
-                <a16:creationId xmlns="" xmlns:a16="http://schemas.microsoft.com/office/drawing/2014/main" id="{C1DD0F41-C861-4051-988D-3024A37A4B93}"/>
+                <a16:creationId xmlns:a16="http://schemas.microsoft.com/office/drawing/2014/main" id="{C1DD0F41-C861-4051-988D-3024A37A4B93}"/>
               </a:ext>
             </a:extLst>
           </p:cNvPr>
@@ -984,7 +1304,7 @@
           <p:cNvPr id="6" name="Espaço Reservado para Número de Slide 5">
             <a:extLst>
               <a:ext uri="{FF2B5EF4-FFF2-40B4-BE49-F238E27FC236}">
-                <a16:creationId xmlns="" xmlns:a16="http://schemas.microsoft.com/office/drawing/2014/main" id="{07E5967E-D980-431A-A5DB-3F0C5030A81E}"/>
+                <a16:creationId xmlns:a16="http://schemas.microsoft.com/office/drawing/2014/main" id="{07E5967E-D980-431A-A5DB-3F0C5030A81E}"/>
               </a:ext>
             </a:extLst>
           </p:cNvPr>
@@ -1002,7 +1322,7 @@
           <a:p>
             <a:fld id="{1A7E88B7-70CE-4035-AE73-13FA6FB985D4}" type="slidenum">
               <a:rPr lang="pt-BR" smtClean="0"/>
-              <a:t>‹nº›</a:t>
+              <a:t>‹#›</a:t>
             </a:fld>
             <a:endParaRPr lang="pt-BR"/>
           </a:p>
@@ -1043,7 +1363,7 @@
           <p:cNvPr id="2" name="Título 1">
             <a:extLst>
               <a:ext uri="{FF2B5EF4-FFF2-40B4-BE49-F238E27FC236}">
-                <a16:creationId xmlns="" xmlns:a16="http://schemas.microsoft.com/office/drawing/2014/main" id="{9036C49F-3E68-4175-81BA-3C3FEE44308A}"/>
+                <a16:creationId xmlns:a16="http://schemas.microsoft.com/office/drawing/2014/main" id="{9036C49F-3E68-4175-81BA-3C3FEE44308A}"/>
               </a:ext>
             </a:extLst>
           </p:cNvPr>
@@ -1071,7 +1391,7 @@
           <p:cNvPr id="3" name="Espaço Reservado para Texto Vertical 2">
             <a:extLst>
               <a:ext uri="{FF2B5EF4-FFF2-40B4-BE49-F238E27FC236}">
-                <a16:creationId xmlns="" xmlns:a16="http://schemas.microsoft.com/office/drawing/2014/main" id="{426FA736-3DD3-4D4E-B57B-BBE1D8F7D424}"/>
+                <a16:creationId xmlns:a16="http://schemas.microsoft.com/office/drawing/2014/main" id="{426FA736-3DD3-4D4E-B57B-BBE1D8F7D424}"/>
               </a:ext>
             </a:extLst>
           </p:cNvPr>
@@ -1128,7 +1448,7 @@
           <p:cNvPr id="4" name="Espaço Reservado para Data 3">
             <a:extLst>
               <a:ext uri="{FF2B5EF4-FFF2-40B4-BE49-F238E27FC236}">
-                <a16:creationId xmlns="" xmlns:a16="http://schemas.microsoft.com/office/drawing/2014/main" id="{99E8855C-D8FD-48F6-B14E-861E0DE4D915}"/>
+                <a16:creationId xmlns:a16="http://schemas.microsoft.com/office/drawing/2014/main" id="{99E8855C-D8FD-48F6-B14E-861E0DE4D915}"/>
               </a:ext>
             </a:extLst>
           </p:cNvPr>
@@ -1146,7 +1466,7 @@
           <a:p>
             <a:fld id="{63289F7E-B80B-496E-81B4-D396C37C9454}" type="datetimeFigureOut">
               <a:rPr lang="pt-BR" smtClean="0"/>
-              <a:t>06/01/2026</a:t>
+              <a:t>18/02/2026</a:t>
             </a:fld>
             <a:endParaRPr lang="pt-BR"/>
           </a:p>
@@ -1157,7 +1477,7 @@
           <p:cNvPr id="5" name="Espaço Reservado para Rodapé 4">
             <a:extLst>
               <a:ext uri="{FF2B5EF4-FFF2-40B4-BE49-F238E27FC236}">
-                <a16:creationId xmlns="" xmlns:a16="http://schemas.microsoft.com/office/drawing/2014/main" id="{97C0BB88-2F21-42A5-ACFF-83DA47F2D340}"/>
+                <a16:creationId xmlns:a16="http://schemas.microsoft.com/office/drawing/2014/main" id="{97C0BB88-2F21-42A5-ACFF-83DA47F2D340}"/>
               </a:ext>
             </a:extLst>
           </p:cNvPr>
@@ -1182,7 +1502,7 @@
           <p:cNvPr id="6" name="Espaço Reservado para Número de Slide 5">
             <a:extLst>
               <a:ext uri="{FF2B5EF4-FFF2-40B4-BE49-F238E27FC236}">
-                <a16:creationId xmlns="" xmlns:a16="http://schemas.microsoft.com/office/drawing/2014/main" id="{6CB462B3-1F22-4C05-B4B8-7A279FB7D5E9}"/>
+                <a16:creationId xmlns:a16="http://schemas.microsoft.com/office/drawing/2014/main" id="{6CB462B3-1F22-4C05-B4B8-7A279FB7D5E9}"/>
               </a:ext>
             </a:extLst>
           </p:cNvPr>
@@ -1200,7 +1520,7 @@
           <a:p>
             <a:fld id="{1A7E88B7-70CE-4035-AE73-13FA6FB985D4}" type="slidenum">
               <a:rPr lang="pt-BR" smtClean="0"/>
-              <a:t>‹nº›</a:t>
+              <a:t>‹#›</a:t>
             </a:fld>
             <a:endParaRPr lang="pt-BR"/>
           </a:p>
@@ -1241,7 +1561,7 @@
           <p:cNvPr id="2" name="Título Vertical 1">
             <a:extLst>
               <a:ext uri="{FF2B5EF4-FFF2-40B4-BE49-F238E27FC236}">
-                <a16:creationId xmlns="" xmlns:a16="http://schemas.microsoft.com/office/drawing/2014/main" id="{EAEAB728-701C-4207-A9D5-23FF45C60502}"/>
+                <a16:creationId xmlns:a16="http://schemas.microsoft.com/office/drawing/2014/main" id="{EAEAB728-701C-4207-A9D5-23FF45C60502}"/>
               </a:ext>
             </a:extLst>
           </p:cNvPr>
@@ -1274,7 +1594,7 @@
           <p:cNvPr id="3" name="Espaço Reservado para Texto Vertical 2">
             <a:extLst>
               <a:ext uri="{FF2B5EF4-FFF2-40B4-BE49-F238E27FC236}">
-                <a16:creationId xmlns="" xmlns:a16="http://schemas.microsoft.com/office/drawing/2014/main" id="{BA8C8CCF-7823-480A-9A19-0F664DD17E3B}"/>
+                <a16:creationId xmlns:a16="http://schemas.microsoft.com/office/drawing/2014/main" id="{BA8C8CCF-7823-480A-9A19-0F664DD17E3B}"/>
               </a:ext>
             </a:extLst>
           </p:cNvPr>
@@ -1336,7 +1656,7 @@
           <p:cNvPr id="4" name="Espaço Reservado para Data 3">
             <a:extLst>
               <a:ext uri="{FF2B5EF4-FFF2-40B4-BE49-F238E27FC236}">
-                <a16:creationId xmlns="" xmlns:a16="http://schemas.microsoft.com/office/drawing/2014/main" id="{721D5734-7B1F-425D-942F-6EB73344027C}"/>
+                <a16:creationId xmlns:a16="http://schemas.microsoft.com/office/drawing/2014/main" id="{721D5734-7B1F-425D-942F-6EB73344027C}"/>
               </a:ext>
             </a:extLst>
           </p:cNvPr>
@@ -1354,7 +1674,7 @@
           <a:p>
             <a:fld id="{63289F7E-B80B-496E-81B4-D396C37C9454}" type="datetimeFigureOut">
               <a:rPr lang="pt-BR" smtClean="0"/>
-              <a:t>06/01/2026</a:t>
+              <a:t>18/02/2026</a:t>
             </a:fld>
             <a:endParaRPr lang="pt-BR"/>
           </a:p>
@@ -1365,7 +1685,7 @@
           <p:cNvPr id="5" name="Espaço Reservado para Rodapé 4">
             <a:extLst>
               <a:ext uri="{FF2B5EF4-FFF2-40B4-BE49-F238E27FC236}">
-                <a16:creationId xmlns="" xmlns:a16="http://schemas.microsoft.com/office/drawing/2014/main" id="{1E1AAEAC-F08D-45FE-89EC-B1B349A868C9}"/>
+                <a16:creationId xmlns:a16="http://schemas.microsoft.com/office/drawing/2014/main" id="{1E1AAEAC-F08D-45FE-89EC-B1B349A868C9}"/>
               </a:ext>
             </a:extLst>
           </p:cNvPr>
@@ -1390,7 +1710,7 @@
           <p:cNvPr id="6" name="Espaço Reservado para Número de Slide 5">
             <a:extLst>
               <a:ext uri="{FF2B5EF4-FFF2-40B4-BE49-F238E27FC236}">
-                <a16:creationId xmlns="" xmlns:a16="http://schemas.microsoft.com/office/drawing/2014/main" id="{BAA44493-9911-47B2-87A6-C2141A972BC8}"/>
+                <a16:creationId xmlns:a16="http://schemas.microsoft.com/office/drawing/2014/main" id="{BAA44493-9911-47B2-87A6-C2141A972BC8}"/>
               </a:ext>
             </a:extLst>
           </p:cNvPr>
@@ -1408,7 +1728,7 @@
           <a:p>
             <a:fld id="{1A7E88B7-70CE-4035-AE73-13FA6FB985D4}" type="slidenum">
               <a:rPr lang="pt-BR" smtClean="0"/>
-              <a:t>‹nº›</a:t>
+              <a:t>‹#›</a:t>
             </a:fld>
             <a:endParaRPr lang="pt-BR"/>
           </a:p>
@@ -1449,7 +1769,7 @@
           <p:cNvPr id="2" name="Título 1">
             <a:extLst>
               <a:ext uri="{FF2B5EF4-FFF2-40B4-BE49-F238E27FC236}">
-                <a16:creationId xmlns="" xmlns:a16="http://schemas.microsoft.com/office/drawing/2014/main" id="{71BD44A5-8F21-4626-A01D-48A1C874B1D5}"/>
+                <a16:creationId xmlns:a16="http://schemas.microsoft.com/office/drawing/2014/main" id="{71BD44A5-8F21-4626-A01D-48A1C874B1D5}"/>
               </a:ext>
             </a:extLst>
           </p:cNvPr>
@@ -1477,7 +1797,7 @@
           <p:cNvPr id="3" name="Espaço Reservado para Conteúdo 2">
             <a:extLst>
               <a:ext uri="{FF2B5EF4-FFF2-40B4-BE49-F238E27FC236}">
-                <a16:creationId xmlns="" xmlns:a16="http://schemas.microsoft.com/office/drawing/2014/main" id="{B79E8085-65A9-48AA-951D-71D978BFF4ED}"/>
+                <a16:creationId xmlns:a16="http://schemas.microsoft.com/office/drawing/2014/main" id="{B79E8085-65A9-48AA-951D-71D978BFF4ED}"/>
               </a:ext>
             </a:extLst>
           </p:cNvPr>
@@ -1534,7 +1854,7 @@
           <p:cNvPr id="4" name="Espaço Reservado para Data 3">
             <a:extLst>
               <a:ext uri="{FF2B5EF4-FFF2-40B4-BE49-F238E27FC236}">
-                <a16:creationId xmlns="" xmlns:a16="http://schemas.microsoft.com/office/drawing/2014/main" id="{F05BE1AF-51EA-425D-B188-DE7BD675009F}"/>
+                <a16:creationId xmlns:a16="http://schemas.microsoft.com/office/drawing/2014/main" id="{F05BE1AF-51EA-425D-B188-DE7BD675009F}"/>
               </a:ext>
             </a:extLst>
           </p:cNvPr>
@@ -1552,7 +1872,7 @@
           <a:p>
             <a:fld id="{63289F7E-B80B-496E-81B4-D396C37C9454}" type="datetimeFigureOut">
               <a:rPr lang="pt-BR" smtClean="0"/>
-              <a:t>06/01/2026</a:t>
+              <a:t>18/02/2026</a:t>
             </a:fld>
             <a:endParaRPr lang="pt-BR"/>
           </a:p>
@@ -1563,7 +1883,7 @@
           <p:cNvPr id="5" name="Espaço Reservado para Rodapé 4">
             <a:extLst>
               <a:ext uri="{FF2B5EF4-FFF2-40B4-BE49-F238E27FC236}">
-                <a16:creationId xmlns="" xmlns:a16="http://schemas.microsoft.com/office/drawing/2014/main" id="{121BE632-29CF-4CB9-B365-C9EF38F89BE6}"/>
+                <a16:creationId xmlns:a16="http://schemas.microsoft.com/office/drawing/2014/main" id="{121BE632-29CF-4CB9-B365-C9EF38F89BE6}"/>
               </a:ext>
             </a:extLst>
           </p:cNvPr>
@@ -1588,7 +1908,7 @@
           <p:cNvPr id="6" name="Espaço Reservado para Número de Slide 5">
             <a:extLst>
               <a:ext uri="{FF2B5EF4-FFF2-40B4-BE49-F238E27FC236}">
-                <a16:creationId xmlns="" xmlns:a16="http://schemas.microsoft.com/office/drawing/2014/main" id="{60CF3DD1-9AEC-4A57-B461-4E4DD86FAC18}"/>
+                <a16:creationId xmlns:a16="http://schemas.microsoft.com/office/drawing/2014/main" id="{60CF3DD1-9AEC-4A57-B461-4E4DD86FAC18}"/>
               </a:ext>
             </a:extLst>
           </p:cNvPr>
@@ -1606,7 +1926,7 @@
           <a:p>
             <a:fld id="{1A7E88B7-70CE-4035-AE73-13FA6FB985D4}" type="slidenum">
               <a:rPr lang="pt-BR" smtClean="0"/>
-              <a:t>‹nº›</a:t>
+              <a:t>‹#›</a:t>
             </a:fld>
             <a:endParaRPr lang="pt-BR"/>
           </a:p>
@@ -1647,7 +1967,7 @@
           <p:cNvPr id="2" name="Título 1">
             <a:extLst>
               <a:ext uri="{FF2B5EF4-FFF2-40B4-BE49-F238E27FC236}">
-                <a16:creationId xmlns="" xmlns:a16="http://schemas.microsoft.com/office/drawing/2014/main" id="{34AB2FF0-A4D7-4E28-991D-FF26140D5988}"/>
+                <a16:creationId xmlns:a16="http://schemas.microsoft.com/office/drawing/2014/main" id="{34AB2FF0-A4D7-4E28-991D-FF26140D5988}"/>
               </a:ext>
             </a:extLst>
           </p:cNvPr>
@@ -1684,7 +2004,7 @@
           <p:cNvPr id="3" name="Espaço Reservado para Texto 2">
             <a:extLst>
               <a:ext uri="{FF2B5EF4-FFF2-40B4-BE49-F238E27FC236}">
-                <a16:creationId xmlns="" xmlns:a16="http://schemas.microsoft.com/office/drawing/2014/main" id="{E2AC45B0-4145-40DB-8E61-105461170604}"/>
+                <a16:creationId xmlns:a16="http://schemas.microsoft.com/office/drawing/2014/main" id="{E2AC45B0-4145-40DB-8E61-105461170604}"/>
               </a:ext>
             </a:extLst>
           </p:cNvPr>
@@ -1809,7 +2129,7 @@
           <p:cNvPr id="4" name="Espaço Reservado para Data 3">
             <a:extLst>
               <a:ext uri="{FF2B5EF4-FFF2-40B4-BE49-F238E27FC236}">
-                <a16:creationId xmlns="" xmlns:a16="http://schemas.microsoft.com/office/drawing/2014/main" id="{50F1D3FB-740A-4EBA-A309-2CE71D12ECFB}"/>
+                <a16:creationId xmlns:a16="http://schemas.microsoft.com/office/drawing/2014/main" id="{50F1D3FB-740A-4EBA-A309-2CE71D12ECFB}"/>
               </a:ext>
             </a:extLst>
           </p:cNvPr>
@@ -1827,7 +2147,7 @@
           <a:p>
             <a:fld id="{63289F7E-B80B-496E-81B4-D396C37C9454}" type="datetimeFigureOut">
               <a:rPr lang="pt-BR" smtClean="0"/>
-              <a:t>06/01/2026</a:t>
+              <a:t>18/02/2026</a:t>
             </a:fld>
             <a:endParaRPr lang="pt-BR"/>
           </a:p>
@@ -1838,7 +2158,7 @@
           <p:cNvPr id="5" name="Espaço Reservado para Rodapé 4">
             <a:extLst>
               <a:ext uri="{FF2B5EF4-FFF2-40B4-BE49-F238E27FC236}">
-                <a16:creationId xmlns="" xmlns:a16="http://schemas.microsoft.com/office/drawing/2014/main" id="{BDCAB18F-8715-4465-A940-F9C193A2ACE9}"/>
+                <a16:creationId xmlns:a16="http://schemas.microsoft.com/office/drawing/2014/main" id="{BDCAB18F-8715-4465-A940-F9C193A2ACE9}"/>
               </a:ext>
             </a:extLst>
           </p:cNvPr>
@@ -1863,7 +2183,7 @@
           <p:cNvPr id="6" name="Espaço Reservado para Número de Slide 5">
             <a:extLst>
               <a:ext uri="{FF2B5EF4-FFF2-40B4-BE49-F238E27FC236}">
-                <a16:creationId xmlns="" xmlns:a16="http://schemas.microsoft.com/office/drawing/2014/main" id="{353466C6-8248-429F-8056-FF040BF509EB}"/>
+                <a16:creationId xmlns:a16="http://schemas.microsoft.com/office/drawing/2014/main" id="{353466C6-8248-429F-8056-FF040BF509EB}"/>
               </a:ext>
             </a:extLst>
           </p:cNvPr>
@@ -1881,7 +2201,7 @@
           <a:p>
             <a:fld id="{1A7E88B7-70CE-4035-AE73-13FA6FB985D4}" type="slidenum">
               <a:rPr lang="pt-BR" smtClean="0"/>
-              <a:t>‹nº›</a:t>
+              <a:t>‹#›</a:t>
             </a:fld>
             <a:endParaRPr lang="pt-BR"/>
           </a:p>
@@ -1922,7 +2242,7 @@
           <p:cNvPr id="2" name="Título 1">
             <a:extLst>
               <a:ext uri="{FF2B5EF4-FFF2-40B4-BE49-F238E27FC236}">
-                <a16:creationId xmlns="" xmlns:a16="http://schemas.microsoft.com/office/drawing/2014/main" id="{BC7BB9F0-F14B-4A91-B2B7-35BC47FE4DE7}"/>
+                <a16:creationId xmlns:a16="http://schemas.microsoft.com/office/drawing/2014/main" id="{BC7BB9F0-F14B-4A91-B2B7-35BC47FE4DE7}"/>
               </a:ext>
             </a:extLst>
           </p:cNvPr>
@@ -1950,7 +2270,7 @@
           <p:cNvPr id="3" name="Espaço Reservado para Conteúdo 2">
             <a:extLst>
               <a:ext uri="{FF2B5EF4-FFF2-40B4-BE49-F238E27FC236}">
-                <a16:creationId xmlns="" xmlns:a16="http://schemas.microsoft.com/office/drawing/2014/main" id="{EC1FC1C4-73DA-47A6-8496-B0B457F7D39A}"/>
+                <a16:creationId xmlns:a16="http://schemas.microsoft.com/office/drawing/2014/main" id="{EC1FC1C4-73DA-47A6-8496-B0B457F7D39A}"/>
               </a:ext>
             </a:extLst>
           </p:cNvPr>
@@ -2012,7 +2332,7 @@
           <p:cNvPr id="4" name="Espaço Reservado para Conteúdo 3">
             <a:extLst>
               <a:ext uri="{FF2B5EF4-FFF2-40B4-BE49-F238E27FC236}">
-                <a16:creationId xmlns="" xmlns:a16="http://schemas.microsoft.com/office/drawing/2014/main" id="{E92F06A8-A449-4D92-9912-76873E529B38}"/>
+                <a16:creationId xmlns:a16="http://schemas.microsoft.com/office/drawing/2014/main" id="{E92F06A8-A449-4D92-9912-76873E529B38}"/>
               </a:ext>
             </a:extLst>
           </p:cNvPr>
@@ -2074,7 +2394,7 @@
           <p:cNvPr id="5" name="Espaço Reservado para Data 4">
             <a:extLst>
               <a:ext uri="{FF2B5EF4-FFF2-40B4-BE49-F238E27FC236}">
-                <a16:creationId xmlns="" xmlns:a16="http://schemas.microsoft.com/office/drawing/2014/main" id="{938070A4-BC2F-4D55-BD8D-DEAF11BB9EE9}"/>
+                <a16:creationId xmlns:a16="http://schemas.microsoft.com/office/drawing/2014/main" id="{938070A4-BC2F-4D55-BD8D-DEAF11BB9EE9}"/>
               </a:ext>
             </a:extLst>
           </p:cNvPr>
@@ -2092,7 +2412,7 @@
           <a:p>
             <a:fld id="{63289F7E-B80B-496E-81B4-D396C37C9454}" type="datetimeFigureOut">
               <a:rPr lang="pt-BR" smtClean="0"/>
-              <a:t>06/01/2026</a:t>
+              <a:t>18/02/2026</a:t>
             </a:fld>
             <a:endParaRPr lang="pt-BR"/>
           </a:p>
@@ -2103,7 +2423,7 @@
           <p:cNvPr id="6" name="Espaço Reservado para Rodapé 5">
             <a:extLst>
               <a:ext uri="{FF2B5EF4-FFF2-40B4-BE49-F238E27FC236}">
-                <a16:creationId xmlns="" xmlns:a16="http://schemas.microsoft.com/office/drawing/2014/main" id="{45CC2DB8-844A-465F-BA9A-7734C80C7F43}"/>
+                <a16:creationId xmlns:a16="http://schemas.microsoft.com/office/drawing/2014/main" id="{45CC2DB8-844A-465F-BA9A-7734C80C7F43}"/>
               </a:ext>
             </a:extLst>
           </p:cNvPr>
@@ -2128,7 +2448,7 @@
           <p:cNvPr id="7" name="Espaço Reservado para Número de Slide 6">
             <a:extLst>
               <a:ext uri="{FF2B5EF4-FFF2-40B4-BE49-F238E27FC236}">
-                <a16:creationId xmlns="" xmlns:a16="http://schemas.microsoft.com/office/drawing/2014/main" id="{4CC606A8-097B-4040-94E0-CD8C88280D8F}"/>
+                <a16:creationId xmlns:a16="http://schemas.microsoft.com/office/drawing/2014/main" id="{4CC606A8-097B-4040-94E0-CD8C88280D8F}"/>
               </a:ext>
             </a:extLst>
           </p:cNvPr>
@@ -2146,7 +2466,7 @@
           <a:p>
             <a:fld id="{1A7E88B7-70CE-4035-AE73-13FA6FB985D4}" type="slidenum">
               <a:rPr lang="pt-BR" smtClean="0"/>
-              <a:t>‹nº›</a:t>
+              <a:t>‹#›</a:t>
             </a:fld>
             <a:endParaRPr lang="pt-BR"/>
           </a:p>
@@ -2187,7 +2507,7 @@
           <p:cNvPr id="2" name="Título 1">
             <a:extLst>
               <a:ext uri="{FF2B5EF4-FFF2-40B4-BE49-F238E27FC236}">
-                <a16:creationId xmlns="" xmlns:a16="http://schemas.microsoft.com/office/drawing/2014/main" id="{76D66686-0143-4CB6-8C09-BA326F1E7ACA}"/>
+                <a16:creationId xmlns:a16="http://schemas.microsoft.com/office/drawing/2014/main" id="{76D66686-0143-4CB6-8C09-BA326F1E7ACA}"/>
               </a:ext>
             </a:extLst>
           </p:cNvPr>
@@ -2220,7 +2540,7 @@
           <p:cNvPr id="3" name="Espaço Reservado para Texto 2">
             <a:extLst>
               <a:ext uri="{FF2B5EF4-FFF2-40B4-BE49-F238E27FC236}">
-                <a16:creationId xmlns="" xmlns:a16="http://schemas.microsoft.com/office/drawing/2014/main" id="{0227AB85-F59E-4BCE-B846-4FA0992C2F23}"/>
+                <a16:creationId xmlns:a16="http://schemas.microsoft.com/office/drawing/2014/main" id="{0227AB85-F59E-4BCE-B846-4FA0992C2F23}"/>
               </a:ext>
             </a:extLst>
           </p:cNvPr>
@@ -2291,7 +2611,7 @@
           <p:cNvPr id="4" name="Espaço Reservado para Conteúdo 3">
             <a:extLst>
               <a:ext uri="{FF2B5EF4-FFF2-40B4-BE49-F238E27FC236}">
-                <a16:creationId xmlns="" xmlns:a16="http://schemas.microsoft.com/office/drawing/2014/main" id="{3373456C-7319-4D0A-827D-D29F6B083F5D}"/>
+                <a16:creationId xmlns:a16="http://schemas.microsoft.com/office/drawing/2014/main" id="{3373456C-7319-4D0A-827D-D29F6B083F5D}"/>
               </a:ext>
             </a:extLst>
           </p:cNvPr>
@@ -2353,7 +2673,7 @@
           <p:cNvPr id="5" name="Espaço Reservado para Texto 4">
             <a:extLst>
               <a:ext uri="{FF2B5EF4-FFF2-40B4-BE49-F238E27FC236}">
-                <a16:creationId xmlns="" xmlns:a16="http://schemas.microsoft.com/office/drawing/2014/main" id="{4CD109D0-2E83-4262-8029-A871CEC47406}"/>
+                <a16:creationId xmlns:a16="http://schemas.microsoft.com/office/drawing/2014/main" id="{4CD109D0-2E83-4262-8029-A871CEC47406}"/>
               </a:ext>
             </a:extLst>
           </p:cNvPr>
@@ -2424,7 +2744,7 @@
           <p:cNvPr id="6" name="Espaço Reservado para Conteúdo 5">
             <a:extLst>
               <a:ext uri="{FF2B5EF4-FFF2-40B4-BE49-F238E27FC236}">
-                <a16:creationId xmlns="" xmlns:a16="http://schemas.microsoft.com/office/drawing/2014/main" id="{AD706E3A-CFBB-4A6C-A65F-D0360A9E74FE}"/>
+                <a16:creationId xmlns:a16="http://schemas.microsoft.com/office/drawing/2014/main" id="{AD706E3A-CFBB-4A6C-A65F-D0360A9E74FE}"/>
               </a:ext>
             </a:extLst>
           </p:cNvPr>
@@ -2486,7 +2806,7 @@
           <p:cNvPr id="7" name="Espaço Reservado para Data 6">
             <a:extLst>
               <a:ext uri="{FF2B5EF4-FFF2-40B4-BE49-F238E27FC236}">
-                <a16:creationId xmlns="" xmlns:a16="http://schemas.microsoft.com/office/drawing/2014/main" id="{4172C0E5-5AF0-4805-BB51-443733CD2BD5}"/>
+                <a16:creationId xmlns:a16="http://schemas.microsoft.com/office/drawing/2014/main" id="{4172C0E5-5AF0-4805-BB51-443733CD2BD5}"/>
               </a:ext>
             </a:extLst>
           </p:cNvPr>
@@ -2504,7 +2824,7 @@
           <a:p>
             <a:fld id="{63289F7E-B80B-496E-81B4-D396C37C9454}" type="datetimeFigureOut">
               <a:rPr lang="pt-BR" smtClean="0"/>
-              <a:t>06/01/2026</a:t>
+              <a:t>18/02/2026</a:t>
             </a:fld>
             <a:endParaRPr lang="pt-BR"/>
           </a:p>
@@ -2515,7 +2835,7 @@
           <p:cNvPr id="8" name="Espaço Reservado para Rodapé 7">
             <a:extLst>
               <a:ext uri="{FF2B5EF4-FFF2-40B4-BE49-F238E27FC236}">
-                <a16:creationId xmlns="" xmlns:a16="http://schemas.microsoft.com/office/drawing/2014/main" id="{0E801648-156F-497E-99CF-797DF48051E1}"/>
+                <a16:creationId xmlns:a16="http://schemas.microsoft.com/office/drawing/2014/main" id="{0E801648-156F-497E-99CF-797DF48051E1}"/>
               </a:ext>
             </a:extLst>
           </p:cNvPr>
@@ -2540,7 +2860,7 @@
           <p:cNvPr id="9" name="Espaço Reservado para Número de Slide 8">
             <a:extLst>
               <a:ext uri="{FF2B5EF4-FFF2-40B4-BE49-F238E27FC236}">
-                <a16:creationId xmlns="" xmlns:a16="http://schemas.microsoft.com/office/drawing/2014/main" id="{EEE23D32-80E7-4796-A137-66BF842E4B53}"/>
+                <a16:creationId xmlns:a16="http://schemas.microsoft.com/office/drawing/2014/main" id="{EEE23D32-80E7-4796-A137-66BF842E4B53}"/>
               </a:ext>
             </a:extLst>
           </p:cNvPr>
@@ -2558,7 +2878,7 @@
           <a:p>
             <a:fld id="{1A7E88B7-70CE-4035-AE73-13FA6FB985D4}" type="slidenum">
               <a:rPr lang="pt-BR" smtClean="0"/>
-              <a:t>‹nº›</a:t>
+              <a:t>‹#›</a:t>
             </a:fld>
             <a:endParaRPr lang="pt-BR"/>
           </a:p>
@@ -2599,7 +2919,7 @@
           <p:cNvPr id="2" name="Título 1">
             <a:extLst>
               <a:ext uri="{FF2B5EF4-FFF2-40B4-BE49-F238E27FC236}">
-                <a16:creationId xmlns="" xmlns:a16="http://schemas.microsoft.com/office/drawing/2014/main" id="{2BCE2379-C78F-47E1-8CFC-B846E7AF148D}"/>
+                <a16:creationId xmlns:a16="http://schemas.microsoft.com/office/drawing/2014/main" id="{2BCE2379-C78F-47E1-8CFC-B846E7AF148D}"/>
               </a:ext>
             </a:extLst>
           </p:cNvPr>
@@ -2627,7 +2947,7 @@
           <p:cNvPr id="3" name="Espaço Reservado para Data 2">
             <a:extLst>
               <a:ext uri="{FF2B5EF4-FFF2-40B4-BE49-F238E27FC236}">
-                <a16:creationId xmlns="" xmlns:a16="http://schemas.microsoft.com/office/drawing/2014/main" id="{342600A9-7F92-4E22-9D94-E4717252A817}"/>
+                <a16:creationId xmlns:a16="http://schemas.microsoft.com/office/drawing/2014/main" id="{342600A9-7F92-4E22-9D94-E4717252A817}"/>
               </a:ext>
             </a:extLst>
           </p:cNvPr>
@@ -2645,7 +2965,7 @@
           <a:p>
             <a:fld id="{63289F7E-B80B-496E-81B4-D396C37C9454}" type="datetimeFigureOut">
               <a:rPr lang="pt-BR" smtClean="0"/>
-              <a:t>06/01/2026</a:t>
+              <a:t>18/02/2026</a:t>
             </a:fld>
             <a:endParaRPr lang="pt-BR"/>
           </a:p>
@@ -2656,7 +2976,7 @@
           <p:cNvPr id="4" name="Espaço Reservado para Rodapé 3">
             <a:extLst>
               <a:ext uri="{FF2B5EF4-FFF2-40B4-BE49-F238E27FC236}">
-                <a16:creationId xmlns="" xmlns:a16="http://schemas.microsoft.com/office/drawing/2014/main" id="{192E6BED-F546-40CC-A2DF-99CBA853654E}"/>
+                <a16:creationId xmlns:a16="http://schemas.microsoft.com/office/drawing/2014/main" id="{192E6BED-F546-40CC-A2DF-99CBA853654E}"/>
               </a:ext>
             </a:extLst>
           </p:cNvPr>
@@ -2681,7 +3001,7 @@
           <p:cNvPr id="5" name="Espaço Reservado para Número de Slide 4">
             <a:extLst>
               <a:ext uri="{FF2B5EF4-FFF2-40B4-BE49-F238E27FC236}">
-                <a16:creationId xmlns="" xmlns:a16="http://schemas.microsoft.com/office/drawing/2014/main" id="{6091CC40-A8C4-4063-80EB-CC5099621678}"/>
+                <a16:creationId xmlns:a16="http://schemas.microsoft.com/office/drawing/2014/main" id="{6091CC40-A8C4-4063-80EB-CC5099621678}"/>
               </a:ext>
             </a:extLst>
           </p:cNvPr>
@@ -2699,7 +3019,7 @@
           <a:p>
             <a:fld id="{1A7E88B7-70CE-4035-AE73-13FA6FB985D4}" type="slidenum">
               <a:rPr lang="pt-BR" smtClean="0"/>
-              <a:t>‹nº›</a:t>
+              <a:t>‹#›</a:t>
             </a:fld>
             <a:endParaRPr lang="pt-BR"/>
           </a:p>
@@ -2740,7 +3060,7 @@
           <p:cNvPr id="2" name="Espaço Reservado para Data 1">
             <a:extLst>
               <a:ext uri="{FF2B5EF4-FFF2-40B4-BE49-F238E27FC236}">
-                <a16:creationId xmlns="" xmlns:a16="http://schemas.microsoft.com/office/drawing/2014/main" id="{DD19515C-212C-4EAE-84A3-8FF4BC844F1B}"/>
+                <a16:creationId xmlns:a16="http://schemas.microsoft.com/office/drawing/2014/main" id="{DD19515C-212C-4EAE-84A3-8FF4BC844F1B}"/>
               </a:ext>
             </a:extLst>
           </p:cNvPr>
@@ -2758,7 +3078,7 @@
           <a:p>
             <a:fld id="{63289F7E-B80B-496E-81B4-D396C37C9454}" type="datetimeFigureOut">
               <a:rPr lang="pt-BR" smtClean="0"/>
-              <a:t>06/01/2026</a:t>
+              <a:t>18/02/2026</a:t>
             </a:fld>
             <a:endParaRPr lang="pt-BR"/>
           </a:p>
@@ -2769,7 +3089,7 @@
           <p:cNvPr id="3" name="Espaço Reservado para Rodapé 2">
             <a:extLst>
               <a:ext uri="{FF2B5EF4-FFF2-40B4-BE49-F238E27FC236}">
-                <a16:creationId xmlns="" xmlns:a16="http://schemas.microsoft.com/office/drawing/2014/main" id="{94D3D120-B3E8-4C96-861D-7A4F12F49B3A}"/>
+                <a16:creationId xmlns:a16="http://schemas.microsoft.com/office/drawing/2014/main" id="{94D3D120-B3E8-4C96-861D-7A4F12F49B3A}"/>
               </a:ext>
             </a:extLst>
           </p:cNvPr>
@@ -2794,7 +3114,7 @@
           <p:cNvPr id="4" name="Espaço Reservado para Número de Slide 3">
             <a:extLst>
               <a:ext uri="{FF2B5EF4-FFF2-40B4-BE49-F238E27FC236}">
-                <a16:creationId xmlns="" xmlns:a16="http://schemas.microsoft.com/office/drawing/2014/main" id="{42E49B68-FA1B-468B-9F17-D5C09243D454}"/>
+                <a16:creationId xmlns:a16="http://schemas.microsoft.com/office/drawing/2014/main" id="{42E49B68-FA1B-468B-9F17-D5C09243D454}"/>
               </a:ext>
             </a:extLst>
           </p:cNvPr>
@@ -2812,7 +3132,7 @@
           <a:p>
             <a:fld id="{1A7E88B7-70CE-4035-AE73-13FA6FB985D4}" type="slidenum">
               <a:rPr lang="pt-BR" smtClean="0"/>
-              <a:t>‹nº›</a:t>
+              <a:t>‹#›</a:t>
             </a:fld>
             <a:endParaRPr lang="pt-BR"/>
           </a:p>
@@ -2853,7 +3173,7 @@
           <p:cNvPr id="2" name="Título 1">
             <a:extLst>
               <a:ext uri="{FF2B5EF4-FFF2-40B4-BE49-F238E27FC236}">
-                <a16:creationId xmlns="" xmlns:a16="http://schemas.microsoft.com/office/drawing/2014/main" id="{1C17BCBE-A897-4319-85EC-D87909C24980}"/>
+                <a16:creationId xmlns:a16="http://schemas.microsoft.com/office/drawing/2014/main" id="{1C17BCBE-A897-4319-85EC-D87909C24980}"/>
               </a:ext>
             </a:extLst>
           </p:cNvPr>
@@ -2890,7 +3210,7 @@
           <p:cNvPr id="3" name="Espaço Reservado para Conteúdo 2">
             <a:extLst>
               <a:ext uri="{FF2B5EF4-FFF2-40B4-BE49-F238E27FC236}">
-                <a16:creationId xmlns="" xmlns:a16="http://schemas.microsoft.com/office/drawing/2014/main" id="{4226F885-0204-4913-868B-4B8B82576F17}"/>
+                <a16:creationId xmlns:a16="http://schemas.microsoft.com/office/drawing/2014/main" id="{4226F885-0204-4913-868B-4B8B82576F17}"/>
               </a:ext>
             </a:extLst>
           </p:cNvPr>
@@ -2980,7 +3300,7 @@
           <p:cNvPr id="4" name="Espaço Reservado para Texto 3">
             <a:extLst>
               <a:ext uri="{FF2B5EF4-FFF2-40B4-BE49-F238E27FC236}">
-                <a16:creationId xmlns="" xmlns:a16="http://schemas.microsoft.com/office/drawing/2014/main" id="{00F9F784-A858-441B-8AB5-697098141751}"/>
+                <a16:creationId xmlns:a16="http://schemas.microsoft.com/office/drawing/2014/main" id="{00F9F784-A858-441B-8AB5-697098141751}"/>
               </a:ext>
             </a:extLst>
           </p:cNvPr>
@@ -3051,7 +3371,7 @@
           <p:cNvPr id="5" name="Espaço Reservado para Data 4">
             <a:extLst>
               <a:ext uri="{FF2B5EF4-FFF2-40B4-BE49-F238E27FC236}">
-                <a16:creationId xmlns="" xmlns:a16="http://schemas.microsoft.com/office/drawing/2014/main" id="{A4DC363A-5000-472E-8B17-02E7DCB8840A}"/>
+                <a16:creationId xmlns:a16="http://schemas.microsoft.com/office/drawing/2014/main" id="{A4DC363A-5000-472E-8B17-02E7DCB8840A}"/>
               </a:ext>
             </a:extLst>
           </p:cNvPr>
@@ -3069,7 +3389,7 @@
           <a:p>
             <a:fld id="{63289F7E-B80B-496E-81B4-D396C37C9454}" type="datetimeFigureOut">
               <a:rPr lang="pt-BR" smtClean="0"/>
-              <a:t>06/01/2026</a:t>
+              <a:t>18/02/2026</a:t>
             </a:fld>
             <a:endParaRPr lang="pt-BR"/>
           </a:p>
@@ -3080,7 +3400,7 @@
           <p:cNvPr id="6" name="Espaço Reservado para Rodapé 5">
             <a:extLst>
               <a:ext uri="{FF2B5EF4-FFF2-40B4-BE49-F238E27FC236}">
-                <a16:creationId xmlns="" xmlns:a16="http://schemas.microsoft.com/office/drawing/2014/main" id="{5548425D-2C21-4C56-BAD4-662978775C28}"/>
+                <a16:creationId xmlns:a16="http://schemas.microsoft.com/office/drawing/2014/main" id="{5548425D-2C21-4C56-BAD4-662978775C28}"/>
               </a:ext>
             </a:extLst>
           </p:cNvPr>
@@ -3105,7 +3425,7 @@
           <p:cNvPr id="7" name="Espaço Reservado para Número de Slide 6">
             <a:extLst>
               <a:ext uri="{FF2B5EF4-FFF2-40B4-BE49-F238E27FC236}">
-                <a16:creationId xmlns="" xmlns:a16="http://schemas.microsoft.com/office/drawing/2014/main" id="{C63E9726-E64C-42B2-AE8A-8C235A956B48}"/>
+                <a16:creationId xmlns:a16="http://schemas.microsoft.com/office/drawing/2014/main" id="{C63E9726-E64C-42B2-AE8A-8C235A956B48}"/>
               </a:ext>
             </a:extLst>
           </p:cNvPr>
@@ -3123,7 +3443,7 @@
           <a:p>
             <a:fld id="{1A7E88B7-70CE-4035-AE73-13FA6FB985D4}" type="slidenum">
               <a:rPr lang="pt-BR" smtClean="0"/>
-              <a:t>‹nº›</a:t>
+              <a:t>‹#›</a:t>
             </a:fld>
             <a:endParaRPr lang="pt-BR"/>
           </a:p>
@@ -3164,7 +3484,7 @@
           <p:cNvPr id="2" name="Título 1">
             <a:extLst>
               <a:ext uri="{FF2B5EF4-FFF2-40B4-BE49-F238E27FC236}">
-                <a16:creationId xmlns="" xmlns:a16="http://schemas.microsoft.com/office/drawing/2014/main" id="{11086A78-3E74-450C-96A6-CA8AC37AF772}"/>
+                <a16:creationId xmlns:a16="http://schemas.microsoft.com/office/drawing/2014/main" id="{11086A78-3E74-450C-96A6-CA8AC37AF772}"/>
               </a:ext>
             </a:extLst>
           </p:cNvPr>
@@ -3201,7 +3521,7 @@
           <p:cNvPr id="3" name="Espaço Reservado para Imagem 2">
             <a:extLst>
               <a:ext uri="{FF2B5EF4-FFF2-40B4-BE49-F238E27FC236}">
-                <a16:creationId xmlns="" xmlns:a16="http://schemas.microsoft.com/office/drawing/2014/main" id="{5F5B7312-975A-4DBC-9B2F-3652ADA006FD}"/>
+                <a16:creationId xmlns:a16="http://schemas.microsoft.com/office/drawing/2014/main" id="{5F5B7312-975A-4DBC-9B2F-3652ADA006FD}"/>
               </a:ext>
             </a:extLst>
           </p:cNvPr>
@@ -3268,7 +3588,7 @@
           <p:cNvPr id="4" name="Espaço Reservado para Texto 3">
             <a:extLst>
               <a:ext uri="{FF2B5EF4-FFF2-40B4-BE49-F238E27FC236}">
-                <a16:creationId xmlns="" xmlns:a16="http://schemas.microsoft.com/office/drawing/2014/main" id="{AAF805F5-1DFF-41C6-944C-7D79FE0D0963}"/>
+                <a16:creationId xmlns:a16="http://schemas.microsoft.com/office/drawing/2014/main" id="{AAF805F5-1DFF-41C6-944C-7D79FE0D0963}"/>
               </a:ext>
             </a:extLst>
           </p:cNvPr>
@@ -3339,7 +3659,7 @@
           <p:cNvPr id="5" name="Espaço Reservado para Data 4">
             <a:extLst>
               <a:ext uri="{FF2B5EF4-FFF2-40B4-BE49-F238E27FC236}">
-                <a16:creationId xmlns="" xmlns:a16="http://schemas.microsoft.com/office/drawing/2014/main" id="{02113D81-8665-4516-BD81-C6A1F254EECD}"/>
+                <a16:creationId xmlns:a16="http://schemas.microsoft.com/office/drawing/2014/main" id="{02113D81-8665-4516-BD81-C6A1F254EECD}"/>
               </a:ext>
             </a:extLst>
           </p:cNvPr>
@@ -3357,7 +3677,7 @@
           <a:p>
             <a:fld id="{63289F7E-B80B-496E-81B4-D396C37C9454}" type="datetimeFigureOut">
               <a:rPr lang="pt-BR" smtClean="0"/>
-              <a:t>06/01/2026</a:t>
+              <a:t>18/02/2026</a:t>
             </a:fld>
             <a:endParaRPr lang="pt-BR"/>
           </a:p>
@@ -3368,7 +3688,7 @@
           <p:cNvPr id="6" name="Espaço Reservado para Rodapé 5">
             <a:extLst>
               <a:ext uri="{FF2B5EF4-FFF2-40B4-BE49-F238E27FC236}">
-                <a16:creationId xmlns="" xmlns:a16="http://schemas.microsoft.com/office/drawing/2014/main" id="{2B00C88B-FF32-40AA-A187-727D96FD7862}"/>
+                <a16:creationId xmlns:a16="http://schemas.microsoft.com/office/drawing/2014/main" id="{2B00C88B-FF32-40AA-A187-727D96FD7862}"/>
               </a:ext>
             </a:extLst>
           </p:cNvPr>
@@ -3393,7 +3713,7 @@
           <p:cNvPr id="7" name="Espaço Reservado para Número de Slide 6">
             <a:extLst>
               <a:ext uri="{FF2B5EF4-FFF2-40B4-BE49-F238E27FC236}">
-                <a16:creationId xmlns="" xmlns:a16="http://schemas.microsoft.com/office/drawing/2014/main" id="{A04D1A2D-69F7-4B8F-A730-BC26DC340BA6}"/>
+                <a16:creationId xmlns:a16="http://schemas.microsoft.com/office/drawing/2014/main" id="{A04D1A2D-69F7-4B8F-A730-BC26DC340BA6}"/>
               </a:ext>
             </a:extLst>
           </p:cNvPr>
@@ -3411,7 +3731,7 @@
           <a:p>
             <a:fld id="{1A7E88B7-70CE-4035-AE73-13FA6FB985D4}" type="slidenum">
               <a:rPr lang="pt-BR" smtClean="0"/>
-              <a:t>‹nº›</a:t>
+              <a:t>‹#›</a:t>
             </a:fld>
             <a:endParaRPr lang="pt-BR"/>
           </a:p>
@@ -3457,7 +3777,7 @@
           <p:cNvPr id="2" name="Espaço Reservado para Título 1">
             <a:extLst>
               <a:ext uri="{FF2B5EF4-FFF2-40B4-BE49-F238E27FC236}">
-                <a16:creationId xmlns="" xmlns:a16="http://schemas.microsoft.com/office/drawing/2014/main" id="{E69A0273-1966-4A1B-9370-4C1CE5036371}"/>
+                <a16:creationId xmlns:a16="http://schemas.microsoft.com/office/drawing/2014/main" id="{E69A0273-1966-4A1B-9370-4C1CE5036371}"/>
               </a:ext>
             </a:extLst>
           </p:cNvPr>
@@ -3495,7 +3815,7 @@
           <p:cNvPr id="3" name="Espaço Reservado para Texto 2">
             <a:extLst>
               <a:ext uri="{FF2B5EF4-FFF2-40B4-BE49-F238E27FC236}">
-                <a16:creationId xmlns="" xmlns:a16="http://schemas.microsoft.com/office/drawing/2014/main" id="{3B9CF87A-0448-49A7-AB25-EBC1D56A40EF}"/>
+                <a16:creationId xmlns:a16="http://schemas.microsoft.com/office/drawing/2014/main" id="{3B9CF87A-0448-49A7-AB25-EBC1D56A40EF}"/>
               </a:ext>
             </a:extLst>
           </p:cNvPr>
@@ -3562,7 +3882,7 @@
           <p:cNvPr id="4" name="Espaço Reservado para Data 3">
             <a:extLst>
               <a:ext uri="{FF2B5EF4-FFF2-40B4-BE49-F238E27FC236}">
-                <a16:creationId xmlns="" xmlns:a16="http://schemas.microsoft.com/office/drawing/2014/main" id="{2EF7B1F2-BB5A-44D0-816D-16AD2C71430E}"/>
+                <a16:creationId xmlns:a16="http://schemas.microsoft.com/office/drawing/2014/main" id="{2EF7B1F2-BB5A-44D0-816D-16AD2C71430E}"/>
               </a:ext>
             </a:extLst>
           </p:cNvPr>
@@ -3598,7 +3918,7 @@
           <a:p>
             <a:fld id="{63289F7E-B80B-496E-81B4-D396C37C9454}" type="datetimeFigureOut">
               <a:rPr lang="pt-BR" smtClean="0"/>
-              <a:t>06/01/2026</a:t>
+              <a:t>18/02/2026</a:t>
             </a:fld>
             <a:endParaRPr lang="pt-BR"/>
           </a:p>
@@ -3609,7 +3929,7 @@
           <p:cNvPr id="5" name="Espaço Reservado para Rodapé 4">
             <a:extLst>
               <a:ext uri="{FF2B5EF4-FFF2-40B4-BE49-F238E27FC236}">
-                <a16:creationId xmlns="" xmlns:a16="http://schemas.microsoft.com/office/drawing/2014/main" id="{C703F94C-2CC8-4DAA-BC35-14FC3E841DCD}"/>
+                <a16:creationId xmlns:a16="http://schemas.microsoft.com/office/drawing/2014/main" id="{C703F94C-2CC8-4DAA-BC35-14FC3E841DCD}"/>
               </a:ext>
             </a:extLst>
           </p:cNvPr>
@@ -3652,7 +3972,7 @@
           <p:cNvPr id="6" name="Espaço Reservado para Número de Slide 5">
             <a:extLst>
               <a:ext uri="{FF2B5EF4-FFF2-40B4-BE49-F238E27FC236}">
-                <a16:creationId xmlns="" xmlns:a16="http://schemas.microsoft.com/office/drawing/2014/main" id="{64051336-7048-457A-8B61-D94291D71648}"/>
+                <a16:creationId xmlns:a16="http://schemas.microsoft.com/office/drawing/2014/main" id="{64051336-7048-457A-8B61-D94291D71648}"/>
               </a:ext>
             </a:extLst>
           </p:cNvPr>
@@ -3688,7 +4008,7 @@
           <a:p>
             <a:fld id="{1A7E88B7-70CE-4035-AE73-13FA6FB985D4}" type="slidenum">
               <a:rPr lang="pt-BR" smtClean="0"/>
-              <a:t>‹nº›</a:t>
+              <a:t>‹#›</a:t>
             </a:fld>
             <a:endParaRPr lang="pt-BR"/>
           </a:p>
@@ -4020,7 +4340,7 @@
           <p:cNvPr id="4" name="CaixaDeTexto 3">
             <a:extLst>
               <a:ext uri="{FF2B5EF4-FFF2-40B4-BE49-F238E27FC236}">
-                <a16:creationId xmlns="" xmlns:a16="http://schemas.microsoft.com/office/drawing/2014/main" id="{430EB894-B7D4-434C-9D1A-A14094D9BEEC}"/>
+                <a16:creationId xmlns:a16="http://schemas.microsoft.com/office/drawing/2014/main" id="{430EB894-B7D4-434C-9D1A-A14094D9BEEC}"/>
               </a:ext>
             </a:extLst>
           </p:cNvPr>
@@ -4044,23 +4364,16 @@
           <a:lstStyle/>
           <a:p>
             <a:r>
-              <a:rPr lang="pt-BR" sz="2000" dirty="0" smtClean="0"/>
+              <a:rPr lang="pt-BR" sz="2000" dirty="0"/>
               <a:t>Felipe A. P. de Figueiredo</a:t>
             </a:r>
-            <a:endParaRPr lang="pt-BR" sz="2000" dirty="0"/>
           </a:p>
           <a:p>
             <a:r>
               <a:rPr lang="pt-BR" dirty="0">
                 <a:hlinkClick r:id="rId3"/>
               </a:rPr>
-              <a:t>f</a:t>
-            </a:r>
-            <a:r>
-              <a:rPr lang="pt-BR" dirty="0" smtClean="0">
-                <a:hlinkClick r:id="rId3"/>
-              </a:rPr>
-              <a:t>elipe.figueiredo@Inatel.br</a:t>
+              <a:t>felipe.figueiredo@Inatel.br</a:t>
             </a:r>
             <a:endParaRPr lang="pt-BR" dirty="0"/>
           </a:p>
@@ -4071,7 +4384,7 @@
           <p:cNvPr id="1026" name="Picture 2" descr="Logo">
             <a:extLst>
               <a:ext uri="{FF2B5EF4-FFF2-40B4-BE49-F238E27FC236}">
-                <a16:creationId xmlns="" xmlns:a16="http://schemas.microsoft.com/office/drawing/2014/main" id="{3F2642E0-4F6A-4196-8F58-E77D36E9A33F}"/>
+                <a16:creationId xmlns:a16="http://schemas.microsoft.com/office/drawing/2014/main" id="{3F2642E0-4F6A-4196-8F58-E77D36E9A33F}"/>
               </a:ext>
             </a:extLst>
           </p:cNvPr>
@@ -4116,7 +4429,7 @@
           <p:cNvPr id="5122" name="Picture 2" descr="Image result for machine learning">
             <a:extLst>
               <a:ext uri="{FF2B5EF4-FFF2-40B4-BE49-F238E27FC236}">
-                <a16:creationId xmlns="" xmlns:a16="http://schemas.microsoft.com/office/drawing/2014/main" id="{810CE0A2-4102-44A6-A370-175E7896CDCB}"/>
+                <a16:creationId xmlns:a16="http://schemas.microsoft.com/office/drawing/2014/main" id="{810CE0A2-4102-44A6-A370-175E7896CDCB}"/>
               </a:ext>
             </a:extLst>
           </p:cNvPr>
@@ -4161,7 +4474,7 @@
           <p:cNvPr id="7" name="Título 1">
             <a:extLst>
               <a:ext uri="{FF2B5EF4-FFF2-40B4-BE49-F238E27FC236}">
-                <a16:creationId xmlns:a16="http://schemas.microsoft.com/office/drawing/2014/main" xmlns="" id="{32666AC8-2E17-4DB4-B0F5-60C640CCFD2E}"/>
+                <a16:creationId xmlns:a16="http://schemas.microsoft.com/office/drawing/2014/main" id="{32666AC8-2E17-4DB4-B0F5-60C640CCFD2E}"/>
               </a:ext>
             </a:extLst>
           </p:cNvPr>
@@ -4185,21 +4498,16 @@
           <a:lstStyle/>
           <a:p>
             <a:r>
-              <a:rPr lang="pt-BR" sz="6600" dirty="0" smtClean="0"/>
+              <a:rPr lang="pt-BR" sz="6600" dirty="0"/>
               <a:t>C24 – Inteligência Artificial:</a:t>
             </a:r>
-            <a:r>
-              <a:rPr lang="pt-BR" sz="7200"/>
-              <a:t/>
-            </a:r>
             <a:br>
-              <a:rPr lang="pt-BR" sz="7200"/>
+              <a:rPr lang="pt-BR" sz="7200" dirty="0"/>
             </a:br>
             <a:r>
-              <a:rPr lang="pt-BR" sz="7200" b="1" i="1" smtClean="0"/>
-              <a:t>XXX</a:t>
-            </a:r>
-            <a:endParaRPr lang="pt-BR" sz="7200" b="1" i="1" dirty="0"/>
+              <a:rPr lang="pt-BR" sz="7200" b="1" i="1" dirty="0"/>
+              <a:t>Classificação</a:t>
+            </a:r>
           </a:p>
         </p:txBody>
       </p:sp>
@@ -4235,10 +4543,10 @@
       </p:grpSpPr>
       <p:sp>
         <p:nvSpPr>
-          <p:cNvPr id="2" name="Título 1">
+          <p:cNvPr id="2" name="Title 1">
             <a:extLst>
               <a:ext uri="{FF2B5EF4-FFF2-40B4-BE49-F238E27FC236}">
-                <a16:creationId xmlns="" xmlns:a16="http://schemas.microsoft.com/office/drawing/2014/main" id="{3CA32550-8C76-B013-2EC7-989D8C3B19BE}"/>
+                <a16:creationId xmlns:a16="http://schemas.microsoft.com/office/drawing/2014/main" id="{5800B6E8-C5D5-B13B-B9FA-30F92A8BE6C2}"/>
               </a:ext>
             </a:extLst>
           </p:cNvPr>
@@ -4255,18 +4563,27 @@
           <a:lstStyle/>
           <a:p>
             <a:r>
-              <a:rPr lang="pt-BR" dirty="0"/>
-              <a:t>Referências</a:t>
-            </a:r>
-          </a:p>
-        </p:txBody>
-      </p:sp>
-      <p:sp>
-        <p:nvSpPr>
-          <p:cNvPr id="3" name="Espaço Reservado para Conteúdo 2">
+              <a:rPr lang="en-US" dirty="0" err="1"/>
+              <a:t>Classificação</a:t>
+            </a:r>
+            <a:r>
+              <a:rPr lang="en-US" dirty="0"/>
+              <a:t> </a:t>
+            </a:r>
+            <a:r>
+              <a:rPr lang="en-US" dirty="0" err="1"/>
+              <a:t>binária</a:t>
+            </a:r>
+            <a:endParaRPr lang="en-US" dirty="0"/>
+          </a:p>
+        </p:txBody>
+      </p:sp>
+      <p:sp>
+        <p:nvSpPr>
+          <p:cNvPr id="3" name="Content Placeholder 2">
             <a:extLst>
               <a:ext uri="{FF2B5EF4-FFF2-40B4-BE49-F238E27FC236}">
-                <a16:creationId xmlns="" xmlns:a16="http://schemas.microsoft.com/office/drawing/2014/main" id="{EF043237-7757-7557-B63E-D4EB5152D44B}"/>
+                <a16:creationId xmlns:a16="http://schemas.microsoft.com/office/drawing/2014/main" id="{C496319A-7329-EA87-2675-D63CB7368AAB}"/>
               </a:ext>
             </a:extLst>
           </p:cNvPr>
@@ -4282,14 +4599,54 @@
           <a:bodyPr/>
           <a:lstStyle/>
           <a:p>
-            <a:endParaRPr lang="pt-BR"/>
+            <a:r>
+              <a:rPr lang="pt-BR" dirty="0"/>
+              <a:t>Representação do rótulo</a:t>
+            </a:r>
+          </a:p>
+          <a:p>
+            <a:pPr lvl="1"/>
+            <a:r>
+              <a:rPr lang="pt-BR" dirty="0"/>
+              <a:t>0 ou 1</a:t>
+            </a:r>
+          </a:p>
+          <a:p>
+            <a:pPr lvl="1"/>
+            <a:r>
+              <a:rPr lang="pt-BR" dirty="0"/>
+              <a:t>−1 ou +1 (em alguns poucos modelos)</a:t>
+            </a:r>
+          </a:p>
+          <a:p>
+            <a:r>
+              <a:rPr lang="pt-BR" dirty="0"/>
+              <a:t>Exemplo: detecção de spam</a:t>
+            </a:r>
+          </a:p>
+          <a:p>
+            <a:pPr lvl="1"/>
+            <a:r>
+              <a:rPr lang="pt-BR" dirty="0"/>
+              <a:t>spam = 1</a:t>
+            </a:r>
+          </a:p>
+          <a:p>
+            <a:pPr lvl="1"/>
+            <a:r>
+              <a:rPr lang="pt-BR" dirty="0"/>
+              <a:t>não spam = 0</a:t>
+            </a:r>
+          </a:p>
+          <a:p>
+            <a:endParaRPr lang="en-US" dirty="0"/>
           </a:p>
         </p:txBody>
       </p:sp>
     </p:spTree>
     <p:extLst>
       <p:ext uri="{BB962C8B-B14F-4D97-AF65-F5344CB8AC3E}">
-        <p14:creationId xmlns:p14="http://schemas.microsoft.com/office/powerpoint/2010/main" val="1787264919"/>
+        <p14:creationId xmlns:p14="http://schemas.microsoft.com/office/powerpoint/2010/main" val="1369832334"/>
       </p:ext>
     </p:extLst>
   </p:cSld>
@@ -4318,10 +4675,1136 @@
       </p:grpSpPr>
       <p:sp>
         <p:nvSpPr>
+          <p:cNvPr id="2" name="Title 1"/>
+          <p:cNvSpPr>
+            <a:spLocks noGrp="1"/>
+          </p:cNvSpPr>
+          <p:nvPr>
+            <p:ph type="title"/>
+          </p:nvPr>
+        </p:nvSpPr>
+        <p:spPr/>
+        <p:txBody>
+          <a:bodyPr/>
+          <a:lstStyle/>
+          <a:p>
+            <a:r>
+              <a:rPr lang="en-US" dirty="0" err="1"/>
+              <a:t>Classificação</a:t>
+            </a:r>
+            <a:r>
+              <a:rPr lang="en-US" dirty="0"/>
+              <a:t> </a:t>
+            </a:r>
+            <a:r>
+              <a:rPr lang="en-US" dirty="0" err="1"/>
+              <a:t>binária</a:t>
+            </a:r>
+            <a:endParaRPr lang="pt-BR" dirty="0"/>
+          </a:p>
+        </p:txBody>
+      </p:sp>
+      <mc:AlternateContent xmlns:mc="http://schemas.openxmlformats.org/markup-compatibility/2006">
+        <mc:Choice xmlns:a14="http://schemas.microsoft.com/office/drawing/2010/main" Requires="a14">
+          <p:sp>
+            <p:nvSpPr>
+              <p:cNvPr id="3" name="Content Placeholder 2"/>
+              <p:cNvSpPr>
+                <a:spLocks noGrp="1"/>
+              </p:cNvSpPr>
+              <p:nvPr>
+                <p:ph idx="1"/>
+              </p:nvPr>
+            </p:nvSpPr>
+            <p:spPr>
+              <a:xfrm>
+                <a:off x="838199" y="1825624"/>
+                <a:ext cx="11215255" cy="5032376"/>
+              </a:xfrm>
+            </p:spPr>
+            <p:txBody>
+              <a:bodyPr>
+                <a:normAutofit/>
+              </a:bodyPr>
+              <a:lstStyle/>
+              <a:p>
+                <a:r>
+                  <a:rPr lang="pt-BR" dirty="0"/>
+                  <a:t>O classificador tem </a:t>
+                </a:r>
+                <a:r>
+                  <a:rPr lang="pt-BR" b="1" dirty="0">
+                    <a:solidFill>
+                      <a:srgbClr val="00B050"/>
+                    </a:solidFill>
+                  </a:rPr>
+                  <a:t>única saída escalar </a:t>
+                </a:r>
+                <a:r>
+                  <a:rPr lang="pt-BR" dirty="0"/>
+                  <a:t>para indicar a </a:t>
+                </a:r>
+                <a:r>
+                  <a:rPr lang="pt-BR" b="1" dirty="0"/>
+                  <a:t>classe</a:t>
+                </a:r>
+                <a:r>
+                  <a:rPr lang="pt-BR" dirty="0"/>
+                  <a:t> correspondente ao </a:t>
+                </a:r>
+                <a:r>
+                  <a:rPr lang="pt-BR" b="1" dirty="0"/>
+                  <a:t>vetor de atributos, </a:t>
+                </a:r>
+                <a14:m>
+                  <m:oMath xmlns:m="http://schemas.openxmlformats.org/officeDocument/2006/math">
+                    <m:r>
+                      <a:rPr lang="pt-BR" b="1" i="1">
+                        <a:latin typeface="Cambria Math" panose="02040503050406030204" pitchFamily="18" charset="0"/>
+                      </a:rPr>
+                      <m:t>𝒙</m:t>
+                    </m:r>
+                  </m:oMath>
+                </a14:m>
+                <a:r>
+                  <a:rPr lang="pt-BR" dirty="0"/>
+                  <a:t>:</a:t>
+                </a:r>
+              </a:p>
+              <a:p>
+                <a:pPr marL="0" indent="0">
+                  <a:buNone/>
+                </a:pPr>
+                <a14:m>
+                  <m:oMathPara xmlns:m="http://schemas.openxmlformats.org/officeDocument/2006/math">
+                    <m:oMathParaPr>
+                      <m:jc m:val="centerGroup"/>
+                    </m:oMathParaPr>
+                    <m:oMath xmlns:m="http://schemas.openxmlformats.org/officeDocument/2006/math">
+                      <m:r>
+                        <a:rPr lang="pt-BR" b="0" i="1" smtClean="0">
+                          <a:latin typeface="Cambria Math" panose="02040503050406030204" pitchFamily="18" charset="0"/>
+                        </a:rPr>
+                        <m:t>𝑦</m:t>
+                      </m:r>
+                      <m:d>
+                        <m:dPr>
+                          <m:ctrlPr>
+                            <a:rPr lang="pt-BR" i="1" smtClean="0">
+                              <a:latin typeface="Cambria Math" panose="02040503050406030204" pitchFamily="18" charset="0"/>
+                            </a:rPr>
+                          </m:ctrlPr>
+                        </m:dPr>
+                        <m:e>
+                          <m:r>
+                            <a:rPr lang="pt-BR" b="0" i="1" smtClean="0">
+                              <a:latin typeface="Cambria Math" panose="02040503050406030204" pitchFamily="18" charset="0"/>
+                            </a:rPr>
+                            <m:t>𝑖</m:t>
+                          </m:r>
+                        </m:e>
+                      </m:d>
+                      <m:r>
+                        <a:rPr lang="pt-BR" b="1" i="1" smtClean="0">
+                          <a:latin typeface="Cambria Math" panose="02040503050406030204" pitchFamily="18" charset="0"/>
+                        </a:rPr>
+                        <m:t>=</m:t>
+                      </m:r>
+                      <m:d>
+                        <m:dPr>
+                          <m:begChr m:val="{"/>
+                          <m:endChr m:val=""/>
+                          <m:ctrlPr>
+                            <a:rPr lang="pt-BR" b="1" i="1" smtClean="0">
+                              <a:latin typeface="Cambria Math" panose="02040503050406030204" pitchFamily="18" charset="0"/>
+                            </a:rPr>
+                          </m:ctrlPr>
+                        </m:dPr>
+                        <m:e>
+                          <m:eqArr>
+                            <m:eqArrPr>
+                              <m:ctrlPr>
+                                <a:rPr lang="pt-BR" b="1" i="1" smtClean="0">
+                                  <a:latin typeface="Cambria Math" panose="02040503050406030204" pitchFamily="18" charset="0"/>
+                                </a:rPr>
+                              </m:ctrlPr>
+                            </m:eqArrPr>
+                            <m:e>
+                              <m:r>
+                                <a:rPr lang="pt-BR" b="0" i="1" smtClean="0">
+                                  <a:latin typeface="Cambria Math" panose="02040503050406030204" pitchFamily="18" charset="0"/>
+                                </a:rPr>
+                                <m:t>0</m:t>
+                              </m:r>
+                              <m:r>
+                                <a:rPr lang="pt-BR" b="1" i="1" smtClean="0">
+                                  <a:latin typeface="Cambria Math" panose="02040503050406030204" pitchFamily="18" charset="0"/>
+                                </a:rPr>
+                                <m:t>,  </m:t>
+                              </m:r>
+                              <m:r>
+                                <a:rPr lang="pt-BR" b="1" i="1" smtClean="0">
+                                  <a:latin typeface="Cambria Math" panose="02040503050406030204" pitchFamily="18" charset="0"/>
+                                </a:rPr>
+                                <m:t>𝒙</m:t>
+                              </m:r>
+                              <m:d>
+                                <m:dPr>
+                                  <m:ctrlPr>
+                                    <a:rPr lang="pt-BR" b="1" i="1" smtClean="0">
+                                      <a:latin typeface="Cambria Math" panose="02040503050406030204" pitchFamily="18" charset="0"/>
+                                    </a:rPr>
+                                  </m:ctrlPr>
+                                </m:dPr>
+                                <m:e>
+                                  <m:r>
+                                    <a:rPr lang="pt-BR" b="0" i="1" smtClean="0">
+                                      <a:latin typeface="Cambria Math" panose="02040503050406030204" pitchFamily="18" charset="0"/>
+                                    </a:rPr>
+                                    <m:t>𝑖</m:t>
+                                  </m:r>
+                                </m:e>
+                              </m:d>
+                              <m:r>
+                                <a:rPr lang="pt-BR" b="1" i="1" smtClean="0">
+                                  <a:latin typeface="Cambria Math" panose="02040503050406030204" pitchFamily="18" charset="0"/>
+                                </a:rPr>
+                                <m:t> </m:t>
+                              </m:r>
+                              <m:r>
+                                <a:rPr lang="pt-BR" b="0" i="1" smtClean="0">
+                                  <a:latin typeface="Cambria Math" panose="02040503050406030204" pitchFamily="18" charset="0"/>
+                                  <a:ea typeface="Cambria Math" panose="02040503050406030204" pitchFamily="18" charset="0"/>
+                                </a:rPr>
+                                <m:t>𝜖</m:t>
+                              </m:r>
+                              <m:sSub>
+                                <m:sSubPr>
+                                  <m:ctrlPr>
+                                    <a:rPr lang="pt-BR" i="1">
+                                      <a:latin typeface="Cambria Math" panose="02040503050406030204" pitchFamily="18" charset="0"/>
+                                    </a:rPr>
+                                  </m:ctrlPr>
+                                </m:sSubPr>
+                                <m:e>
+                                  <m:r>
+                                    <a:rPr lang="pt-BR" b="0" i="1" smtClean="0">
+                                      <a:latin typeface="Cambria Math" panose="02040503050406030204" pitchFamily="18" charset="0"/>
+                                    </a:rPr>
+                                    <m:t> </m:t>
+                                  </m:r>
+                                  <m:r>
+                                    <a:rPr lang="pt-BR" i="1">
+                                      <a:latin typeface="Cambria Math" panose="02040503050406030204" pitchFamily="18" charset="0"/>
+                                    </a:rPr>
+                                    <m:t>𝐶</m:t>
+                                  </m:r>
+                                </m:e>
+                                <m:sub>
+                                  <m:r>
+                                    <a:rPr lang="pt-BR" i="1">
+                                      <a:latin typeface="Cambria Math" panose="02040503050406030204" pitchFamily="18" charset="0"/>
+                                    </a:rPr>
+                                    <m:t>1</m:t>
+                                  </m:r>
+                                </m:sub>
+                              </m:sSub>
+                            </m:e>
+                            <m:e>
+                              <m:r>
+                                <a:rPr lang="pt-BR" b="1" i="1" smtClean="0">
+                                  <a:latin typeface="Cambria Math" panose="02040503050406030204" pitchFamily="18" charset="0"/>
+                                </a:rPr>
+                                <m:t>&amp;</m:t>
+                              </m:r>
+                              <m:r>
+                                <a:rPr lang="pt-BR" b="0" i="1" smtClean="0">
+                                  <a:latin typeface="Cambria Math" panose="02040503050406030204" pitchFamily="18" charset="0"/>
+                                </a:rPr>
+                                <m:t>1</m:t>
+                              </m:r>
+                              <m:r>
+                                <a:rPr lang="pt-BR" b="1" i="1" smtClean="0">
+                                  <a:latin typeface="Cambria Math" panose="02040503050406030204" pitchFamily="18" charset="0"/>
+                                </a:rPr>
+                                <m:t>,  </m:t>
+                              </m:r>
+                              <m:r>
+                                <a:rPr lang="pt-BR" b="1" i="1" smtClean="0">
+                                  <a:latin typeface="Cambria Math" panose="02040503050406030204" pitchFamily="18" charset="0"/>
+                                </a:rPr>
+                                <m:t>𝒙</m:t>
+                              </m:r>
+                              <m:d>
+                                <m:dPr>
+                                  <m:ctrlPr>
+                                    <a:rPr lang="pt-BR" b="1" i="1" smtClean="0">
+                                      <a:latin typeface="Cambria Math" panose="02040503050406030204" pitchFamily="18" charset="0"/>
+                                    </a:rPr>
+                                  </m:ctrlPr>
+                                </m:dPr>
+                                <m:e>
+                                  <m:r>
+                                    <a:rPr lang="pt-BR" b="0" i="1" smtClean="0">
+                                      <a:latin typeface="Cambria Math" panose="02040503050406030204" pitchFamily="18" charset="0"/>
+                                    </a:rPr>
+                                    <m:t>𝑖</m:t>
+                                  </m:r>
+                                </m:e>
+                              </m:d>
+                              <m:r>
+                                <a:rPr lang="pt-BR" b="0" i="1" smtClean="0">
+                                  <a:latin typeface="Cambria Math" panose="02040503050406030204" pitchFamily="18" charset="0"/>
+                                </a:rPr>
+                                <m:t> </m:t>
+                              </m:r>
+                              <m:r>
+                                <a:rPr lang="pt-BR" i="1">
+                                  <a:latin typeface="Cambria Math" panose="02040503050406030204" pitchFamily="18" charset="0"/>
+                                  <a:ea typeface="Cambria Math" panose="02040503050406030204" pitchFamily="18" charset="0"/>
+                                </a:rPr>
+                                <m:t>𝜖</m:t>
+                              </m:r>
+                              <m:sSub>
+                                <m:sSubPr>
+                                  <m:ctrlPr>
+                                    <a:rPr lang="pt-BR" i="1">
+                                      <a:latin typeface="Cambria Math" panose="02040503050406030204" pitchFamily="18" charset="0"/>
+                                    </a:rPr>
+                                  </m:ctrlPr>
+                                </m:sSubPr>
+                                <m:e>
+                                  <m:r>
+                                    <a:rPr lang="pt-BR" i="1">
+                                      <a:latin typeface="Cambria Math" panose="02040503050406030204" pitchFamily="18" charset="0"/>
+                                    </a:rPr>
+                                    <m:t> </m:t>
+                                  </m:r>
+                                  <m:r>
+                                    <a:rPr lang="pt-BR" i="1">
+                                      <a:latin typeface="Cambria Math" panose="02040503050406030204" pitchFamily="18" charset="0"/>
+                                    </a:rPr>
+                                    <m:t>𝐶</m:t>
+                                  </m:r>
+                                </m:e>
+                                <m:sub>
+                                  <m:r>
+                                    <a:rPr lang="pt-BR" b="0" i="1" smtClean="0">
+                                      <a:latin typeface="Cambria Math" panose="02040503050406030204" pitchFamily="18" charset="0"/>
+                                    </a:rPr>
+                                    <m:t>2</m:t>
+                                  </m:r>
+                                </m:sub>
+                              </m:sSub>
+                            </m:e>
+                          </m:eqArr>
+                        </m:e>
+                      </m:d>
+                      <m:r>
+                        <a:rPr lang="pt-BR" b="1" i="1" smtClean="0">
+                          <a:latin typeface="Cambria Math" panose="02040503050406030204" pitchFamily="18" charset="0"/>
+                        </a:rPr>
+                        <m:t>,</m:t>
+                      </m:r>
+                    </m:oMath>
+                  </m:oMathPara>
+                </a14:m>
+                <a:endParaRPr lang="pt-BR" b="1" dirty="0"/>
+              </a:p>
+              <a:p>
+                <a:pPr marL="0" indent="0">
+                  <a:buNone/>
+                </a:pPr>
+                <a:r>
+                  <a:rPr lang="pt-BR" dirty="0"/>
+                  <a:t>onde </a:t>
+                </a:r>
+                <a14:m>
+                  <m:oMath xmlns:m="http://schemas.openxmlformats.org/officeDocument/2006/math">
+                    <m:sSub>
+                      <m:sSubPr>
+                        <m:ctrlPr>
+                          <a:rPr lang="pt-BR" i="1">
+                            <a:latin typeface="Cambria Math" panose="02040503050406030204" pitchFamily="18" charset="0"/>
+                          </a:rPr>
+                        </m:ctrlPr>
+                      </m:sSubPr>
+                      <m:e>
+                        <m:r>
+                          <a:rPr lang="pt-BR" b="0" i="1">
+                            <a:latin typeface="Cambria Math" panose="02040503050406030204" pitchFamily="18" charset="0"/>
+                          </a:rPr>
+                          <m:t>𝐶</m:t>
+                        </m:r>
+                      </m:e>
+                      <m:sub>
+                        <m:r>
+                          <a:rPr lang="pt-BR" b="0" i="1">
+                            <a:latin typeface="Cambria Math" panose="02040503050406030204" pitchFamily="18" charset="0"/>
+                          </a:rPr>
+                          <m:t>1</m:t>
+                        </m:r>
+                      </m:sub>
+                    </m:sSub>
+                  </m:oMath>
+                </a14:m>
+                <a:r>
+                  <a:rPr lang="pt-BR" dirty="0"/>
+                  <a:t> e </a:t>
+                </a:r>
+                <a14:m>
+                  <m:oMath xmlns:m="http://schemas.openxmlformats.org/officeDocument/2006/math">
+                    <m:sSub>
+                      <m:sSubPr>
+                        <m:ctrlPr>
+                          <a:rPr lang="pt-BR" i="1">
+                            <a:latin typeface="Cambria Math" panose="02040503050406030204" pitchFamily="18" charset="0"/>
+                          </a:rPr>
+                        </m:ctrlPr>
+                      </m:sSubPr>
+                      <m:e>
+                        <m:r>
+                          <a:rPr lang="pt-BR" i="1">
+                            <a:latin typeface="Cambria Math" panose="02040503050406030204" pitchFamily="18" charset="0"/>
+                          </a:rPr>
+                          <m:t>𝐶</m:t>
+                        </m:r>
+                      </m:e>
+                      <m:sub>
+                        <m:r>
+                          <a:rPr lang="pt-BR" b="0" i="1" smtClean="0">
+                            <a:latin typeface="Cambria Math" panose="02040503050406030204" pitchFamily="18" charset="0"/>
+                          </a:rPr>
+                          <m:t>2</m:t>
+                        </m:r>
+                      </m:sub>
+                    </m:sSub>
+                  </m:oMath>
+                </a14:m>
+                <a:r>
+                  <a:rPr lang="pt-BR" dirty="0"/>
+                  <a:t> representam as classe negativa e positiva, </a:t>
+                </a:r>
+                <a:r>
+                  <a:rPr lang="pt-BR" dirty="0" err="1"/>
+                  <a:t>respecitvamebnte</a:t>
+                </a:r>
+                <a:r>
+                  <a:rPr lang="pt-BR" dirty="0"/>
+                  <a:t>.</a:t>
+                </a:r>
+              </a:p>
+              <a:p>
+                <a:r>
+                  <a:rPr lang="pt-BR"/>
+                  <a:t>Também </a:t>
+                </a:r>
+                <a:r>
+                  <a:rPr lang="pt-BR" dirty="0"/>
+                  <a:t>é possível utilizar </a:t>
+                </a:r>
+                <a14:m>
+                  <m:oMath xmlns:m="http://schemas.openxmlformats.org/officeDocument/2006/math">
+                    <m:r>
+                      <a:rPr lang="pt-BR" i="1">
+                        <a:latin typeface="Cambria Math" panose="02040503050406030204" pitchFamily="18" charset="0"/>
+                      </a:rPr>
+                      <m:t>𝑦</m:t>
+                    </m:r>
+                    <m:d>
+                      <m:dPr>
+                        <m:ctrlPr>
+                          <a:rPr lang="pt-BR" i="1">
+                            <a:latin typeface="Cambria Math" panose="02040503050406030204" pitchFamily="18" charset="0"/>
+                          </a:rPr>
+                        </m:ctrlPr>
+                      </m:dPr>
+                      <m:e>
+                        <m:r>
+                          <a:rPr lang="pt-BR" i="1">
+                            <a:latin typeface="Cambria Math" panose="02040503050406030204" pitchFamily="18" charset="0"/>
+                          </a:rPr>
+                          <m:t>𝑖</m:t>
+                        </m:r>
+                      </m:e>
+                    </m:d>
+                    <m:r>
+                      <a:rPr lang="pt-BR" b="0" i="1" smtClean="0">
+                        <a:latin typeface="Cambria Math" panose="02040503050406030204" pitchFamily="18" charset="0"/>
+                      </a:rPr>
+                      <m:t>=−1</m:t>
+                    </m:r>
+                  </m:oMath>
+                </a14:m>
+                <a:r>
+                  <a:rPr lang="pt-BR" dirty="0"/>
+                  <a:t> para </a:t>
+                </a:r>
+                <a14:m>
+                  <m:oMath xmlns:m="http://schemas.openxmlformats.org/officeDocument/2006/math">
+                    <m:r>
+                      <a:rPr lang="pt-BR" b="1" i="1">
+                        <a:latin typeface="Cambria Math" panose="02040503050406030204" pitchFamily="18" charset="0"/>
+                      </a:rPr>
+                      <m:t>𝒙</m:t>
+                    </m:r>
+                    <m:d>
+                      <m:dPr>
+                        <m:ctrlPr>
+                          <a:rPr lang="pt-BR" b="1" i="1">
+                            <a:latin typeface="Cambria Math" panose="02040503050406030204" pitchFamily="18" charset="0"/>
+                          </a:rPr>
+                        </m:ctrlPr>
+                      </m:dPr>
+                      <m:e>
+                        <m:r>
+                          <a:rPr lang="pt-BR" i="1">
+                            <a:latin typeface="Cambria Math" panose="02040503050406030204" pitchFamily="18" charset="0"/>
+                          </a:rPr>
+                          <m:t>𝑖</m:t>
+                        </m:r>
+                      </m:e>
+                    </m:d>
+                    <m:r>
+                      <a:rPr lang="pt-BR" i="1">
+                        <a:latin typeface="Cambria Math" panose="02040503050406030204" pitchFamily="18" charset="0"/>
+                        <a:ea typeface="Cambria Math" panose="02040503050406030204" pitchFamily="18" charset="0"/>
+                      </a:rPr>
+                      <m:t>∈</m:t>
+                    </m:r>
+                    <m:sSub>
+                      <m:sSubPr>
+                        <m:ctrlPr>
+                          <a:rPr lang="pt-BR" i="1">
+                            <a:latin typeface="Cambria Math" panose="02040503050406030204" pitchFamily="18" charset="0"/>
+                          </a:rPr>
+                        </m:ctrlPr>
+                      </m:sSubPr>
+                      <m:e>
+                        <m:r>
+                          <a:rPr lang="pt-BR" i="1">
+                            <a:latin typeface="Cambria Math" panose="02040503050406030204" pitchFamily="18" charset="0"/>
+                          </a:rPr>
+                          <m:t> </m:t>
+                        </m:r>
+                        <m:r>
+                          <a:rPr lang="pt-BR" i="1">
+                            <a:latin typeface="Cambria Math" panose="02040503050406030204" pitchFamily="18" charset="0"/>
+                          </a:rPr>
+                          <m:t>𝐶</m:t>
+                        </m:r>
+                      </m:e>
+                      <m:sub>
+                        <m:r>
+                          <a:rPr lang="pt-BR" i="1">
+                            <a:latin typeface="Cambria Math" panose="02040503050406030204" pitchFamily="18" charset="0"/>
+                          </a:rPr>
+                          <m:t>1</m:t>
+                        </m:r>
+                      </m:sub>
+                    </m:sSub>
+                  </m:oMath>
+                </a14:m>
+                <a:r>
+                  <a:rPr lang="pt-BR" dirty="0"/>
+                  <a:t>, ou seja</a:t>
+                </a:r>
+              </a:p>
+              <a:p>
+                <a:pPr marL="0" indent="0">
+                  <a:buNone/>
+                </a:pPr>
+                <a14:m>
+                  <m:oMathPara xmlns:m="http://schemas.openxmlformats.org/officeDocument/2006/math">
+                    <m:oMathParaPr>
+                      <m:jc m:val="centerGroup"/>
+                    </m:oMathParaPr>
+                    <m:oMath xmlns:m="http://schemas.openxmlformats.org/officeDocument/2006/math">
+                      <m:r>
+                        <a:rPr lang="pt-BR" i="1">
+                          <a:latin typeface="Cambria Math" panose="02040503050406030204" pitchFamily="18" charset="0"/>
+                        </a:rPr>
+                        <m:t>𝑦</m:t>
+                      </m:r>
+                      <m:d>
+                        <m:dPr>
+                          <m:ctrlPr>
+                            <a:rPr lang="pt-BR" i="1">
+                              <a:latin typeface="Cambria Math" panose="02040503050406030204" pitchFamily="18" charset="0"/>
+                            </a:rPr>
+                          </m:ctrlPr>
+                        </m:dPr>
+                        <m:e>
+                          <m:r>
+                            <a:rPr lang="pt-BR" i="1">
+                              <a:latin typeface="Cambria Math" panose="02040503050406030204" pitchFamily="18" charset="0"/>
+                            </a:rPr>
+                            <m:t>𝑖</m:t>
+                          </m:r>
+                        </m:e>
+                      </m:d>
+                      <m:r>
+                        <a:rPr lang="pt-BR" b="1" i="1">
+                          <a:latin typeface="Cambria Math" panose="02040503050406030204" pitchFamily="18" charset="0"/>
+                        </a:rPr>
+                        <m:t>=</m:t>
+                      </m:r>
+                      <m:d>
+                        <m:dPr>
+                          <m:begChr m:val="{"/>
+                          <m:endChr m:val=""/>
+                          <m:ctrlPr>
+                            <a:rPr lang="pt-BR" b="1" i="1">
+                              <a:latin typeface="Cambria Math" panose="02040503050406030204" pitchFamily="18" charset="0"/>
+                            </a:rPr>
+                          </m:ctrlPr>
+                        </m:dPr>
+                        <m:e>
+                          <m:eqArr>
+                            <m:eqArrPr>
+                              <m:ctrlPr>
+                                <a:rPr lang="pt-BR" b="1" i="1">
+                                  <a:latin typeface="Cambria Math" panose="02040503050406030204" pitchFamily="18" charset="0"/>
+                                </a:rPr>
+                              </m:ctrlPr>
+                            </m:eqArrPr>
+                            <m:e>
+                              <m:r>
+                                <a:rPr lang="pt-BR" b="0" i="1" smtClean="0">
+                                  <a:latin typeface="Cambria Math" panose="02040503050406030204" pitchFamily="18" charset="0"/>
+                                </a:rPr>
+                                <m:t>−1</m:t>
+                              </m:r>
+                              <m:r>
+                                <a:rPr lang="pt-BR" b="1" i="1">
+                                  <a:latin typeface="Cambria Math" panose="02040503050406030204" pitchFamily="18" charset="0"/>
+                                </a:rPr>
+                                <m:t>, </m:t>
+                              </m:r>
+                              <m:r>
+                                <a:rPr lang="pt-BR" b="1" i="1" smtClean="0">
+                                  <a:latin typeface="Cambria Math" panose="02040503050406030204" pitchFamily="18" charset="0"/>
+                                </a:rPr>
+                                <m:t> </m:t>
+                              </m:r>
+                              <m:r>
+                                <a:rPr lang="pt-BR" b="1" i="1">
+                                  <a:latin typeface="Cambria Math" panose="02040503050406030204" pitchFamily="18" charset="0"/>
+                                </a:rPr>
+                                <m:t>𝒙</m:t>
+                              </m:r>
+                              <m:d>
+                                <m:dPr>
+                                  <m:ctrlPr>
+                                    <a:rPr lang="pt-BR" b="1" i="1">
+                                      <a:latin typeface="Cambria Math" panose="02040503050406030204" pitchFamily="18" charset="0"/>
+                                    </a:rPr>
+                                  </m:ctrlPr>
+                                </m:dPr>
+                                <m:e>
+                                  <m:r>
+                                    <a:rPr lang="pt-BR" i="1">
+                                      <a:latin typeface="Cambria Math" panose="02040503050406030204" pitchFamily="18" charset="0"/>
+                                    </a:rPr>
+                                    <m:t>𝑖</m:t>
+                                  </m:r>
+                                </m:e>
+                              </m:d>
+                              <m:r>
+                                <a:rPr lang="pt-BR" b="1" i="1">
+                                  <a:latin typeface="Cambria Math" panose="02040503050406030204" pitchFamily="18" charset="0"/>
+                                </a:rPr>
+                                <m:t> </m:t>
+                              </m:r>
+                              <m:r>
+                                <a:rPr lang="pt-BR" i="1">
+                                  <a:latin typeface="Cambria Math" panose="02040503050406030204" pitchFamily="18" charset="0"/>
+                                  <a:ea typeface="Cambria Math" panose="02040503050406030204" pitchFamily="18" charset="0"/>
+                                </a:rPr>
+                                <m:t>𝜖</m:t>
+                              </m:r>
+                              <m:sSub>
+                                <m:sSubPr>
+                                  <m:ctrlPr>
+                                    <a:rPr lang="pt-BR" i="1">
+                                      <a:latin typeface="Cambria Math" panose="02040503050406030204" pitchFamily="18" charset="0"/>
+                                    </a:rPr>
+                                  </m:ctrlPr>
+                                </m:sSubPr>
+                                <m:e>
+                                  <m:r>
+                                    <a:rPr lang="pt-BR" i="1">
+                                      <a:latin typeface="Cambria Math" panose="02040503050406030204" pitchFamily="18" charset="0"/>
+                                    </a:rPr>
+                                    <m:t> </m:t>
+                                  </m:r>
+                                  <m:r>
+                                    <a:rPr lang="pt-BR" i="1">
+                                      <a:latin typeface="Cambria Math" panose="02040503050406030204" pitchFamily="18" charset="0"/>
+                                    </a:rPr>
+                                    <m:t>𝐶</m:t>
+                                  </m:r>
+                                </m:e>
+                                <m:sub>
+                                  <m:r>
+                                    <a:rPr lang="pt-BR" i="1">
+                                      <a:latin typeface="Cambria Math" panose="02040503050406030204" pitchFamily="18" charset="0"/>
+                                    </a:rPr>
+                                    <m:t>1</m:t>
+                                  </m:r>
+                                </m:sub>
+                              </m:sSub>
+                            </m:e>
+                            <m:e>
+                              <m:r>
+                                <a:rPr lang="pt-BR" b="1" i="1">
+                                  <a:latin typeface="Cambria Math" panose="02040503050406030204" pitchFamily="18" charset="0"/>
+                                </a:rPr>
+                                <m:t>&amp;</m:t>
+                              </m:r>
+                              <m:r>
+                                <a:rPr lang="pt-BR" i="1">
+                                  <a:latin typeface="Cambria Math" panose="02040503050406030204" pitchFamily="18" charset="0"/>
+                                </a:rPr>
+                                <m:t>1</m:t>
+                              </m:r>
+                              <m:r>
+                                <a:rPr lang="pt-BR" b="1" i="1">
+                                  <a:latin typeface="Cambria Math" panose="02040503050406030204" pitchFamily="18" charset="0"/>
+                                </a:rPr>
+                                <m:t>,  </m:t>
+                              </m:r>
+                              <m:r>
+                                <a:rPr lang="pt-BR" b="1" i="1">
+                                  <a:latin typeface="Cambria Math" panose="02040503050406030204" pitchFamily="18" charset="0"/>
+                                </a:rPr>
+                                <m:t>𝒙</m:t>
+                              </m:r>
+                              <m:d>
+                                <m:dPr>
+                                  <m:ctrlPr>
+                                    <a:rPr lang="pt-BR" b="1" i="1">
+                                      <a:latin typeface="Cambria Math" panose="02040503050406030204" pitchFamily="18" charset="0"/>
+                                    </a:rPr>
+                                  </m:ctrlPr>
+                                </m:dPr>
+                                <m:e>
+                                  <m:r>
+                                    <a:rPr lang="pt-BR" i="1">
+                                      <a:latin typeface="Cambria Math" panose="02040503050406030204" pitchFamily="18" charset="0"/>
+                                    </a:rPr>
+                                    <m:t>𝑖</m:t>
+                                  </m:r>
+                                </m:e>
+                              </m:d>
+                              <m:r>
+                                <a:rPr lang="pt-BR" i="1">
+                                  <a:latin typeface="Cambria Math" panose="02040503050406030204" pitchFamily="18" charset="0"/>
+                                </a:rPr>
+                                <m:t> </m:t>
+                              </m:r>
+                              <m:r>
+                                <a:rPr lang="pt-BR" i="1">
+                                  <a:latin typeface="Cambria Math" panose="02040503050406030204" pitchFamily="18" charset="0"/>
+                                  <a:ea typeface="Cambria Math" panose="02040503050406030204" pitchFamily="18" charset="0"/>
+                                </a:rPr>
+                                <m:t>𝜖</m:t>
+                              </m:r>
+                              <m:sSub>
+                                <m:sSubPr>
+                                  <m:ctrlPr>
+                                    <a:rPr lang="pt-BR" i="1">
+                                      <a:latin typeface="Cambria Math" panose="02040503050406030204" pitchFamily="18" charset="0"/>
+                                    </a:rPr>
+                                  </m:ctrlPr>
+                                </m:sSubPr>
+                                <m:e>
+                                  <m:r>
+                                    <a:rPr lang="pt-BR" i="1">
+                                      <a:latin typeface="Cambria Math" panose="02040503050406030204" pitchFamily="18" charset="0"/>
+                                    </a:rPr>
+                                    <m:t> </m:t>
+                                  </m:r>
+                                  <m:r>
+                                    <a:rPr lang="pt-BR" i="1">
+                                      <a:latin typeface="Cambria Math" panose="02040503050406030204" pitchFamily="18" charset="0"/>
+                                    </a:rPr>
+                                    <m:t>𝐶</m:t>
+                                  </m:r>
+                                </m:e>
+                                <m:sub>
+                                  <m:r>
+                                    <a:rPr lang="pt-BR" i="1">
+                                      <a:latin typeface="Cambria Math" panose="02040503050406030204" pitchFamily="18" charset="0"/>
+                                    </a:rPr>
+                                    <m:t>2</m:t>
+                                  </m:r>
+                                </m:sub>
+                              </m:sSub>
+                            </m:e>
+                          </m:eqArr>
+                        </m:e>
+                      </m:d>
+                      <m:r>
+                        <a:rPr lang="pt-BR" b="1" i="1" smtClean="0">
+                          <a:latin typeface="Cambria Math" panose="02040503050406030204" pitchFamily="18" charset="0"/>
+                        </a:rPr>
+                        <m:t>.</m:t>
+                      </m:r>
+                    </m:oMath>
+                  </m:oMathPara>
+                </a14:m>
+                <a:endParaRPr lang="pt-BR" dirty="0"/>
+              </a:p>
+            </p:txBody>
+          </p:sp>
+        </mc:Choice>
+        <mc:Fallback>
+          <p:sp>
+            <p:nvSpPr>
+              <p:cNvPr id="3" name="Content Placeholder 2"/>
+              <p:cNvSpPr>
+                <a:spLocks noGrp="1" noRot="1" noChangeAspect="1" noMove="1" noResize="1" noEditPoints="1" noAdjustHandles="1" noChangeArrowheads="1" noChangeShapeType="1" noTextEdit="1"/>
+              </p:cNvSpPr>
+              <p:nvPr>
+                <p:ph idx="1"/>
+              </p:nvPr>
+            </p:nvSpPr>
+            <p:spPr>
+              <a:xfrm>
+                <a:off x="838199" y="1825624"/>
+                <a:ext cx="11215255" cy="5032376"/>
+              </a:xfrm>
+              <a:blipFill>
+                <a:blip r:embed="rId2"/>
+                <a:stretch>
+                  <a:fillRect l="-1087" t="-1937"/>
+                </a:stretch>
+              </a:blipFill>
+            </p:spPr>
+            <p:txBody>
+              <a:bodyPr/>
+              <a:lstStyle/>
+              <a:p>
+                <a:r>
+                  <a:rPr lang="en-US">
+                    <a:noFill/>
+                  </a:rPr>
+                  <a:t> </a:t>
+                </a:r>
+              </a:p>
+            </p:txBody>
+          </p:sp>
+        </mc:Fallback>
+      </mc:AlternateContent>
+    </p:spTree>
+    <p:extLst>
+      <p:ext uri="{BB962C8B-B14F-4D97-AF65-F5344CB8AC3E}">
+        <p14:creationId xmlns:p14="http://schemas.microsoft.com/office/powerpoint/2010/main" val="3915758307"/>
+      </p:ext>
+    </p:extLst>
+  </p:cSld>
+  <p:clrMapOvr>
+    <a:masterClrMapping/>
+  </p:clrMapOvr>
+</p:sld>
+</file>
+
+<file path=ppt/slides/slide12.xml><?xml version="1.0" encoding="utf-8"?>
+<p:sld xmlns:a="http://schemas.openxmlformats.org/drawingml/2006/main" xmlns:r="http://schemas.openxmlformats.org/officeDocument/2006/relationships" xmlns:p="http://schemas.openxmlformats.org/presentationml/2006/main">
+  <p:cSld>
+    <p:spTree>
+      <p:nvGrpSpPr>
+        <p:cNvPr id="1" name=""/>
+        <p:cNvGrpSpPr/>
+        <p:nvPr/>
+      </p:nvGrpSpPr>
+      <p:grpSpPr>
+        <a:xfrm>
+          <a:off x="0" y="0"/>
+          <a:ext cx="0" cy="0"/>
+          <a:chOff x="0" y="0"/>
+          <a:chExt cx="0" cy="0"/>
+        </a:xfrm>
+      </p:grpSpPr>
+      <p:sp>
+        <p:nvSpPr>
+          <p:cNvPr id="2" name="Title 1">
+            <a:extLst>
+              <a:ext uri="{FF2B5EF4-FFF2-40B4-BE49-F238E27FC236}">
+                <a16:creationId xmlns:a16="http://schemas.microsoft.com/office/drawing/2014/main" id="{DA7FDC7F-B899-B1A6-F69A-351822C6EFD7}"/>
+              </a:ext>
+            </a:extLst>
+          </p:cNvPr>
+          <p:cNvSpPr>
+            <a:spLocks noGrp="1"/>
+          </p:cNvSpPr>
+          <p:nvPr>
+            <p:ph type="title"/>
+          </p:nvPr>
+        </p:nvSpPr>
+        <p:spPr/>
+        <p:txBody>
+          <a:bodyPr/>
+          <a:lstStyle/>
+          <a:p>
+            <a:endParaRPr lang="en-US"/>
+          </a:p>
+        </p:txBody>
+      </p:sp>
+      <p:sp>
+        <p:nvSpPr>
+          <p:cNvPr id="3" name="Content Placeholder 2">
+            <a:extLst>
+              <a:ext uri="{FF2B5EF4-FFF2-40B4-BE49-F238E27FC236}">
+                <a16:creationId xmlns:a16="http://schemas.microsoft.com/office/drawing/2014/main" id="{E5A0C298-3D62-58C4-3B44-8F0C5C3E0A0C}"/>
+              </a:ext>
+            </a:extLst>
+          </p:cNvPr>
+          <p:cNvSpPr>
+            <a:spLocks noGrp="1"/>
+          </p:cNvSpPr>
+          <p:nvPr>
+            <p:ph idx="1"/>
+          </p:nvPr>
+        </p:nvSpPr>
+        <p:spPr/>
+        <p:txBody>
+          <a:bodyPr/>
+          <a:lstStyle/>
+          <a:p>
+            <a:endParaRPr lang="en-US"/>
+          </a:p>
+        </p:txBody>
+      </p:sp>
+    </p:spTree>
+    <p:extLst>
+      <p:ext uri="{BB962C8B-B14F-4D97-AF65-F5344CB8AC3E}">
+        <p14:creationId xmlns:p14="http://schemas.microsoft.com/office/powerpoint/2010/main" val="3414813146"/>
+      </p:ext>
+    </p:extLst>
+  </p:cSld>
+  <p:clrMapOvr>
+    <a:masterClrMapping/>
+  </p:clrMapOvr>
+</p:sld>
+</file>
+
+<file path=ppt/slides/slide13.xml><?xml version="1.0" encoding="utf-8"?>
+<p:sld xmlns:a="http://schemas.openxmlformats.org/drawingml/2006/main" xmlns:r="http://schemas.openxmlformats.org/officeDocument/2006/relationships" xmlns:p="http://schemas.openxmlformats.org/presentationml/2006/main">
+  <p:cSld>
+    <p:spTree>
+      <p:nvGrpSpPr>
+        <p:cNvPr id="1" name=""/>
+        <p:cNvGrpSpPr/>
+        <p:nvPr/>
+      </p:nvGrpSpPr>
+      <p:grpSpPr>
+        <a:xfrm>
+          <a:off x="0" y="0"/>
+          <a:ext cx="0" cy="0"/>
+          <a:chOff x="0" y="0"/>
+          <a:chExt cx="0" cy="0"/>
+        </a:xfrm>
+      </p:grpSpPr>
+      <p:sp>
+        <p:nvSpPr>
+          <p:cNvPr id="2" name="Title 1">
+            <a:extLst>
+              <a:ext uri="{FF2B5EF4-FFF2-40B4-BE49-F238E27FC236}">
+                <a16:creationId xmlns:a16="http://schemas.microsoft.com/office/drawing/2014/main" id="{F1CB30D0-D052-EC03-3C25-35C106AA1077}"/>
+              </a:ext>
+            </a:extLst>
+          </p:cNvPr>
+          <p:cNvSpPr>
+            <a:spLocks noGrp="1"/>
+          </p:cNvSpPr>
+          <p:nvPr>
+            <p:ph type="title"/>
+          </p:nvPr>
+        </p:nvSpPr>
+        <p:spPr/>
+        <p:txBody>
+          <a:bodyPr/>
+          <a:lstStyle/>
+          <a:p>
+            <a:r>
+              <a:rPr lang="pt-BR" dirty="0"/>
+              <a:t>Matriz de confusão</a:t>
+            </a:r>
+            <a:endParaRPr lang="en-US" dirty="0"/>
+          </a:p>
+        </p:txBody>
+      </p:sp>
+      <p:pic>
+        <p:nvPicPr>
+          <p:cNvPr id="2050" name="Picture 2" descr="Validate me Constructive criticism permitted – @gallusrostromegalus on  Tumblr">
+            <a:extLst>
+              <a:ext uri="{FF2B5EF4-FFF2-40B4-BE49-F238E27FC236}">
+                <a16:creationId xmlns:a16="http://schemas.microsoft.com/office/drawing/2014/main" id="{A9C68C0F-3A42-8D60-0B8A-979695E4072E}"/>
+              </a:ext>
+            </a:extLst>
+          </p:cNvPr>
+          <p:cNvPicPr>
+            <a:picLocks noChangeAspect="1" noChangeArrowheads="1"/>
+          </p:cNvPicPr>
+          <p:nvPr/>
+        </p:nvPicPr>
+        <p:blipFill>
+          <a:blip r:embed="rId2">
+            <a:extLst>
+              <a:ext uri="{28A0092B-C50C-407E-A947-70E740481C1C}">
+                <a14:useLocalDpi xmlns:a14="http://schemas.microsoft.com/office/drawing/2010/main" val="0"/>
+              </a:ext>
+            </a:extLst>
+          </a:blip>
+          <a:srcRect/>
+          <a:stretch>
+            <a:fillRect/>
+          </a:stretch>
+        </p:blipFill>
+        <p:spPr bwMode="auto">
+          <a:xfrm>
+            <a:off x="4199561" y="1690688"/>
+            <a:ext cx="5635002" cy="5167312"/>
+          </a:xfrm>
+          <a:prstGeom prst="rect">
+            <a:avLst/>
+          </a:prstGeom>
+          <a:noFill/>
+          <a:extLst>
+            <a:ext uri="{909E8E84-426E-40DD-AFC4-6F175D3DCCD1}">
+              <a14:hiddenFill xmlns:a14="http://schemas.microsoft.com/office/drawing/2010/main">
+                <a:solidFill>
+                  <a:srgbClr val="FFFFFF"/>
+                </a:solidFill>
+              </a14:hiddenFill>
+            </a:ext>
+          </a:extLst>
+        </p:spPr>
+      </p:pic>
+    </p:spTree>
+    <p:extLst>
+      <p:ext uri="{BB962C8B-B14F-4D97-AF65-F5344CB8AC3E}">
+        <p14:creationId xmlns:p14="http://schemas.microsoft.com/office/powerpoint/2010/main" val="2456464638"/>
+      </p:ext>
+    </p:extLst>
+  </p:cSld>
+  <p:clrMapOvr>
+    <a:masterClrMapping/>
+  </p:clrMapOvr>
+</p:sld>
+</file>
+
+<file path=ppt/slides/slide14.xml><?xml version="1.0" encoding="utf-8"?>
+<p:sld xmlns:a="http://schemas.openxmlformats.org/drawingml/2006/main" xmlns:r="http://schemas.openxmlformats.org/officeDocument/2006/relationships" xmlns:p="http://schemas.openxmlformats.org/presentationml/2006/main">
+  <p:cSld>
+    <p:spTree>
+      <p:nvGrpSpPr>
+        <p:cNvPr id="1" name=""/>
+        <p:cNvGrpSpPr/>
+        <p:nvPr/>
+      </p:nvGrpSpPr>
+      <p:grpSpPr>
+        <a:xfrm>
+          <a:off x="0" y="0"/>
+          <a:ext cx="0" cy="0"/>
+          <a:chOff x="0" y="0"/>
+          <a:chExt cx="0" cy="0"/>
+        </a:xfrm>
+      </p:grpSpPr>
+      <p:sp>
+        <p:nvSpPr>
           <p:cNvPr id="4" name="Título 1">
             <a:extLst>
               <a:ext uri="{FF2B5EF4-FFF2-40B4-BE49-F238E27FC236}">
-                <a16:creationId xmlns="" xmlns:a16="http://schemas.microsoft.com/office/drawing/2014/main" id="{32666AC8-2E17-4DB4-B0F5-60C640CCFD2E}"/>
+                <a16:creationId xmlns:a16="http://schemas.microsoft.com/office/drawing/2014/main" id="{32666AC8-2E17-4DB4-B0F5-60C640CCFD2E}"/>
+              </a:ext>
+            </a:extLst>
+          </p:cNvPr>
+          <p:cNvSpPr txBox="1">
+            <a:spLocks/>
+          </p:cNvSpPr>
+          <p:nvPr/>
+        </p:nvSpPr>
+        <p:spPr>
+          <a:xfrm>
+            <a:off x="1431533" y="2720526"/>
+            <a:ext cx="9144000" cy="1029541"/>
+          </a:xfrm>
+          <a:prstGeom prst="rect">
+            <a:avLst/>
+          </a:prstGeom>
+        </p:spPr>
+        <p:txBody>
+          <a:bodyPr vert="horz" lIns="91440" tIns="45720" rIns="91440" bIns="45720" rtlCol="0" anchor="ctr">
+            <a:normAutofit/>
+          </a:bodyPr>
+          <a:lstStyle>
+            <a:lvl1pPr algn="l" defTabSz="914400" rtl="0" eaLnBrk="1" latinLnBrk="0" hangingPunct="1">
+              <a:lnSpc>
+                <a:spcPct val="90000"/>
+              </a:lnSpc>
+              <a:spcBef>
+                <a:spcPct val="0"/>
+              </a:spcBef>
+              <a:buNone/>
+              <a:defRPr sz="4400" kern="1200">
+                <a:solidFill>
+                  <a:schemeClr val="tx1"/>
+                </a:solidFill>
+                <a:latin typeface="+mj-lt"/>
+                <a:ea typeface="+mj-ea"/>
+                <a:cs typeface="+mj-cs"/>
+              </a:defRPr>
+            </a:lvl1pPr>
+          </a:lstStyle>
+          <a:p>
+            <a:pPr algn="ctr"/>
+            <a:r>
+              <a:rPr lang="pt-BR" sz="6600" dirty="0"/>
+              <a:t>Perguntas?</a:t>
+            </a:r>
+            <a:endParaRPr lang="pt-BR" sz="6600" b="1" i="1" dirty="0"/>
+          </a:p>
+        </p:txBody>
+      </p:sp>
+    </p:spTree>
+    <p:extLst>
+      <p:ext uri="{BB962C8B-B14F-4D97-AF65-F5344CB8AC3E}">
+        <p14:creationId xmlns:p14="http://schemas.microsoft.com/office/powerpoint/2010/main" val="3773005660"/>
+      </p:ext>
+    </p:extLst>
+  </p:cSld>
+  <p:clrMapOvr>
+    <a:masterClrMapping/>
+  </p:clrMapOvr>
+</p:sld>
+</file>
+
+<file path=ppt/slides/slide15.xml><?xml version="1.0" encoding="utf-8"?>
+<p:sld xmlns:a="http://schemas.openxmlformats.org/drawingml/2006/main" xmlns:r="http://schemas.openxmlformats.org/officeDocument/2006/relationships" xmlns:p="http://schemas.openxmlformats.org/presentationml/2006/main">
+  <p:cSld>
+    <p:spTree>
+      <p:nvGrpSpPr>
+        <p:cNvPr id="1" name=""/>
+        <p:cNvGrpSpPr/>
+        <p:nvPr/>
+      </p:nvGrpSpPr>
+      <p:grpSpPr>
+        <a:xfrm>
+          <a:off x="0" y="0"/>
+          <a:ext cx="0" cy="0"/>
+          <a:chOff x="0" y="0"/>
+          <a:chExt cx="0" cy="0"/>
+        </a:xfrm>
+      </p:grpSpPr>
+      <p:sp>
+        <p:nvSpPr>
+          <p:cNvPr id="4" name="Título 1">
+            <a:extLst>
+              <a:ext uri="{FF2B5EF4-FFF2-40B4-BE49-F238E27FC236}">
+                <a16:creationId xmlns:a16="http://schemas.microsoft.com/office/drawing/2014/main" id="{32666AC8-2E17-4DB4-B0F5-60C640CCFD2E}"/>
               </a:ext>
             </a:extLst>
           </p:cNvPr>
@@ -4404,13 +5887,7 @@
       </p:grpSpPr>
       <p:sp>
         <p:nvSpPr>
-          <p:cNvPr id="2" name="Título 1">
-            <a:extLst>
-              <a:ext uri="{FF2B5EF4-FFF2-40B4-BE49-F238E27FC236}">
-                <a16:creationId xmlns="" xmlns:a16="http://schemas.microsoft.com/office/drawing/2014/main" id="{7F5FF925-67DE-CC62-E869-C6E3C1D771E6}"/>
-              </a:ext>
-            </a:extLst>
-          </p:cNvPr>
+          <p:cNvPr id="2" name="Título 1"/>
           <p:cNvSpPr>
             <a:spLocks noGrp="1"/>
           </p:cNvSpPr>
@@ -4425,40 +5902,747 @@
           <a:p>
             <a:r>
               <a:rPr lang="pt-BR" dirty="0"/>
-              <a:t>Introdução</a:t>
-            </a:r>
-          </a:p>
-        </p:txBody>
-      </p:sp>
-      <p:sp>
-        <p:nvSpPr>
-          <p:cNvPr id="3" name="Espaço Reservado para Conteúdo 2">
-            <a:extLst>
-              <a:ext uri="{FF2B5EF4-FFF2-40B4-BE49-F238E27FC236}">
-                <a16:creationId xmlns="" xmlns:a16="http://schemas.microsoft.com/office/drawing/2014/main" id="{7DA84068-671A-9D40-4F76-2C57E4F720C2}"/>
-              </a:ext>
-            </a:extLst>
-          </p:cNvPr>
-          <p:cNvSpPr>
-            <a:spLocks noGrp="1"/>
-          </p:cNvSpPr>
-          <p:nvPr>
-            <p:ph idx="1"/>
-          </p:nvPr>
-        </p:nvSpPr>
-        <p:spPr/>
-        <p:txBody>
-          <a:bodyPr/>
-          <a:lstStyle/>
-          <a:p>
-            <a:endParaRPr lang="pt-BR" dirty="0"/>
-          </a:p>
-        </p:txBody>
-      </p:sp>
+              <a:t>Classificação</a:t>
+            </a:r>
+            <a:endParaRPr lang="en-US" dirty="0"/>
+          </a:p>
+        </p:txBody>
+      </p:sp>
+      <mc:AlternateContent xmlns:mc="http://schemas.openxmlformats.org/markup-compatibility/2006" xmlns:a14="http://schemas.microsoft.com/office/drawing/2010/main">
+        <mc:Choice Requires="a14">
+          <p:sp>
+            <p:nvSpPr>
+              <p:cNvPr id="3" name="Espaço Reservado para Conteúdo 2"/>
+              <p:cNvSpPr>
+                <a:spLocks noGrp="1"/>
+              </p:cNvSpPr>
+              <p:nvPr>
+                <p:ph idx="1"/>
+              </p:nvPr>
+            </p:nvSpPr>
+            <p:spPr>
+              <a:xfrm>
+                <a:off x="838200" y="1825625"/>
+                <a:ext cx="11010900" cy="4351338"/>
+              </a:xfrm>
+            </p:spPr>
+            <p:txBody>
+              <a:bodyPr/>
+              <a:lstStyle/>
+              <a:p>
+                <a:r>
+                  <a:rPr lang="pt-BR" dirty="0"/>
+                  <a:t>Tarefa (ou problema) de </a:t>
+                </a:r>
+                <a:r>
+                  <a:rPr lang="pt-BR" b="1" dirty="0">
+                    <a:solidFill>
+                      <a:schemeClr val="accent2"/>
+                    </a:solidFill>
+                  </a:rPr>
+                  <a:t>aprendizado supervisionado</a:t>
+                </a:r>
+                <a:r>
+                  <a:rPr lang="pt-BR" dirty="0"/>
+                  <a:t>.</a:t>
+                </a:r>
+              </a:p>
+              <a:p>
+                <a:pPr lvl="1">
+                  <a:buFont typeface="Wingdings" panose="05000000000000000000" pitchFamily="2" charset="2"/>
+                  <a:buChar char="§"/>
+                </a:pPr>
+                <a:r>
+                  <a:rPr lang="pt-BR" dirty="0"/>
+                  <a:t>As saídas esperadas (rótulos) são conhecidas.</a:t>
+                </a:r>
+              </a:p>
+              <a:p>
+                <a:r>
+                  <a:rPr lang="pt-BR" dirty="0"/>
+                  <a:t>Envolve encontrar uma função, </a:t>
+                </a:r>
+                <a14:m>
+                  <m:oMath xmlns:m="http://schemas.openxmlformats.org/officeDocument/2006/math">
+                    <m:r>
+                      <a:rPr lang="pt-BR" i="1">
+                        <a:latin typeface="Cambria Math" panose="02040503050406030204" pitchFamily="18" charset="0"/>
+                      </a:rPr>
+                      <m:t>𝑓</m:t>
+                    </m:r>
+                    <m:r>
+                      <a:rPr lang="pt-BR" i="1">
+                        <a:latin typeface="Cambria Math" panose="02040503050406030204" pitchFamily="18" charset="0"/>
+                      </a:rPr>
+                      <m:t>(</m:t>
+                    </m:r>
+                    <m:r>
+                      <a:rPr lang="pt-BR" b="1" i="1">
+                        <a:latin typeface="Cambria Math" panose="02040503050406030204" pitchFamily="18" charset="0"/>
+                      </a:rPr>
+                      <m:t>𝒙</m:t>
+                    </m:r>
+                    <m:r>
+                      <a:rPr lang="pt-BR" i="1">
+                        <a:latin typeface="Cambria Math" panose="02040503050406030204" pitchFamily="18" charset="0"/>
+                      </a:rPr>
+                      <m:t>)</m:t>
+                    </m:r>
+                  </m:oMath>
+                </a14:m>
+                <a:r>
+                  <a:rPr lang="pt-BR" dirty="0"/>
+                  <a:t>, que </a:t>
+                </a:r>
+                <a:r>
+                  <a:rPr lang="pt-BR" b="1" i="1" dirty="0">
+                    <a:solidFill>
+                      <a:srgbClr val="7030A0"/>
+                    </a:solidFill>
+                  </a:rPr>
+                  <a:t>mapeie</a:t>
+                </a:r>
+                <a:r>
+                  <a:rPr lang="pt-BR" dirty="0"/>
+                  <a:t> os atributos de entrada em um </a:t>
+                </a:r>
+                <a:r>
+                  <a:rPr lang="pt-BR" b="1" i="1" dirty="0">
+                    <a:solidFill>
+                      <a:srgbClr val="7030A0"/>
+                    </a:solidFill>
+                  </a:rPr>
+                  <a:t>conjunto finito de valores discretos</a:t>
+                </a:r>
+                <a:r>
+                  <a:rPr lang="pt-BR" dirty="0"/>
+                  <a:t>, ou seja, em classes.</a:t>
+                </a:r>
+                <a:endParaRPr lang="en-US" dirty="0"/>
+              </a:p>
+            </p:txBody>
+          </p:sp>
+        </mc:Choice>
+        <mc:Fallback xmlns="">
+          <p:sp>
+            <p:nvSpPr>
+              <p:cNvPr id="3" name="Espaço Reservado para Conteúdo 2"/>
+              <p:cNvSpPr>
+                <a:spLocks noGrp="1" noRot="1" noChangeAspect="1" noMove="1" noResize="1" noEditPoints="1" noAdjustHandles="1" noChangeArrowheads="1" noChangeShapeType="1" noTextEdit="1"/>
+              </p:cNvSpPr>
+              <p:nvPr>
+                <p:ph idx="1"/>
+              </p:nvPr>
+            </p:nvSpPr>
+            <p:spPr>
+              <a:xfrm>
+                <a:off x="838200" y="1825625"/>
+                <a:ext cx="11010900" cy="4351338"/>
+              </a:xfrm>
+              <a:blipFill>
+                <a:blip r:embed="rId2"/>
+                <a:stretch>
+                  <a:fillRect l="-997" t="-2241"/>
+                </a:stretch>
+              </a:blipFill>
+            </p:spPr>
+            <p:txBody>
+              <a:bodyPr/>
+              <a:lstStyle/>
+              <a:p>
+                <a:r>
+                  <a:rPr lang="en-US">
+                    <a:noFill/>
+                  </a:rPr>
+                  <a:t> </a:t>
+                </a:r>
+              </a:p>
+            </p:txBody>
+          </p:sp>
+        </mc:Fallback>
+      </mc:AlternateContent>
+      <p:pic>
+        <p:nvPicPr>
+          <p:cNvPr id="1026" name="Picture 2" descr="https://miro.medium.com/max/1276/1*4sixxtuD8unWceZ-yp9TgQ.jpeg"/>
+          <p:cNvPicPr>
+            <a:picLocks noChangeAspect="1" noChangeArrowheads="1"/>
+          </p:cNvPicPr>
+          <p:nvPr/>
+        </p:nvPicPr>
+        <p:blipFill rotWithShape="1">
+          <a:blip r:embed="rId3">
+            <a:extLst>
+              <a:ext uri="{28A0092B-C50C-407E-A947-70E740481C1C}">
+                <a14:useLocalDpi xmlns:a14="http://schemas.microsoft.com/office/drawing/2010/main" val="0"/>
+              </a:ext>
+            </a:extLst>
+          </a:blip>
+          <a:srcRect l="11043" t="33761" r="47008" b="10621"/>
+          <a:stretch/>
+        </p:blipFill>
+        <p:spPr bwMode="auto">
+          <a:xfrm>
+            <a:off x="7031891" y="3774326"/>
+            <a:ext cx="2549237" cy="2537574"/>
+          </a:xfrm>
+          <a:prstGeom prst="rect">
+            <a:avLst/>
+          </a:prstGeom>
+          <a:noFill/>
+          <a:extLst>
+            <a:ext uri="{909E8E84-426E-40DD-AFC4-6F175D3DCCD1}">
+              <a14:hiddenFill xmlns:a14="http://schemas.microsoft.com/office/drawing/2010/main">
+                <a:solidFill>
+                  <a:srgbClr val="FFFFFF"/>
+                </a:solidFill>
+              </a14:hiddenFill>
+            </a:ext>
+          </a:extLst>
+        </p:spPr>
+      </p:pic>
+      <p:pic>
+        <p:nvPicPr>
+          <p:cNvPr id="5" name="Picture 2" descr="https://miro.medium.com/max/1276/1*4sixxtuD8unWceZ-yp9TgQ.jpeg"/>
+          <p:cNvPicPr>
+            <a:picLocks noChangeAspect="1" noChangeArrowheads="1"/>
+          </p:cNvPicPr>
+          <p:nvPr/>
+        </p:nvPicPr>
+        <p:blipFill rotWithShape="1">
+          <a:blip r:embed="rId3">
+            <a:extLst>
+              <a:ext uri="{28A0092B-C50C-407E-A947-70E740481C1C}">
+                <a14:useLocalDpi xmlns:a14="http://schemas.microsoft.com/office/drawing/2010/main" val="0"/>
+              </a:ext>
+            </a:extLst>
+          </a:blip>
+          <a:srcRect l="53147" t="33424" r="5087" b="12524"/>
+          <a:stretch/>
+        </p:blipFill>
+        <p:spPr bwMode="auto">
+          <a:xfrm>
+            <a:off x="1671781" y="3763638"/>
+            <a:ext cx="2538080" cy="2466109"/>
+          </a:xfrm>
+          <a:prstGeom prst="rect">
+            <a:avLst/>
+          </a:prstGeom>
+          <a:noFill/>
+          <a:extLst>
+            <a:ext uri="{909E8E84-426E-40DD-AFC4-6F175D3DCCD1}">
+              <a14:hiddenFill xmlns:a14="http://schemas.microsoft.com/office/drawing/2010/main">
+                <a:solidFill>
+                  <a:srgbClr val="FFFFFF"/>
+                </a:solidFill>
+              </a14:hiddenFill>
+            </a:ext>
+          </a:extLst>
+        </p:spPr>
+      </p:pic>
+      <mc:AlternateContent xmlns:mc="http://schemas.openxmlformats.org/markup-compatibility/2006" xmlns:a14="http://schemas.microsoft.com/office/drawing/2010/main">
+        <mc:Choice Requires="a14">
+          <p:sp>
+            <p:nvSpPr>
+              <p:cNvPr id="4" name="CaixaDeTexto 3"/>
+              <p:cNvSpPr txBox="1"/>
+              <p:nvPr/>
+            </p:nvSpPr>
+            <p:spPr>
+              <a:xfrm>
+                <a:off x="1088136" y="6229747"/>
+                <a:ext cx="3840479" cy="646331"/>
+              </a:xfrm>
+              <a:prstGeom prst="rect">
+                <a:avLst/>
+              </a:prstGeom>
+              <a:noFill/>
+            </p:spPr>
+            <p:txBody>
+              <a:bodyPr wrap="square" rtlCol="0">
+                <a:spAutoFit/>
+              </a:bodyPr>
+              <a:lstStyle/>
+              <a:p>
+                <a:pPr algn="ctr"/>
+                <a14:m>
+                  <m:oMath xmlns:m="http://schemas.openxmlformats.org/officeDocument/2006/math">
+                    <m:r>
+                      <a:rPr lang="pt-BR" i="1">
+                        <a:latin typeface="Cambria Math" panose="02040503050406030204" pitchFamily="18" charset="0"/>
+                      </a:rPr>
+                      <m:t>𝑓</m:t>
+                    </m:r>
+                    <m:r>
+                      <a:rPr lang="pt-BR" i="1">
+                        <a:latin typeface="Cambria Math" panose="02040503050406030204" pitchFamily="18" charset="0"/>
+                      </a:rPr>
+                      <m:t>(</m:t>
+                    </m:r>
+                    <m:r>
+                      <a:rPr lang="pt-BR" b="1" i="1">
+                        <a:latin typeface="Cambria Math" panose="02040503050406030204" pitchFamily="18" charset="0"/>
+                      </a:rPr>
+                      <m:t>𝒙</m:t>
+                    </m:r>
+                    <m:r>
+                      <a:rPr lang="pt-BR" i="1">
+                        <a:latin typeface="Cambria Math" panose="02040503050406030204" pitchFamily="18" charset="0"/>
+                      </a:rPr>
+                      <m:t>)</m:t>
+                    </m:r>
+                  </m:oMath>
+                </a14:m>
+                <a:r>
+                  <a:rPr lang="en-US" dirty="0"/>
+                  <a:t> </a:t>
+                </a:r>
+                <a:r>
+                  <a:rPr lang="en-US" b="1" i="1" dirty="0" err="1">
+                    <a:solidFill>
+                      <a:srgbClr val="00B050"/>
+                    </a:solidFill>
+                  </a:rPr>
+                  <a:t>aproxima</a:t>
+                </a:r>
+                <a:r>
+                  <a:rPr lang="en-US" dirty="0"/>
+                  <a:t> o </a:t>
+                </a:r>
+                <a:r>
+                  <a:rPr lang="en-US" dirty="0" err="1"/>
+                  <a:t>comportamento</a:t>
+                </a:r>
+                <a:r>
+                  <a:rPr lang="en-US" dirty="0"/>
+                  <a:t> dos dados.</a:t>
+                </a:r>
+              </a:p>
+            </p:txBody>
+          </p:sp>
+        </mc:Choice>
+        <mc:Fallback xmlns="">
+          <p:sp>
+            <p:nvSpPr>
+              <p:cNvPr id="4" name="CaixaDeTexto 3"/>
+              <p:cNvSpPr txBox="1">
+                <a:spLocks noRot="1" noChangeAspect="1" noMove="1" noResize="1" noEditPoints="1" noAdjustHandles="1" noChangeArrowheads="1" noChangeShapeType="1" noTextEdit="1"/>
+              </p:cNvSpPr>
+              <p:nvPr/>
+            </p:nvSpPr>
+            <p:spPr>
+              <a:xfrm>
+                <a:off x="1088136" y="6229747"/>
+                <a:ext cx="3840479" cy="646331"/>
+              </a:xfrm>
+              <a:prstGeom prst="rect">
+                <a:avLst/>
+              </a:prstGeom>
+              <a:blipFill rotWithShape="0">
+                <a:blip r:embed="rId4"/>
+                <a:stretch>
+                  <a:fillRect t="-5660" r="-1113" b="-14151"/>
+                </a:stretch>
+              </a:blipFill>
+            </p:spPr>
+            <p:txBody>
+              <a:bodyPr/>
+              <a:lstStyle/>
+              <a:p>
+                <a:r>
+                  <a:rPr lang="pt-BR">
+                    <a:noFill/>
+                  </a:rPr>
+                  <a:t> </a:t>
+                </a:r>
+              </a:p>
+            </p:txBody>
+          </p:sp>
+        </mc:Fallback>
+      </mc:AlternateContent>
+      <mc:AlternateContent xmlns:mc="http://schemas.openxmlformats.org/markup-compatibility/2006" xmlns:a14="http://schemas.microsoft.com/office/drawing/2010/main">
+        <mc:Choice Requires="a14">
+          <p:sp>
+            <p:nvSpPr>
+              <p:cNvPr id="7" name="CaixaDeTexto 6"/>
+              <p:cNvSpPr txBox="1"/>
+              <p:nvPr/>
+            </p:nvSpPr>
+            <p:spPr>
+              <a:xfrm>
+                <a:off x="6509713" y="6311900"/>
+                <a:ext cx="3593592" cy="369332"/>
+              </a:xfrm>
+              <a:prstGeom prst="rect">
+                <a:avLst/>
+              </a:prstGeom>
+              <a:noFill/>
+            </p:spPr>
+            <p:txBody>
+              <a:bodyPr wrap="square" rtlCol="0">
+                <a:spAutoFit/>
+              </a:bodyPr>
+              <a:lstStyle/>
+              <a:p>
+                <a:pPr algn="ctr"/>
+                <a14:m>
+                  <m:oMath xmlns:m="http://schemas.openxmlformats.org/officeDocument/2006/math">
+                    <m:r>
+                      <a:rPr lang="pt-BR" i="1">
+                        <a:latin typeface="Cambria Math" panose="02040503050406030204" pitchFamily="18" charset="0"/>
+                      </a:rPr>
+                      <m:t>𝑓</m:t>
+                    </m:r>
+                    <m:r>
+                      <a:rPr lang="pt-BR" i="1">
+                        <a:latin typeface="Cambria Math" panose="02040503050406030204" pitchFamily="18" charset="0"/>
+                      </a:rPr>
+                      <m:t>(</m:t>
+                    </m:r>
+                    <m:r>
+                      <a:rPr lang="pt-BR" b="1" i="1">
+                        <a:latin typeface="Cambria Math" panose="02040503050406030204" pitchFamily="18" charset="0"/>
+                      </a:rPr>
+                      <m:t>𝒙</m:t>
+                    </m:r>
+                    <m:r>
+                      <a:rPr lang="pt-BR" i="1">
+                        <a:latin typeface="Cambria Math" panose="02040503050406030204" pitchFamily="18" charset="0"/>
+                      </a:rPr>
+                      <m:t>)</m:t>
+                    </m:r>
+                  </m:oMath>
+                </a14:m>
+                <a:r>
+                  <a:rPr lang="en-US" dirty="0"/>
+                  <a:t> </a:t>
+                </a:r>
+                <a:r>
+                  <a:rPr lang="en-US" b="1" i="1" dirty="0">
+                    <a:solidFill>
+                      <a:srgbClr val="0070C0"/>
+                    </a:solidFill>
+                  </a:rPr>
+                  <a:t>classifica</a:t>
+                </a:r>
+                <a:r>
+                  <a:rPr lang="en-US" dirty="0">
+                    <a:solidFill>
+                      <a:srgbClr val="0070C0"/>
+                    </a:solidFill>
+                  </a:rPr>
+                  <a:t> </a:t>
+                </a:r>
+                <a:r>
+                  <a:rPr lang="en-US" dirty="0" err="1"/>
+                  <a:t>os</a:t>
+                </a:r>
+                <a:r>
+                  <a:rPr lang="en-US" dirty="0"/>
+                  <a:t> dados.</a:t>
+                </a:r>
+              </a:p>
+            </p:txBody>
+          </p:sp>
+        </mc:Choice>
+        <mc:Fallback xmlns="">
+          <p:sp>
+            <p:nvSpPr>
+              <p:cNvPr id="7" name="CaixaDeTexto 6"/>
+              <p:cNvSpPr txBox="1">
+                <a:spLocks noRot="1" noChangeAspect="1" noMove="1" noResize="1" noEditPoints="1" noAdjustHandles="1" noChangeArrowheads="1" noChangeShapeType="1" noTextEdit="1"/>
+              </p:cNvSpPr>
+              <p:nvPr/>
+            </p:nvSpPr>
+            <p:spPr>
+              <a:xfrm>
+                <a:off x="6509713" y="6311900"/>
+                <a:ext cx="3593592" cy="369332"/>
+              </a:xfrm>
+              <a:prstGeom prst="rect">
+                <a:avLst/>
+              </a:prstGeom>
+              <a:blipFill>
+                <a:blip r:embed="rId5"/>
+                <a:stretch>
+                  <a:fillRect t="-8197" b="-24590"/>
+                </a:stretch>
+              </a:blipFill>
+            </p:spPr>
+            <p:txBody>
+              <a:bodyPr/>
+              <a:lstStyle/>
+              <a:p>
+                <a:r>
+                  <a:rPr lang="pt-BR">
+                    <a:noFill/>
+                  </a:rPr>
+                  <a:t> </a:t>
+                </a:r>
+              </a:p>
+            </p:txBody>
+          </p:sp>
+        </mc:Fallback>
+      </mc:AlternateContent>
+      <mc:AlternateContent xmlns:mc="http://schemas.openxmlformats.org/markup-compatibility/2006" xmlns:a14="http://schemas.microsoft.com/office/drawing/2010/main">
+        <mc:Choice Requires="a14">
+          <p:sp>
+            <p:nvSpPr>
+              <p:cNvPr id="6" name="CaixaDeTexto 5">
+                <a:extLst>
+                  <a:ext uri="{FF2B5EF4-FFF2-40B4-BE49-F238E27FC236}">
+                    <a16:creationId xmlns:a16="http://schemas.microsoft.com/office/drawing/2014/main" id="{CECF4BC9-393F-92F3-2241-24670E5635B4}"/>
+                  </a:ext>
+                </a:extLst>
+              </p:cNvPr>
+              <p:cNvSpPr txBox="1"/>
+              <p:nvPr/>
+            </p:nvSpPr>
+            <p:spPr>
+              <a:xfrm>
+                <a:off x="9716654" y="4664364"/>
+                <a:ext cx="1637146" cy="923330"/>
+              </a:xfrm>
+              <a:prstGeom prst="rect">
+                <a:avLst/>
+              </a:prstGeom>
+              <a:noFill/>
+            </p:spPr>
+            <p:txBody>
+              <a:bodyPr wrap="square" rtlCol="0">
+                <a:spAutoFit/>
+              </a:bodyPr>
+              <a:lstStyle/>
+              <a:p>
+                <a:pPr algn="ctr"/>
+                <a14:m>
+                  <m:oMath xmlns:m="http://schemas.openxmlformats.org/officeDocument/2006/math">
+                    <m:r>
+                      <a:rPr lang="pt-BR" i="1" smtClean="0">
+                        <a:latin typeface="Cambria Math" panose="02040503050406030204" pitchFamily="18" charset="0"/>
+                      </a:rPr>
+                      <m:t>𝑓</m:t>
+                    </m:r>
+                    <m:r>
+                      <a:rPr lang="pt-BR" i="1" smtClean="0">
+                        <a:latin typeface="Cambria Math" panose="02040503050406030204" pitchFamily="18" charset="0"/>
+                      </a:rPr>
+                      <m:t>(</m:t>
+                    </m:r>
+                    <m:r>
+                      <a:rPr lang="pt-BR" b="1" i="1">
+                        <a:latin typeface="Cambria Math" panose="02040503050406030204" pitchFamily="18" charset="0"/>
+                      </a:rPr>
+                      <m:t>𝒙</m:t>
+                    </m:r>
+                    <m:r>
+                      <a:rPr lang="pt-BR" i="1">
+                        <a:latin typeface="Cambria Math" panose="02040503050406030204" pitchFamily="18" charset="0"/>
+                      </a:rPr>
+                      <m:t>)</m:t>
+                    </m:r>
+                  </m:oMath>
+                </a14:m>
+                <a:r>
+                  <a:rPr lang="en-US" dirty="0"/>
+                  <a:t> </a:t>
+                </a:r>
+                <a:r>
+                  <a:rPr lang="pt-BR" dirty="0"/>
+                  <a:t>forma uma </a:t>
+                </a:r>
+                <a:r>
+                  <a:rPr lang="pt-BR" b="1" i="1" dirty="0">
+                    <a:solidFill>
+                      <a:srgbClr val="7030A0"/>
+                    </a:solidFill>
+                  </a:rPr>
+                  <a:t>fronteira de decisão</a:t>
+                </a:r>
+                <a:r>
+                  <a:rPr lang="pt-BR" dirty="0"/>
+                  <a:t>.</a:t>
+                </a:r>
+              </a:p>
+            </p:txBody>
+          </p:sp>
+        </mc:Choice>
+        <mc:Fallback xmlns="">
+          <p:sp>
+            <p:nvSpPr>
+              <p:cNvPr id="6" name="CaixaDeTexto 5">
+                <a:extLst>
+                  <a:ext uri="{FF2B5EF4-FFF2-40B4-BE49-F238E27FC236}">
+                    <a16:creationId xmlns:a16="http://schemas.microsoft.com/office/drawing/2014/main" id="{CECF4BC9-393F-92F3-2241-24670E5635B4}"/>
+                  </a:ext>
+                </a:extLst>
+              </p:cNvPr>
+              <p:cNvSpPr txBox="1">
+                <a:spLocks noRot="1" noChangeAspect="1" noMove="1" noResize="1" noEditPoints="1" noAdjustHandles="1" noChangeArrowheads="1" noChangeShapeType="1" noTextEdit="1"/>
+              </p:cNvSpPr>
+              <p:nvPr/>
+            </p:nvSpPr>
+            <p:spPr>
+              <a:xfrm>
+                <a:off x="9716654" y="4664364"/>
+                <a:ext cx="1637146" cy="923330"/>
+              </a:xfrm>
+              <a:prstGeom prst="rect">
+                <a:avLst/>
+              </a:prstGeom>
+              <a:blipFill>
+                <a:blip r:embed="rId6"/>
+                <a:stretch>
+                  <a:fillRect t="-3289" r="-1487" b="-9211"/>
+                </a:stretch>
+              </a:blipFill>
+            </p:spPr>
+            <p:txBody>
+              <a:bodyPr/>
+              <a:lstStyle/>
+              <a:p>
+                <a:r>
+                  <a:rPr lang="pt-BR">
+                    <a:noFill/>
+                  </a:rPr>
+                  <a:t> </a:t>
+                </a:r>
+              </a:p>
+            </p:txBody>
+          </p:sp>
+        </mc:Fallback>
+      </mc:AlternateContent>
+      <mc:AlternateContent xmlns:mc="http://schemas.openxmlformats.org/markup-compatibility/2006" xmlns:a14="http://schemas.microsoft.com/office/drawing/2010/main">
+        <mc:Choice Requires="a14">
+          <p:sp>
+            <p:nvSpPr>
+              <p:cNvPr id="8" name="CaixaDeTexto 5">
+                <a:extLst>
+                  <a:ext uri="{FF2B5EF4-FFF2-40B4-BE49-F238E27FC236}">
+                    <a16:creationId xmlns:a16="http://schemas.microsoft.com/office/drawing/2014/main" id="{48D3A820-D198-F9AB-C6B3-3F78DA6684D0}"/>
+                  </a:ext>
+                </a:extLst>
+              </p:cNvPr>
+              <p:cNvSpPr txBox="1"/>
+              <p:nvPr/>
+            </p:nvSpPr>
+            <p:spPr>
+              <a:xfrm>
+                <a:off x="4209861" y="4664364"/>
+                <a:ext cx="1766066" cy="923330"/>
+              </a:xfrm>
+              <a:prstGeom prst="rect">
+                <a:avLst/>
+              </a:prstGeom>
+              <a:noFill/>
+            </p:spPr>
+            <p:txBody>
+              <a:bodyPr wrap="square" rtlCol="0">
+                <a:spAutoFit/>
+              </a:bodyPr>
+              <a:lstStyle/>
+              <a:p>
+                <a:pPr algn="ctr"/>
+                <a14:m>
+                  <m:oMath xmlns:m="http://schemas.openxmlformats.org/officeDocument/2006/math">
+                    <m:r>
+                      <a:rPr lang="pt-BR" i="1" smtClean="0">
+                        <a:latin typeface="Cambria Math" panose="02040503050406030204" pitchFamily="18" charset="0"/>
+                      </a:rPr>
+                      <m:t>𝑓</m:t>
+                    </m:r>
+                    <m:r>
+                      <a:rPr lang="pt-BR" i="1" smtClean="0">
+                        <a:latin typeface="Cambria Math" panose="02040503050406030204" pitchFamily="18" charset="0"/>
+                      </a:rPr>
+                      <m:t>(</m:t>
+                    </m:r>
+                    <m:r>
+                      <a:rPr lang="pt-BR" b="1" i="1">
+                        <a:latin typeface="Cambria Math" panose="02040503050406030204" pitchFamily="18" charset="0"/>
+                      </a:rPr>
+                      <m:t>𝒙</m:t>
+                    </m:r>
+                    <m:r>
+                      <a:rPr lang="pt-BR" i="1">
+                        <a:latin typeface="Cambria Math" panose="02040503050406030204" pitchFamily="18" charset="0"/>
+                      </a:rPr>
+                      <m:t>)</m:t>
+                    </m:r>
+                  </m:oMath>
+                </a14:m>
+                <a:r>
+                  <a:rPr lang="en-US" dirty="0"/>
+                  <a:t> </a:t>
+                </a:r>
+                <a:r>
+                  <a:rPr lang="pt-BR" dirty="0"/>
+                  <a:t>captura o </a:t>
+                </a:r>
+                <a:r>
+                  <a:rPr lang="pt-BR" b="1" i="1" dirty="0">
+                    <a:solidFill>
+                      <a:schemeClr val="accent2"/>
+                    </a:solidFill>
+                  </a:rPr>
+                  <a:t>comportamento geral</a:t>
+                </a:r>
+                <a:r>
+                  <a:rPr lang="pt-BR" dirty="0"/>
+                  <a:t> dos dados.</a:t>
+                </a:r>
+              </a:p>
+            </p:txBody>
+          </p:sp>
+        </mc:Choice>
+        <mc:Fallback xmlns="">
+          <p:sp>
+            <p:nvSpPr>
+              <p:cNvPr id="8" name="CaixaDeTexto 5">
+                <a:extLst>
+                  <a:ext uri="{FF2B5EF4-FFF2-40B4-BE49-F238E27FC236}">
+                    <a16:creationId xmlns:a16="http://schemas.microsoft.com/office/drawing/2014/main" id="{48D3A820-D198-F9AB-C6B3-3F78DA6684D0}"/>
+                  </a:ext>
+                </a:extLst>
+              </p:cNvPr>
+              <p:cNvSpPr txBox="1">
+                <a:spLocks noRot="1" noChangeAspect="1" noMove="1" noResize="1" noEditPoints="1" noAdjustHandles="1" noChangeArrowheads="1" noChangeShapeType="1" noTextEdit="1"/>
+              </p:cNvSpPr>
+              <p:nvPr/>
+            </p:nvSpPr>
+            <p:spPr>
+              <a:xfrm>
+                <a:off x="4209861" y="4664364"/>
+                <a:ext cx="1766066" cy="923330"/>
+              </a:xfrm>
+              <a:prstGeom prst="rect">
+                <a:avLst/>
+              </a:prstGeom>
+              <a:blipFill>
+                <a:blip r:embed="rId7"/>
+                <a:stretch>
+                  <a:fillRect l="-2422" t="-3289" r="-3806" b="-9211"/>
+                </a:stretch>
+              </a:blipFill>
+            </p:spPr>
+            <p:txBody>
+              <a:bodyPr/>
+              <a:lstStyle/>
+              <a:p>
+                <a:r>
+                  <a:rPr lang="en-US">
+                    <a:noFill/>
+                  </a:rPr>
+                  <a:t> </a:t>
+                </a:r>
+              </a:p>
+            </p:txBody>
+          </p:sp>
+        </mc:Fallback>
+      </mc:AlternateContent>
     </p:spTree>
     <p:extLst>
       <p:ext uri="{BB962C8B-B14F-4D97-AF65-F5344CB8AC3E}">
-        <p14:creationId xmlns:p14="http://schemas.microsoft.com/office/powerpoint/2010/main" val="364118245"/>
+        <p14:creationId xmlns:p14="http://schemas.microsoft.com/office/powerpoint/2010/main" val="3270474910"/>
       </p:ext>
     </p:extLst>
   </p:cSld>
@@ -4487,13 +6671,7 @@
       </p:grpSpPr>
       <p:sp>
         <p:nvSpPr>
-          <p:cNvPr id="2" name="Título 1">
-            <a:extLst>
-              <a:ext uri="{FF2B5EF4-FFF2-40B4-BE49-F238E27FC236}">
-                <a16:creationId xmlns="" xmlns:a16="http://schemas.microsoft.com/office/drawing/2014/main" id="{94AB8438-E56E-2412-517C-8456E4CA773C}"/>
-              </a:ext>
-            </a:extLst>
-          </p:cNvPr>
+          <p:cNvPr id="2" name="Título 1"/>
           <p:cNvSpPr>
             <a:spLocks noGrp="1"/>
           </p:cNvSpPr>
@@ -4508,40 +6686,210 @@
           <a:p>
             <a:r>
               <a:rPr lang="pt-BR" dirty="0"/>
-              <a:t>Fundamentação teórica</a:t>
-            </a:r>
-          </a:p>
-        </p:txBody>
-      </p:sp>
-      <p:sp>
-        <p:nvSpPr>
-          <p:cNvPr id="3" name="Espaço Reservado para Conteúdo 2">
+              <a:t>Tarefas de classificação</a:t>
+            </a:r>
+            <a:endParaRPr lang="en-US" dirty="0"/>
+          </a:p>
+        </p:txBody>
+      </p:sp>
+      <p:sp>
+        <p:nvSpPr>
+          <p:cNvPr id="3" name="Espaço Reservado para Conteúdo 2"/>
+          <p:cNvSpPr>
+            <a:spLocks noGrp="1"/>
+          </p:cNvSpPr>
+          <p:nvPr>
+            <p:ph idx="1"/>
+          </p:nvPr>
+        </p:nvSpPr>
+        <p:spPr>
+          <a:xfrm>
+            <a:off x="838200" y="5007429"/>
+            <a:ext cx="10515600" cy="1850571"/>
+          </a:xfrm>
+        </p:spPr>
+        <p:txBody>
+          <a:bodyPr>
+            <a:normAutofit/>
+          </a:bodyPr>
+          <a:lstStyle/>
+          <a:p>
+            <a:r>
+              <a:rPr lang="pt-BR" dirty="0"/>
+              <a:t>Classificação de </a:t>
+            </a:r>
+            <a:r>
+              <a:rPr lang="pt-BR" dirty="0" err="1"/>
+              <a:t>emails</a:t>
+            </a:r>
+            <a:r>
+              <a:rPr lang="pt-BR" dirty="0"/>
+              <a:t> entre </a:t>
+            </a:r>
+            <a:r>
+              <a:rPr lang="pt-BR" i="1" dirty="0"/>
+              <a:t>spam</a:t>
+            </a:r>
+            <a:r>
+              <a:rPr lang="pt-BR" dirty="0"/>
+              <a:t> e </a:t>
+            </a:r>
+            <a:r>
+              <a:rPr lang="pt-BR" i="1" dirty="0" err="1"/>
+              <a:t>ham</a:t>
+            </a:r>
+            <a:r>
+              <a:rPr lang="pt-BR" dirty="0"/>
+              <a:t> (legítimo).</a:t>
+            </a:r>
+          </a:p>
+          <a:p>
+            <a:r>
+              <a:rPr lang="pt-BR" dirty="0"/>
+              <a:t>Classificação de objetos em imagens.</a:t>
+            </a:r>
+          </a:p>
+          <a:p>
+            <a:r>
+              <a:rPr lang="pt-BR" dirty="0"/>
+              <a:t>Reconhecimento de caracteres.</a:t>
+            </a:r>
+          </a:p>
+        </p:txBody>
+      </p:sp>
+      <p:pic>
+        <p:nvPicPr>
+          <p:cNvPr id="4" name="Picture 5" descr="Image result for supervised learning">
             <a:extLst>
               <a:ext uri="{FF2B5EF4-FFF2-40B4-BE49-F238E27FC236}">
-                <a16:creationId xmlns="" xmlns:a16="http://schemas.microsoft.com/office/drawing/2014/main" id="{F7E2B09C-6D56-4C9F-A364-B904CCE2F1A0}"/>
+                <a16:creationId xmlns:a16="http://schemas.microsoft.com/office/drawing/2014/main" id="{2520F4EA-1E3E-4F3B-97C0-DF47861DCD42}"/>
               </a:ext>
             </a:extLst>
           </p:cNvPr>
-          <p:cNvSpPr>
-            <a:spLocks noGrp="1"/>
-          </p:cNvSpPr>
-          <p:nvPr>
-            <p:ph idx="1"/>
-          </p:nvPr>
-        </p:nvSpPr>
-        <p:spPr/>
-        <p:txBody>
-          <a:bodyPr/>
-          <a:lstStyle/>
-          <a:p>
-            <a:endParaRPr lang="pt-BR"/>
-          </a:p>
-        </p:txBody>
-      </p:sp>
+          <p:cNvPicPr>
+            <a:picLocks noChangeAspect="1" noChangeArrowheads="1"/>
+          </p:cNvPicPr>
+          <p:nvPr/>
+        </p:nvPicPr>
+        <p:blipFill>
+          <a:blip r:embed="rId3">
+            <a:extLst>
+              <a:ext uri="{28A0092B-C50C-407E-A947-70E740481C1C}">
+                <a14:useLocalDpi xmlns:a14="http://schemas.microsoft.com/office/drawing/2010/main" val="0"/>
+              </a:ext>
+            </a:extLst>
+          </a:blip>
+          <a:srcRect/>
+          <a:stretch>
+            <a:fillRect/>
+          </a:stretch>
+        </p:blipFill>
+        <p:spPr bwMode="auto">
+          <a:xfrm>
+            <a:off x="333112" y="2475379"/>
+            <a:ext cx="4096017" cy="1310313"/>
+          </a:xfrm>
+          <a:prstGeom prst="rect">
+            <a:avLst/>
+          </a:prstGeom>
+          <a:noFill/>
+          <a:extLst>
+            <a:ext uri="{909E8E84-426E-40DD-AFC4-6F175D3DCCD1}">
+              <a14:hiddenFill xmlns:a14="http://schemas.microsoft.com/office/drawing/2010/main">
+                <a:solidFill>
+                  <a:srgbClr val="FFFFFF"/>
+                </a:solidFill>
+              </a14:hiddenFill>
+            </a:ext>
+          </a:extLst>
+        </p:spPr>
+      </p:pic>
+      <p:pic>
+        <p:nvPicPr>
+          <p:cNvPr id="6" name="Picture 2" descr="Measure Classification Performance: New in Wolfram Language 11"/>
+          <p:cNvPicPr>
+            <a:picLocks noChangeAspect="1" noChangeArrowheads="1"/>
+          </p:cNvPicPr>
+          <p:nvPr/>
+        </p:nvPicPr>
+        <p:blipFill>
+          <a:blip r:embed="rId4">
+            <a:extLst>
+              <a:ext uri="{28A0092B-C50C-407E-A947-70E740481C1C}">
+                <a14:useLocalDpi xmlns:a14="http://schemas.microsoft.com/office/drawing/2010/main" val="0"/>
+              </a:ext>
+            </a:extLst>
+          </a:blip>
+          <a:srcRect/>
+          <a:stretch>
+            <a:fillRect/>
+          </a:stretch>
+        </p:blipFill>
+        <p:spPr bwMode="auto">
+          <a:xfrm>
+            <a:off x="4788589" y="1690688"/>
+            <a:ext cx="2879696" cy="2879696"/>
+          </a:xfrm>
+          <a:prstGeom prst="rect">
+            <a:avLst/>
+          </a:prstGeom>
+          <a:noFill/>
+          <a:extLst>
+            <a:ext uri="{909E8E84-426E-40DD-AFC4-6F175D3DCCD1}">
+              <a14:hiddenFill xmlns:a14="http://schemas.microsoft.com/office/drawing/2010/main">
+                <a:solidFill>
+                  <a:srgbClr val="FFFFFF"/>
+                </a:solidFill>
+              </a14:hiddenFill>
+            </a:ext>
+          </a:extLst>
+        </p:spPr>
+      </p:pic>
+      <p:pic>
+        <p:nvPicPr>
+          <p:cNvPr id="1026" name="Picture 2" descr="Ana Barros (@anathinker) | Twitter"/>
+          <p:cNvPicPr>
+            <a:picLocks noChangeAspect="1" noChangeArrowheads="1"/>
+          </p:cNvPicPr>
+          <p:nvPr/>
+        </p:nvPicPr>
+        <p:blipFill>
+          <a:blip r:embed="rId5">
+            <a:extLst>
+              <a:ext uri="{28A0092B-C50C-407E-A947-70E740481C1C}">
+                <a14:useLocalDpi xmlns:a14="http://schemas.microsoft.com/office/drawing/2010/main" val="0"/>
+              </a:ext>
+            </a:extLst>
+          </a:blip>
+          <a:srcRect/>
+          <a:stretch>
+            <a:fillRect/>
+          </a:stretch>
+        </p:blipFill>
+        <p:spPr bwMode="auto">
+          <a:xfrm>
+            <a:off x="8223557" y="1915932"/>
+            <a:ext cx="3635331" cy="2409029"/>
+          </a:xfrm>
+          <a:prstGeom prst="rect">
+            <a:avLst/>
+          </a:prstGeom>
+          <a:noFill/>
+          <a:extLst>
+            <a:ext uri="{909E8E84-426E-40DD-AFC4-6F175D3DCCD1}">
+              <a14:hiddenFill xmlns:a14="http://schemas.microsoft.com/office/drawing/2010/main">
+                <a:solidFill>
+                  <a:srgbClr val="FFFFFF"/>
+                </a:solidFill>
+              </a14:hiddenFill>
+            </a:ext>
+          </a:extLst>
+        </p:spPr>
+      </p:pic>
     </p:spTree>
     <p:extLst>
       <p:ext uri="{BB962C8B-B14F-4D97-AF65-F5344CB8AC3E}">
-        <p14:creationId xmlns:p14="http://schemas.microsoft.com/office/powerpoint/2010/main" val="3187071590"/>
+        <p14:creationId xmlns:p14="http://schemas.microsoft.com/office/powerpoint/2010/main" val="4165742255"/>
       </p:ext>
     </p:extLst>
   </p:cSld>
@@ -4570,61 +6918,222 @@
       </p:grpSpPr>
       <p:sp>
         <p:nvSpPr>
-          <p:cNvPr id="2" name="Título 1">
+          <p:cNvPr id="3" name="Content Placeholder 2"/>
+          <p:cNvSpPr>
+            <a:spLocks noGrp="1"/>
+          </p:cNvSpPr>
+          <p:nvPr>
+            <p:ph idx="1"/>
+          </p:nvPr>
+        </p:nvSpPr>
+        <p:spPr>
+          <a:xfrm>
+            <a:off x="838200" y="4922156"/>
+            <a:ext cx="10858500" cy="1834185"/>
+          </a:xfrm>
+        </p:spPr>
+        <p:txBody>
+          <a:bodyPr>
+            <a:normAutofit/>
+          </a:bodyPr>
+          <a:lstStyle/>
+          <a:p>
+            <a:r>
+              <a:rPr lang="pt-BR" dirty="0"/>
+              <a:t>Classificação de texto (e.g., notícias).</a:t>
+            </a:r>
+          </a:p>
+          <a:p>
+            <a:r>
+              <a:rPr lang="pt-BR" dirty="0"/>
+              <a:t>Classificação de sentimentos.</a:t>
+            </a:r>
+          </a:p>
+          <a:p>
+            <a:r>
+              <a:rPr lang="pt-BR" dirty="0"/>
+              <a:t>Classificação do doenças (e.g., pulmonares).</a:t>
+            </a:r>
+          </a:p>
+        </p:txBody>
+      </p:sp>
+      <p:pic>
+        <p:nvPicPr>
+          <p:cNvPr id="1030" name="Picture 6" descr="Analyzing Text Classification Techniques on Youtube Data"/>
+          <p:cNvPicPr>
+            <a:picLocks noChangeAspect="1" noChangeArrowheads="1"/>
+          </p:cNvPicPr>
+          <p:nvPr/>
+        </p:nvPicPr>
+        <p:blipFill rotWithShape="1">
+          <a:blip r:embed="rId2">
+            <a:extLst>
+              <a:ext uri="{28A0092B-C50C-407E-A947-70E740481C1C}">
+                <a14:useLocalDpi xmlns:a14="http://schemas.microsoft.com/office/drawing/2010/main" val="0"/>
+              </a:ext>
+            </a:extLst>
+          </a:blip>
+          <a:srcRect l="11107" t="4114" r="9213" b="4823"/>
+          <a:stretch/>
+        </p:blipFill>
+        <p:spPr bwMode="auto">
+          <a:xfrm>
+            <a:off x="179761" y="1843447"/>
+            <a:ext cx="4215802" cy="2409029"/>
+          </a:xfrm>
+          <a:prstGeom prst="rect">
+            <a:avLst/>
+          </a:prstGeom>
+          <a:noFill/>
+          <a:extLst>
+            <a:ext uri="{909E8E84-426E-40DD-AFC4-6F175D3DCCD1}">
+              <a14:hiddenFill xmlns:a14="http://schemas.microsoft.com/office/drawing/2010/main">
+                <a:solidFill>
+                  <a:srgbClr val="FFFFFF"/>
+                </a:solidFill>
+              </a14:hiddenFill>
+            </a:ext>
+          </a:extLst>
+        </p:spPr>
+      </p:pic>
+      <p:pic>
+        <p:nvPicPr>
+          <p:cNvPr id="4" name="Picture 2" descr="Sentiment Fig 1"/>
+          <p:cNvPicPr>
+            <a:picLocks noChangeAspect="1" noChangeArrowheads="1"/>
+          </p:cNvPicPr>
+          <p:nvPr/>
+        </p:nvPicPr>
+        <p:blipFill rotWithShape="1">
+          <a:blip r:embed="rId3">
+            <a:extLst>
+              <a:ext uri="{28A0092B-C50C-407E-A947-70E740481C1C}">
+                <a14:useLocalDpi xmlns:a14="http://schemas.microsoft.com/office/drawing/2010/main" val="0"/>
+              </a:ext>
+            </a:extLst>
+          </a:blip>
+          <a:srcRect l="2276"/>
+          <a:stretch>
+            <a:fillRect/>
+          </a:stretch>
+        </p:blipFill>
+        <p:spPr bwMode="auto">
+          <a:xfrm>
+            <a:off x="4746170" y="1843447"/>
+            <a:ext cx="3581201" cy="2597141"/>
+          </a:xfrm>
+          <a:prstGeom prst="rect">
+            <a:avLst/>
+          </a:prstGeom>
+          <a:noFill/>
+          <a:extLst>
+            <a:ext uri="{909E8E84-426E-40DD-AFC4-6F175D3DCCD1}">
+              <a14:hiddenFill xmlns:a14="http://schemas.microsoft.com/office/drawing/2010/main">
+                <a:solidFill>
+                  <a:srgbClr val="FFFFFF"/>
+                </a:solidFill>
+              </a14:hiddenFill>
+            </a:ext>
+          </a:extLst>
+        </p:spPr>
+      </p:pic>
+      <p:sp>
+        <p:nvSpPr>
+          <p:cNvPr id="8" name="Title 1"/>
+          <p:cNvSpPr txBox="1">
+            <a:spLocks/>
+          </p:cNvSpPr>
+          <p:nvPr/>
+        </p:nvSpPr>
+        <p:spPr>
+          <a:xfrm>
+            <a:off x="838200" y="101659"/>
+            <a:ext cx="10515600" cy="1325563"/>
+          </a:xfrm>
+          <a:prstGeom prst="rect">
+            <a:avLst/>
+          </a:prstGeom>
+        </p:spPr>
+        <p:txBody>
+          <a:bodyPr vert="horz" lIns="91440" tIns="45720" rIns="91440" bIns="45720" rtlCol="0" anchor="ctr">
+            <a:normAutofit/>
+          </a:bodyPr>
+          <a:lstStyle>
+            <a:lvl1pPr algn="l" defTabSz="914400" rtl="0" eaLnBrk="1" latinLnBrk="0" hangingPunct="1">
+              <a:lnSpc>
+                <a:spcPct val="90000"/>
+              </a:lnSpc>
+              <a:spcBef>
+                <a:spcPct val="0"/>
+              </a:spcBef>
+              <a:buNone/>
+              <a:defRPr sz="4400" kern="1200">
+                <a:solidFill>
+                  <a:schemeClr val="tx1"/>
+                </a:solidFill>
+                <a:latin typeface="+mj-lt"/>
+                <a:ea typeface="+mj-ea"/>
+                <a:cs typeface="+mj-cs"/>
+              </a:defRPr>
+            </a:lvl1pPr>
+          </a:lstStyle>
+          <a:p>
+            <a:r>
+              <a:rPr lang="pt-BR" dirty="0"/>
+              <a:t>Tarefas de classificação</a:t>
+            </a:r>
+          </a:p>
+        </p:txBody>
+      </p:sp>
+      <p:pic>
+        <p:nvPicPr>
+          <p:cNvPr id="2" name="Picture 2">
             <a:extLst>
               <a:ext uri="{FF2B5EF4-FFF2-40B4-BE49-F238E27FC236}">
-                <a16:creationId xmlns="" xmlns:a16="http://schemas.microsoft.com/office/drawing/2014/main" id="{083FFF02-0FC8-9F0B-AAB0-565FC99EA70D}"/>
+                <a16:creationId xmlns:a16="http://schemas.microsoft.com/office/drawing/2014/main" id="{A9D184C6-ECA9-05BF-F6B4-C0965441E4E9}"/>
               </a:ext>
             </a:extLst>
           </p:cNvPr>
-          <p:cNvSpPr>
-            <a:spLocks noGrp="1"/>
-          </p:cNvSpPr>
-          <p:nvPr>
-            <p:ph type="title"/>
-          </p:nvPr>
-        </p:nvSpPr>
-        <p:spPr/>
-        <p:txBody>
-          <a:bodyPr/>
-          <a:lstStyle/>
-          <a:p>
-            <a:r>
-              <a:rPr lang="pt-BR" dirty="0"/>
-              <a:t>Arquitetura e funcionamento</a:t>
-            </a:r>
-          </a:p>
-        </p:txBody>
-      </p:sp>
-      <p:sp>
-        <p:nvSpPr>
-          <p:cNvPr id="3" name="Espaço Reservado para Conteúdo 2">
-            <a:extLst>
-              <a:ext uri="{FF2B5EF4-FFF2-40B4-BE49-F238E27FC236}">
-                <a16:creationId xmlns="" xmlns:a16="http://schemas.microsoft.com/office/drawing/2014/main" id="{8C5488AE-34B4-EF1D-F674-507FF2FCD122}"/>
-              </a:ext>
-            </a:extLst>
-          </p:cNvPr>
-          <p:cNvSpPr>
-            <a:spLocks noGrp="1"/>
-          </p:cNvSpPr>
-          <p:nvPr>
-            <p:ph idx="1"/>
-          </p:nvPr>
-        </p:nvSpPr>
-        <p:spPr/>
-        <p:txBody>
-          <a:bodyPr/>
-          <a:lstStyle/>
-          <a:p>
-            <a:endParaRPr lang="pt-BR"/>
-          </a:p>
-        </p:txBody>
-      </p:sp>
+          <p:cNvPicPr>
+            <a:picLocks noChangeAspect="1" noChangeArrowheads="1"/>
+          </p:cNvPicPr>
+          <p:nvPr/>
+        </p:nvPicPr>
+        <p:blipFill rotWithShape="1">
+          <a:blip r:embed="rId4">
+            <a:extLst>
+              <a:ext uri="{28A0092B-C50C-407E-A947-70E740481C1C}">
+                <a14:useLocalDpi xmlns:a14="http://schemas.microsoft.com/office/drawing/2010/main" val="0"/>
+              </a:ext>
+            </a:extLst>
+          </a:blip>
+          <a:srcRect t="17700" r="73203" b="10234"/>
+          <a:stretch/>
+        </p:blipFill>
+        <p:spPr bwMode="auto">
+          <a:xfrm>
+            <a:off x="8652452" y="1337220"/>
+            <a:ext cx="3267075" cy="3331481"/>
+          </a:xfrm>
+          <a:prstGeom prst="rect">
+            <a:avLst/>
+          </a:prstGeom>
+          <a:noFill/>
+          <a:extLst>
+            <a:ext uri="{909E8E84-426E-40DD-AFC4-6F175D3DCCD1}">
+              <a14:hiddenFill xmlns:a14="http://schemas.microsoft.com/office/drawing/2010/main">
+                <a:solidFill>
+                  <a:srgbClr val="FFFFFF"/>
+                </a:solidFill>
+              </a14:hiddenFill>
+            </a:ext>
+          </a:extLst>
+        </p:spPr>
+      </p:pic>
     </p:spTree>
     <p:extLst>
       <p:ext uri="{BB962C8B-B14F-4D97-AF65-F5344CB8AC3E}">
-        <p14:creationId xmlns:p14="http://schemas.microsoft.com/office/powerpoint/2010/main" val="1547259554"/>
+        <p14:creationId xmlns:p14="http://schemas.microsoft.com/office/powerpoint/2010/main" val="2807082195"/>
       </p:ext>
     </p:extLst>
   </p:cSld>
@@ -4635,184 +7144,6 @@
 </file>
 
 <file path=ppt/slides/slide5.xml><?xml version="1.0" encoding="utf-8"?>
-<p:sld xmlns:a="http://schemas.openxmlformats.org/drawingml/2006/main" xmlns:r="http://schemas.openxmlformats.org/officeDocument/2006/relationships" xmlns:p="http://schemas.openxmlformats.org/presentationml/2006/main">
-  <p:cSld>
-    <p:spTree>
-      <p:nvGrpSpPr>
-        <p:cNvPr id="1" name="">
-          <a:extLst>
-            <a:ext uri="{FF2B5EF4-FFF2-40B4-BE49-F238E27FC236}">
-              <a16:creationId xmlns="" xmlns:a16="http://schemas.microsoft.com/office/drawing/2014/main" id="{E1C9F56A-97FC-7CCD-E5BA-3B5E230AD9AB}"/>
-            </a:ext>
-          </a:extLst>
-        </p:cNvPr>
-        <p:cNvGrpSpPr/>
-        <p:nvPr/>
-      </p:nvGrpSpPr>
-      <p:grpSpPr>
-        <a:xfrm>
-          <a:off x="0" y="0"/>
-          <a:ext cx="0" cy="0"/>
-          <a:chOff x="0" y="0"/>
-          <a:chExt cx="0" cy="0"/>
-        </a:xfrm>
-      </p:grpSpPr>
-      <p:sp>
-        <p:nvSpPr>
-          <p:cNvPr id="2" name="Título 1">
-            <a:extLst>
-              <a:ext uri="{FF2B5EF4-FFF2-40B4-BE49-F238E27FC236}">
-                <a16:creationId xmlns="" xmlns:a16="http://schemas.microsoft.com/office/drawing/2014/main" id="{A979DAB9-0612-F0CD-7BB1-AF52B98B3210}"/>
-              </a:ext>
-            </a:extLst>
-          </p:cNvPr>
-          <p:cNvSpPr>
-            <a:spLocks noGrp="1"/>
-          </p:cNvSpPr>
-          <p:nvPr>
-            <p:ph type="title"/>
-          </p:nvPr>
-        </p:nvSpPr>
-        <p:spPr/>
-        <p:txBody>
-          <a:bodyPr/>
-          <a:lstStyle/>
-          <a:p>
-            <a:r>
-              <a:rPr lang="pt-BR" dirty="0"/>
-              <a:t>Treinamento e otimização</a:t>
-            </a:r>
-          </a:p>
-        </p:txBody>
-      </p:sp>
-      <p:sp>
-        <p:nvSpPr>
-          <p:cNvPr id="3" name="Espaço Reservado para Conteúdo 2">
-            <a:extLst>
-              <a:ext uri="{FF2B5EF4-FFF2-40B4-BE49-F238E27FC236}">
-                <a16:creationId xmlns="" xmlns:a16="http://schemas.microsoft.com/office/drawing/2014/main" id="{F22F88A5-87D1-340F-853F-8C2ED8F8C877}"/>
-              </a:ext>
-            </a:extLst>
-          </p:cNvPr>
-          <p:cNvSpPr>
-            <a:spLocks noGrp="1"/>
-          </p:cNvSpPr>
-          <p:nvPr>
-            <p:ph idx="1"/>
-          </p:nvPr>
-        </p:nvSpPr>
-        <p:spPr/>
-        <p:txBody>
-          <a:bodyPr/>
-          <a:lstStyle/>
-          <a:p>
-            <a:endParaRPr lang="pt-BR"/>
-          </a:p>
-        </p:txBody>
-      </p:sp>
-    </p:spTree>
-    <p:extLst>
-      <p:ext uri="{BB962C8B-B14F-4D97-AF65-F5344CB8AC3E}">
-        <p14:creationId xmlns:p14="http://schemas.microsoft.com/office/powerpoint/2010/main" val="3906980817"/>
-      </p:ext>
-    </p:extLst>
-  </p:cSld>
-  <p:clrMapOvr>
-    <a:masterClrMapping/>
-  </p:clrMapOvr>
-</p:sld>
-</file>
-
-<file path=ppt/slides/slide6.xml><?xml version="1.0" encoding="utf-8"?>
-<p:sld xmlns:a="http://schemas.openxmlformats.org/drawingml/2006/main" xmlns:r="http://schemas.openxmlformats.org/officeDocument/2006/relationships" xmlns:p="http://schemas.openxmlformats.org/presentationml/2006/main">
-  <p:cSld>
-    <p:spTree>
-      <p:nvGrpSpPr>
-        <p:cNvPr id="1" name="">
-          <a:extLst>
-            <a:ext uri="{FF2B5EF4-FFF2-40B4-BE49-F238E27FC236}">
-              <a16:creationId xmlns="" xmlns:a16="http://schemas.microsoft.com/office/drawing/2014/main" id="{B28A9759-CA4F-DA4F-85C2-F6E51DCED2D9}"/>
-            </a:ext>
-          </a:extLst>
-        </p:cNvPr>
-        <p:cNvGrpSpPr/>
-        <p:nvPr/>
-      </p:nvGrpSpPr>
-      <p:grpSpPr>
-        <a:xfrm>
-          <a:off x="0" y="0"/>
-          <a:ext cx="0" cy="0"/>
-          <a:chOff x="0" y="0"/>
-          <a:chExt cx="0" cy="0"/>
-        </a:xfrm>
-      </p:grpSpPr>
-      <p:sp>
-        <p:nvSpPr>
-          <p:cNvPr id="2" name="Título 1">
-            <a:extLst>
-              <a:ext uri="{FF2B5EF4-FFF2-40B4-BE49-F238E27FC236}">
-                <a16:creationId xmlns="" xmlns:a16="http://schemas.microsoft.com/office/drawing/2014/main" id="{072F732D-34CE-6153-324F-D7F6821577F0}"/>
-              </a:ext>
-            </a:extLst>
-          </p:cNvPr>
-          <p:cNvSpPr>
-            <a:spLocks noGrp="1"/>
-          </p:cNvSpPr>
-          <p:nvPr>
-            <p:ph type="title"/>
-          </p:nvPr>
-        </p:nvSpPr>
-        <p:spPr/>
-        <p:txBody>
-          <a:bodyPr/>
-          <a:lstStyle/>
-          <a:p>
-            <a:r>
-              <a:rPr lang="pt-BR" dirty="0"/>
-              <a:t>Vantagens e desvantagens</a:t>
-            </a:r>
-          </a:p>
-        </p:txBody>
-      </p:sp>
-      <p:sp>
-        <p:nvSpPr>
-          <p:cNvPr id="3" name="Espaço Reservado para Conteúdo 2">
-            <a:extLst>
-              <a:ext uri="{FF2B5EF4-FFF2-40B4-BE49-F238E27FC236}">
-                <a16:creationId xmlns="" xmlns:a16="http://schemas.microsoft.com/office/drawing/2014/main" id="{62A55622-8E11-E5D7-8EAF-7AE2CCAA3321}"/>
-              </a:ext>
-            </a:extLst>
-          </p:cNvPr>
-          <p:cNvSpPr>
-            <a:spLocks noGrp="1"/>
-          </p:cNvSpPr>
-          <p:nvPr>
-            <p:ph idx="1"/>
-          </p:nvPr>
-        </p:nvSpPr>
-        <p:spPr/>
-        <p:txBody>
-          <a:bodyPr/>
-          <a:lstStyle/>
-          <a:p>
-            <a:endParaRPr lang="pt-BR"/>
-          </a:p>
-        </p:txBody>
-      </p:sp>
-    </p:spTree>
-    <p:extLst>
-      <p:ext uri="{BB962C8B-B14F-4D97-AF65-F5344CB8AC3E}">
-        <p14:creationId xmlns:p14="http://schemas.microsoft.com/office/powerpoint/2010/main" val="1521811257"/>
-      </p:ext>
-    </p:extLst>
-  </p:cSld>
-  <p:clrMapOvr>
-    <a:masterClrMapping/>
-  </p:clrMapOvr>
-</p:sld>
-</file>
-
-<file path=ppt/slides/slide7.xml><?xml version="1.0" encoding="utf-8"?>
 <p:sld xmlns:a="http://schemas.openxmlformats.org/drawingml/2006/main" xmlns:r="http://schemas.openxmlformats.org/officeDocument/2006/relationships" xmlns:p="http://schemas.openxmlformats.org/presentationml/2006/main">
   <p:cSld>
     <p:spTree>
@@ -4829,63 +7160,589 @@
           <a:chExt cx="0" cy="0"/>
         </a:xfrm>
       </p:grpSpPr>
-      <p:sp>
-        <p:nvSpPr>
-          <p:cNvPr id="2" name="Título 1">
+      <p:pic>
+        <p:nvPicPr>
+          <p:cNvPr id="1026" name="Picture 2" descr="but it happened 😂 #DeepLearning #AI #MachineLearning">
             <a:extLst>
               <a:ext uri="{FF2B5EF4-FFF2-40B4-BE49-F238E27FC236}">
-                <a16:creationId xmlns="" xmlns:a16="http://schemas.microsoft.com/office/drawing/2014/main" id="{B9E502FC-4440-F5DA-F299-69CD15E702AE}"/>
+                <a16:creationId xmlns:a16="http://schemas.microsoft.com/office/drawing/2014/main" id="{F25FF98E-22C0-F45E-2254-540617F2FD27}"/>
               </a:ext>
             </a:extLst>
           </p:cNvPr>
-          <p:cNvSpPr>
-            <a:spLocks noGrp="1"/>
-          </p:cNvSpPr>
-          <p:nvPr>
-            <p:ph type="title"/>
-          </p:nvPr>
-        </p:nvSpPr>
-        <p:spPr/>
-        <p:txBody>
-          <a:bodyPr/>
-          <a:lstStyle/>
-          <a:p>
-            <a:r>
-              <a:rPr lang="pt-BR" dirty="0"/>
-              <a:t>Exemplo(s) de aplicação</a:t>
-            </a:r>
-          </a:p>
-        </p:txBody>
-      </p:sp>
-      <p:sp>
-        <p:nvSpPr>
-          <p:cNvPr id="3" name="Espaço Reservado para Conteúdo 2">
-            <a:extLst>
-              <a:ext uri="{FF2B5EF4-FFF2-40B4-BE49-F238E27FC236}">
-                <a16:creationId xmlns="" xmlns:a16="http://schemas.microsoft.com/office/drawing/2014/main" id="{69359096-6B47-BEA3-55AD-95F90CDC8489}"/>
-              </a:ext>
-            </a:extLst>
-          </p:cNvPr>
-          <p:cNvSpPr>
-            <a:spLocks noGrp="1"/>
-          </p:cNvSpPr>
-          <p:nvPr>
-            <p:ph idx="1"/>
-          </p:nvPr>
-        </p:nvSpPr>
-        <p:spPr/>
-        <p:txBody>
-          <a:bodyPr/>
-          <a:lstStyle/>
-          <a:p>
-            <a:endParaRPr lang="pt-BR"/>
-          </a:p>
-        </p:txBody>
-      </p:sp>
+          <p:cNvPicPr>
+            <a:picLocks noChangeAspect="1" noChangeArrowheads="1"/>
+          </p:cNvPicPr>
+          <p:nvPr/>
+        </p:nvPicPr>
+        <p:blipFill>
+          <a:blip r:embed="rId2">
+            <a:extLst>
+              <a:ext uri="{28A0092B-C50C-407E-A947-70E740481C1C}">
+                <a14:useLocalDpi xmlns:a14="http://schemas.microsoft.com/office/drawing/2010/main" val="0"/>
+              </a:ext>
+            </a:extLst>
+          </a:blip>
+          <a:srcRect/>
+          <a:stretch>
+            <a:fillRect/>
+          </a:stretch>
+        </p:blipFill>
+        <p:spPr bwMode="auto">
+          <a:xfrm>
+            <a:off x="3772240" y="1264812"/>
+            <a:ext cx="4647519" cy="4328376"/>
+          </a:xfrm>
+          <a:prstGeom prst="rect">
+            <a:avLst/>
+          </a:prstGeom>
+          <a:noFill/>
+          <a:extLst>
+            <a:ext uri="{909E8E84-426E-40DD-AFC4-6F175D3DCCD1}">
+              <a14:hiddenFill xmlns:a14="http://schemas.microsoft.com/office/drawing/2010/main">
+                <a:solidFill>
+                  <a:srgbClr val="FFFFFF"/>
+                </a:solidFill>
+              </a14:hiddenFill>
+            </a:ext>
+          </a:extLst>
+        </p:spPr>
+      </p:pic>
     </p:spTree>
     <p:extLst>
       <p:ext uri="{BB962C8B-B14F-4D97-AF65-F5344CB8AC3E}">
-        <p14:creationId xmlns:p14="http://schemas.microsoft.com/office/powerpoint/2010/main" val="1532530965"/>
+        <p14:creationId xmlns:p14="http://schemas.microsoft.com/office/powerpoint/2010/main" val="1885962338"/>
+      </p:ext>
+    </p:extLst>
+  </p:cSld>
+  <p:clrMapOvr>
+    <a:masterClrMapping/>
+  </p:clrMapOvr>
+</p:sld>
+</file>
+
+<file path=ppt/slides/slide6.xml><?xml version="1.0" encoding="utf-8"?>
+<p:sld xmlns:a="http://schemas.openxmlformats.org/drawingml/2006/main" xmlns:r="http://schemas.openxmlformats.org/officeDocument/2006/relationships" xmlns:p="http://schemas.openxmlformats.org/presentationml/2006/main">
+  <p:cSld>
+    <p:spTree>
+      <p:nvGrpSpPr>
+        <p:cNvPr id="1" name=""/>
+        <p:cNvGrpSpPr/>
+        <p:nvPr/>
+      </p:nvGrpSpPr>
+      <p:grpSpPr>
+        <a:xfrm>
+          <a:off x="0" y="0"/>
+          <a:ext cx="0" cy="0"/>
+          <a:chOff x="0" y="0"/>
+          <a:chExt cx="0" cy="0"/>
+        </a:xfrm>
+      </p:grpSpPr>
+      <p:sp>
+        <p:nvSpPr>
+          <p:cNvPr id="2" name="Title 1">
+            <a:extLst>
+              <a:ext uri="{FF2B5EF4-FFF2-40B4-BE49-F238E27FC236}">
+                <a16:creationId xmlns:a16="http://schemas.microsoft.com/office/drawing/2014/main" id="{C2C95A22-E872-4069-E235-358A1FCDD284}"/>
+              </a:ext>
+            </a:extLst>
+          </p:cNvPr>
+          <p:cNvSpPr>
+            <a:spLocks noGrp="1"/>
+          </p:cNvSpPr>
+          <p:nvPr>
+            <p:ph type="title"/>
+          </p:nvPr>
+        </p:nvSpPr>
+        <p:spPr/>
+        <p:txBody>
+          <a:bodyPr/>
+          <a:lstStyle/>
+          <a:p>
+            <a:r>
+              <a:rPr lang="pt-BR" dirty="0"/>
+              <a:t>Tipos de classificadores</a:t>
+            </a:r>
+            <a:endParaRPr lang="en-US" dirty="0"/>
+          </a:p>
+        </p:txBody>
+      </p:sp>
+      <mc:AlternateContent xmlns:mc="http://schemas.openxmlformats.org/markup-compatibility/2006">
+        <mc:Choice xmlns:a14="http://schemas.microsoft.com/office/drawing/2010/main" Requires="a14">
+          <p:sp>
+            <p:nvSpPr>
+              <p:cNvPr id="3" name="Content Placeholder 2">
+                <a:extLst>
+                  <a:ext uri="{FF2B5EF4-FFF2-40B4-BE49-F238E27FC236}">
+                    <a16:creationId xmlns:a16="http://schemas.microsoft.com/office/drawing/2014/main" id="{76965F31-6E51-4FAB-4852-DECB11BED972}"/>
+                  </a:ext>
+                </a:extLst>
+              </p:cNvPr>
+              <p:cNvSpPr>
+                <a:spLocks noGrp="1"/>
+              </p:cNvSpPr>
+              <p:nvPr>
+                <p:ph idx="1"/>
+              </p:nvPr>
+            </p:nvSpPr>
+            <p:spPr>
+              <a:xfrm>
+                <a:off x="838200" y="1825624"/>
+                <a:ext cx="11125200" cy="5032376"/>
+              </a:xfrm>
+            </p:spPr>
+            <p:txBody>
+              <a:bodyPr/>
+              <a:lstStyle/>
+              <a:p>
+                <a:r>
+                  <a:rPr lang="pt-BR" dirty="0"/>
+                  <a:t>Organizamos os tipos de classificadores segundo dois critérios principais:</a:t>
+                </a:r>
+              </a:p>
+              <a:p>
+                <a:pPr lvl="1">
+                  <a:buFont typeface="Wingdings" panose="05000000000000000000" pitchFamily="2" charset="2"/>
+                  <a:buChar char="§"/>
+                </a:pPr>
+                <a:r>
+                  <a:rPr lang="pt-BR" dirty="0"/>
+                  <a:t>Número total de classes possíveis, </a:t>
+                </a:r>
+                <a14:m>
+                  <m:oMath xmlns:m="http://schemas.openxmlformats.org/officeDocument/2006/math">
+                    <m:r>
+                      <a:rPr lang="pt-BR" i="1">
+                        <a:latin typeface="Cambria Math" panose="02040503050406030204" pitchFamily="18" charset="0"/>
+                      </a:rPr>
+                      <m:t>𝑄</m:t>
+                    </m:r>
+                  </m:oMath>
+                </a14:m>
+                <a:r>
+                  <a:rPr lang="pt-BR" dirty="0"/>
+                  <a:t>, e</a:t>
+                </a:r>
+              </a:p>
+              <a:p>
+                <a:pPr lvl="1">
+                  <a:buFont typeface="Wingdings" panose="05000000000000000000" pitchFamily="2" charset="2"/>
+                  <a:buChar char="§"/>
+                </a:pPr>
+                <a:r>
+                  <a:rPr lang="pt-BR" dirty="0"/>
+                  <a:t>Quantidade de classes atribuídas a cada amostra.</a:t>
+                </a:r>
+              </a:p>
+              <a:p>
+                <a:r>
+                  <a:rPr lang="pt-BR" dirty="0"/>
+                  <a:t>Dependendo do número de classes possíveis, </a:t>
+                </a:r>
+                <a14:m>
+                  <m:oMath xmlns:m="http://schemas.openxmlformats.org/officeDocument/2006/math">
+                    <m:r>
+                      <a:rPr lang="pt-BR" i="1">
+                        <a:latin typeface="Cambria Math" panose="02040503050406030204" pitchFamily="18" charset="0"/>
+                      </a:rPr>
+                      <m:t>𝑄</m:t>
+                    </m:r>
+                  </m:oMath>
+                </a14:m>
+                <a:r>
+                  <a:rPr lang="pt-BR" dirty="0"/>
+                  <a:t>, podemos separar os classificadores em dois tipos:</a:t>
+                </a:r>
+              </a:p>
+              <a:p>
+                <a:pPr lvl="1">
+                  <a:buFont typeface="Wingdings" panose="05000000000000000000" pitchFamily="2" charset="2"/>
+                  <a:buChar char="§"/>
+                </a:pPr>
+                <a:r>
+                  <a:rPr lang="pt-BR" dirty="0"/>
+                  <a:t>Binários, onde </a:t>
+                </a:r>
+                <a14:m>
+                  <m:oMath xmlns:m="http://schemas.openxmlformats.org/officeDocument/2006/math">
+                    <m:r>
+                      <a:rPr lang="pt-BR" i="1">
+                        <a:latin typeface="Cambria Math" panose="02040503050406030204" pitchFamily="18" charset="0"/>
+                      </a:rPr>
+                      <m:t>𝑄</m:t>
+                    </m:r>
+                    <m:r>
+                      <a:rPr lang="pt-BR" b="0" i="1" smtClean="0">
+                        <a:latin typeface="Cambria Math" panose="02040503050406030204" pitchFamily="18" charset="0"/>
+                      </a:rPr>
+                      <m:t>=2</m:t>
+                    </m:r>
+                  </m:oMath>
+                </a14:m>
+                <a:r>
+                  <a:rPr lang="pt-BR" b="0" dirty="0"/>
+                  <a:t>.</a:t>
+                </a:r>
+              </a:p>
+              <a:p>
+                <a:pPr lvl="2">
+                  <a:buFont typeface="Courier New" panose="02070309020205020404" pitchFamily="49" charset="0"/>
+                  <a:buChar char="o"/>
+                </a:pPr>
+                <a:r>
+                  <a:rPr lang="pt-BR" dirty="0"/>
+                  <a:t>Existem apenas </a:t>
+                </a:r>
+                <a:r>
+                  <a:rPr lang="pt-BR" b="1" dirty="0"/>
+                  <a:t>duas classes possíveis</a:t>
+                </a:r>
+                <a:endParaRPr lang="pt-BR" dirty="0"/>
+              </a:p>
+              <a:p>
+                <a:pPr lvl="1">
+                  <a:buFont typeface="Wingdings" panose="05000000000000000000" pitchFamily="2" charset="2"/>
+                  <a:buChar char="§"/>
+                </a:pPr>
+                <a:r>
+                  <a:rPr lang="en-US" dirty="0" err="1"/>
+                  <a:t>Multiclasse</a:t>
+                </a:r>
+                <a:r>
+                  <a:rPr lang="en-US" dirty="0"/>
+                  <a:t>, </a:t>
+                </a:r>
+                <a:r>
+                  <a:rPr lang="en-US" dirty="0" err="1"/>
+                  <a:t>onde</a:t>
+                </a:r>
+                <a:r>
+                  <a:rPr lang="en-US" dirty="0"/>
+                  <a:t> </a:t>
+                </a:r>
+                <a14:m>
+                  <m:oMath xmlns:m="http://schemas.openxmlformats.org/officeDocument/2006/math">
+                    <m:r>
+                      <a:rPr lang="pt-BR" i="1">
+                        <a:latin typeface="Cambria Math" panose="02040503050406030204" pitchFamily="18" charset="0"/>
+                      </a:rPr>
+                      <m:t>𝑄</m:t>
+                    </m:r>
+                    <m:r>
+                      <a:rPr lang="pt-BR" b="0" i="1" smtClean="0">
+                        <a:latin typeface="Cambria Math" panose="02040503050406030204" pitchFamily="18" charset="0"/>
+                      </a:rPr>
+                      <m:t>&gt;2.</m:t>
+                    </m:r>
+                  </m:oMath>
+                </a14:m>
+                <a:endParaRPr lang="en-US" dirty="0"/>
+              </a:p>
+              <a:p>
+                <a:pPr lvl="2">
+                  <a:buFont typeface="Courier New" panose="02070309020205020404" pitchFamily="49" charset="0"/>
+                  <a:buChar char="o"/>
+                </a:pPr>
+                <a:r>
+                  <a:rPr lang="pt-BR" dirty="0"/>
+                  <a:t>Existem </a:t>
+                </a:r>
+                <a:r>
+                  <a:rPr lang="pt-BR" b="1" dirty="0"/>
+                  <a:t>três ou mais classes</a:t>
+                </a:r>
+                <a:endParaRPr lang="pt-BR" dirty="0"/>
+              </a:p>
+              <a:p>
+                <a:r>
+                  <a:rPr lang="pt-BR" dirty="0"/>
+                  <a:t>Em ambos os casos, cada amostra pertence a </a:t>
+                </a:r>
+                <a:r>
+                  <a:rPr lang="pt-BR" b="1" dirty="0"/>
+                  <a:t>uma única classe.</a:t>
+                </a:r>
+                <a:endParaRPr lang="pt-BR" dirty="0"/>
+              </a:p>
+            </p:txBody>
+          </p:sp>
+        </mc:Choice>
+        <mc:Fallback>
+          <p:sp>
+            <p:nvSpPr>
+              <p:cNvPr id="3" name="Content Placeholder 2">
+                <a:extLst>
+                  <a:ext uri="{FF2B5EF4-FFF2-40B4-BE49-F238E27FC236}">
+                    <a16:creationId xmlns:a16="http://schemas.microsoft.com/office/drawing/2014/main" id="{76965F31-6E51-4FAB-4852-DECB11BED972}"/>
+                  </a:ext>
+                </a:extLst>
+              </p:cNvPr>
+              <p:cNvSpPr>
+                <a:spLocks noGrp="1" noRot="1" noChangeAspect="1" noMove="1" noResize="1" noEditPoints="1" noAdjustHandles="1" noChangeArrowheads="1" noChangeShapeType="1" noTextEdit="1"/>
+              </p:cNvSpPr>
+              <p:nvPr>
+                <p:ph idx="1"/>
+              </p:nvPr>
+            </p:nvSpPr>
+            <p:spPr>
+              <a:xfrm>
+                <a:off x="838200" y="1825624"/>
+                <a:ext cx="11125200" cy="5032376"/>
+              </a:xfrm>
+              <a:blipFill>
+                <a:blip r:embed="rId3"/>
+                <a:stretch>
+                  <a:fillRect l="-986" t="-1937"/>
+                </a:stretch>
+              </a:blipFill>
+            </p:spPr>
+            <p:txBody>
+              <a:bodyPr/>
+              <a:lstStyle/>
+              <a:p>
+                <a:r>
+                  <a:rPr lang="en-US">
+                    <a:noFill/>
+                  </a:rPr>
+                  <a:t> </a:t>
+                </a:r>
+              </a:p>
+            </p:txBody>
+          </p:sp>
+        </mc:Fallback>
+      </mc:AlternateContent>
+    </p:spTree>
+    <p:extLst>
+      <p:ext uri="{BB962C8B-B14F-4D97-AF65-F5344CB8AC3E}">
+        <p14:creationId xmlns:p14="http://schemas.microsoft.com/office/powerpoint/2010/main" val="3352811596"/>
+      </p:ext>
+    </p:extLst>
+  </p:cSld>
+  <p:clrMapOvr>
+    <a:masterClrMapping/>
+  </p:clrMapOvr>
+</p:sld>
+</file>
+
+<file path=ppt/slides/slide7.xml><?xml version="1.0" encoding="utf-8"?>
+<p:sld xmlns:a="http://schemas.openxmlformats.org/drawingml/2006/main" xmlns:r="http://schemas.openxmlformats.org/officeDocument/2006/relationships" xmlns:p="http://schemas.openxmlformats.org/presentationml/2006/main">
+  <p:cSld>
+    <p:spTree>
+      <p:nvGrpSpPr>
+        <p:cNvPr id="1" name="">
+          <a:extLst>
+            <a:ext uri="{FF2B5EF4-FFF2-40B4-BE49-F238E27FC236}">
+              <a16:creationId xmlns:a16="http://schemas.microsoft.com/office/drawing/2014/main" id="{183AE076-4457-7BD3-2388-70AAD71222AC}"/>
+            </a:ext>
+          </a:extLst>
+        </p:cNvPr>
+        <p:cNvGrpSpPr/>
+        <p:nvPr/>
+      </p:nvGrpSpPr>
+      <p:grpSpPr>
+        <a:xfrm>
+          <a:off x="0" y="0"/>
+          <a:ext cx="0" cy="0"/>
+          <a:chOff x="0" y="0"/>
+          <a:chExt cx="0" cy="0"/>
+        </a:xfrm>
+      </p:grpSpPr>
+      <p:sp>
+        <p:nvSpPr>
+          <p:cNvPr id="2" name="Title 1">
+            <a:extLst>
+              <a:ext uri="{FF2B5EF4-FFF2-40B4-BE49-F238E27FC236}">
+                <a16:creationId xmlns:a16="http://schemas.microsoft.com/office/drawing/2014/main" id="{C39F8340-2935-1CC3-CE87-3E1A76A73E3F}"/>
+              </a:ext>
+            </a:extLst>
+          </p:cNvPr>
+          <p:cNvSpPr>
+            <a:spLocks noGrp="1"/>
+          </p:cNvSpPr>
+          <p:nvPr>
+            <p:ph type="title"/>
+          </p:nvPr>
+        </p:nvSpPr>
+        <p:spPr/>
+        <p:txBody>
+          <a:bodyPr/>
+          <a:lstStyle/>
+          <a:p>
+            <a:r>
+              <a:rPr lang="pt-BR" dirty="0"/>
+              <a:t>Tipos de classificadores</a:t>
+            </a:r>
+            <a:endParaRPr lang="en-US" dirty="0"/>
+          </a:p>
+        </p:txBody>
+      </p:sp>
+      <p:sp>
+        <p:nvSpPr>
+          <p:cNvPr id="3" name="Content Placeholder 2">
+            <a:extLst>
+              <a:ext uri="{FF2B5EF4-FFF2-40B4-BE49-F238E27FC236}">
+                <a16:creationId xmlns:a16="http://schemas.microsoft.com/office/drawing/2014/main" id="{310FC0EC-BE21-C1F6-BD0D-5113525C20D7}"/>
+              </a:ext>
+            </a:extLst>
+          </p:cNvPr>
+          <p:cNvSpPr>
+            <a:spLocks noGrp="1"/>
+          </p:cNvSpPr>
+          <p:nvPr>
+            <p:ph idx="1"/>
+          </p:nvPr>
+        </p:nvSpPr>
+        <p:spPr>
+          <a:xfrm>
+            <a:off x="838200" y="1825624"/>
+            <a:ext cx="11125200" cy="5032376"/>
+          </a:xfrm>
+        </p:spPr>
+        <p:txBody>
+          <a:bodyPr>
+            <a:normAutofit/>
+          </a:bodyPr>
+          <a:lstStyle/>
+          <a:p>
+            <a:r>
+              <a:rPr lang="pt-BR" dirty="0"/>
+              <a:t>Podemos também separar os classificadores dependendo de quantas classes podem ser atribuídas a uma única instância:</a:t>
+            </a:r>
+          </a:p>
+          <a:p>
+            <a:pPr lvl="1">
+              <a:buFont typeface="Wingdings" panose="05000000000000000000" pitchFamily="2" charset="2"/>
+              <a:buChar char="§"/>
+            </a:pPr>
+            <a:r>
+              <a:rPr lang="pt-BR" dirty="0"/>
+              <a:t>Classificação </a:t>
+            </a:r>
+            <a:r>
+              <a:rPr lang="pt-BR" i="1" dirty="0"/>
+              <a:t>single-</a:t>
+            </a:r>
+            <a:r>
+              <a:rPr lang="pt-BR" i="1" dirty="0" err="1"/>
+              <a:t>label</a:t>
+            </a:r>
+            <a:endParaRPr lang="pt-BR" i="1" dirty="0"/>
+          </a:p>
+          <a:p>
+            <a:pPr lvl="2">
+              <a:buFont typeface="Courier New" panose="02070309020205020404" pitchFamily="49" charset="0"/>
+              <a:buChar char="o"/>
+            </a:pPr>
+            <a:r>
+              <a:rPr lang="pt-BR" dirty="0"/>
+              <a:t>Cada amostra recebe apenas uma classe.</a:t>
+            </a:r>
+          </a:p>
+          <a:p>
+            <a:pPr lvl="2">
+              <a:buFont typeface="Courier New" panose="02070309020205020404" pitchFamily="49" charset="0"/>
+              <a:buChar char="o"/>
+            </a:pPr>
+            <a:r>
+              <a:rPr lang="pt-BR" dirty="0"/>
+              <a:t>Inclui: binária e </a:t>
+            </a:r>
+            <a:r>
+              <a:rPr lang="pt-BR" dirty="0" err="1"/>
+              <a:t>multiclasse</a:t>
+            </a:r>
+            <a:endParaRPr lang="pt-BR" dirty="0"/>
+          </a:p>
+          <a:p>
+            <a:pPr lvl="2">
+              <a:buFont typeface="Courier New" panose="02070309020205020404" pitchFamily="49" charset="0"/>
+              <a:buChar char="o"/>
+            </a:pPr>
+            <a:r>
+              <a:rPr lang="pt-BR" dirty="0"/>
+              <a:t>As classes são mutuamente exclusivas.</a:t>
+            </a:r>
+          </a:p>
+          <a:p>
+            <a:pPr lvl="1">
+              <a:buFont typeface="Wingdings" panose="05000000000000000000" pitchFamily="2" charset="2"/>
+              <a:buChar char="§"/>
+            </a:pPr>
+            <a:r>
+              <a:rPr lang="pt-BR" dirty="0"/>
+              <a:t>Classificação </a:t>
+            </a:r>
+            <a:r>
+              <a:rPr lang="pt-BR" i="1" dirty="0" err="1"/>
+              <a:t>multilabel</a:t>
+            </a:r>
+            <a:endParaRPr lang="pt-BR" i="1" dirty="0"/>
+          </a:p>
+          <a:p>
+            <a:pPr lvl="2">
+              <a:buFont typeface="Courier New" panose="02070309020205020404" pitchFamily="49" charset="0"/>
+              <a:buChar char="o"/>
+            </a:pPr>
+            <a:r>
+              <a:rPr lang="pt-BR" dirty="0"/>
+              <a:t>Uma amostra pode pertencer a várias classes simultaneamente</a:t>
+            </a:r>
+          </a:p>
+          <a:p>
+            <a:pPr lvl="2">
+              <a:buFont typeface="Courier New" panose="02070309020205020404" pitchFamily="49" charset="0"/>
+              <a:buChar char="o"/>
+            </a:pPr>
+            <a:r>
+              <a:rPr lang="pt-BR" dirty="0"/>
+              <a:t>As classes não são mutuamente exclusivas</a:t>
+            </a:r>
+          </a:p>
+          <a:p>
+            <a:pPr lvl="2">
+              <a:buFont typeface="Courier New" panose="02070309020205020404" pitchFamily="49" charset="0"/>
+              <a:buChar char="o"/>
+            </a:pPr>
+            <a:r>
+              <a:rPr lang="pt-BR" dirty="0"/>
+              <a:t>Exemplos: </a:t>
+            </a:r>
+          </a:p>
+          <a:p>
+            <a:pPr lvl="3">
+              <a:buFont typeface="Wingdings" panose="05000000000000000000" pitchFamily="2" charset="2"/>
+              <a:buChar char="ü"/>
+            </a:pPr>
+            <a:r>
+              <a:rPr lang="pt-BR" dirty="0"/>
+              <a:t>Imagem com “cachorro” e “pessoa”,</a:t>
+            </a:r>
+          </a:p>
+          <a:p>
+            <a:pPr lvl="3">
+              <a:buFont typeface="Wingdings" panose="05000000000000000000" pitchFamily="2" charset="2"/>
+              <a:buChar char="ü"/>
+            </a:pPr>
+            <a:r>
+              <a:rPr lang="pt-BR" dirty="0"/>
+              <a:t>Artigo com múltiplos tópicos.</a:t>
+            </a:r>
+          </a:p>
+          <a:p>
+            <a:pPr lvl="2">
+              <a:buFont typeface="Courier New" panose="02070309020205020404" pitchFamily="49" charset="0"/>
+              <a:buChar char="o"/>
+            </a:pPr>
+            <a:r>
+              <a:rPr lang="pt-BR" dirty="0"/>
+              <a:t>O modelo prevê um vetor binário indicando quais rótulos estão presentes. </a:t>
+            </a:r>
+          </a:p>
+        </p:txBody>
+      </p:sp>
+    </p:spTree>
+    <p:extLst>
+      <p:ext uri="{BB962C8B-B14F-4D97-AF65-F5344CB8AC3E}">
+        <p14:creationId xmlns:p14="http://schemas.microsoft.com/office/powerpoint/2010/main" val="3944489678"/>
       </p:ext>
     </p:extLst>
   </p:cSld>
@@ -4914,10 +7771,10 @@
       </p:grpSpPr>
       <p:sp>
         <p:nvSpPr>
-          <p:cNvPr id="2" name="Título 1">
+          <p:cNvPr id="2" name="Title 1">
             <a:extLst>
               <a:ext uri="{FF2B5EF4-FFF2-40B4-BE49-F238E27FC236}">
-                <a16:creationId xmlns="" xmlns:a16="http://schemas.microsoft.com/office/drawing/2014/main" id="{B7EBC8F7-03EF-338A-A90B-280A41AF9688}"/>
+                <a16:creationId xmlns:a16="http://schemas.microsoft.com/office/drawing/2014/main" id="{341127B6-6972-D992-E732-0F4C9D9283E8}"/>
               </a:ext>
             </a:extLst>
           </p:cNvPr>
@@ -4935,17 +7792,18 @@
           <a:p>
             <a:r>
               <a:rPr lang="pt-BR" dirty="0"/>
-              <a:t>Comparação com outros algoritmos</a:t>
-            </a:r>
-          </a:p>
-        </p:txBody>
-      </p:sp>
-      <p:sp>
-        <p:nvSpPr>
-          <p:cNvPr id="3" name="Espaço Reservado para Conteúdo 2">
+              <a:t>Algoritmos de classificação</a:t>
+            </a:r>
+            <a:endParaRPr lang="en-US" dirty="0"/>
+          </a:p>
+        </p:txBody>
+      </p:sp>
+      <p:sp>
+        <p:nvSpPr>
+          <p:cNvPr id="3" name="Content Placeholder 2">
             <a:extLst>
               <a:ext uri="{FF2B5EF4-FFF2-40B4-BE49-F238E27FC236}">
-                <a16:creationId xmlns="" xmlns:a16="http://schemas.microsoft.com/office/drawing/2014/main" id="{C525BCE7-C19D-7DDA-016A-E3016C398CBA}"/>
+                <a16:creationId xmlns:a16="http://schemas.microsoft.com/office/drawing/2014/main" id="{0F650875-3EEC-71D0-1DC4-489808F8210D}"/>
               </a:ext>
             </a:extLst>
           </p:cNvPr>
@@ -4956,19 +7814,173 @@
             <p:ph idx="1"/>
           </p:nvPr>
         </p:nvSpPr>
-        <p:spPr/>
-        <p:txBody>
-          <a:bodyPr/>
+        <p:spPr>
+          <a:xfrm>
+            <a:off x="838200" y="1825624"/>
+            <a:ext cx="11114314" cy="5032375"/>
+          </a:xfrm>
+        </p:spPr>
+        <p:txBody>
+          <a:bodyPr>
+            <a:normAutofit/>
+          </a:bodyPr>
           <a:lstStyle/>
           <a:p>
-            <a:endParaRPr lang="pt-BR"/>
+            <a:r>
+              <a:rPr lang="pt-BR" dirty="0"/>
+              <a:t>Existe uma grande quantidade de algoritmos de classificação, mas focaremos nos seguintes</a:t>
+            </a:r>
+          </a:p>
+          <a:p>
+            <a:pPr lvl="1">
+              <a:buFont typeface="Wingdings" panose="05000000000000000000" pitchFamily="2" charset="2"/>
+              <a:buChar char="§"/>
+            </a:pPr>
+            <a:r>
+              <a:rPr lang="pt-BR" dirty="0"/>
+              <a:t>Regressor logístico</a:t>
+            </a:r>
+          </a:p>
+          <a:p>
+            <a:pPr lvl="2">
+              <a:buFont typeface="Courier New" panose="02070309020205020404" pitchFamily="49" charset="0"/>
+              <a:buChar char="o"/>
+            </a:pPr>
+            <a:r>
+              <a:rPr lang="pt-BR" dirty="0"/>
+              <a:t>Classificador binário e </a:t>
+            </a:r>
+            <a:r>
+              <a:rPr lang="pt-BR" i="1" dirty="0"/>
+              <a:t>single-</a:t>
+            </a:r>
+            <a:r>
+              <a:rPr lang="pt-BR" i="1" dirty="0" err="1"/>
+              <a:t>label</a:t>
+            </a:r>
+            <a:r>
+              <a:rPr lang="pt-BR" dirty="0"/>
+              <a:t>.</a:t>
+            </a:r>
+          </a:p>
+          <a:p>
+            <a:pPr lvl="1">
+              <a:buFont typeface="Wingdings" panose="05000000000000000000" pitchFamily="2" charset="2"/>
+              <a:buChar char="§"/>
+            </a:pPr>
+            <a:r>
+              <a:rPr lang="pt-BR" dirty="0"/>
+              <a:t>Regressor softmax</a:t>
+            </a:r>
+          </a:p>
+          <a:p>
+            <a:pPr lvl="2">
+              <a:buFont typeface="Courier New" panose="02070309020205020404" pitchFamily="49" charset="0"/>
+              <a:buChar char="o"/>
+            </a:pPr>
+            <a:r>
+              <a:rPr lang="pt-BR" dirty="0"/>
+              <a:t>Classificador multiclasses e </a:t>
+            </a:r>
+            <a:r>
+              <a:rPr lang="pt-BR" i="1" dirty="0"/>
+              <a:t>single-</a:t>
+            </a:r>
+            <a:r>
+              <a:rPr lang="pt-BR" i="1" dirty="0" err="1"/>
+              <a:t>label</a:t>
+            </a:r>
+            <a:r>
+              <a:rPr lang="pt-BR" dirty="0"/>
+              <a:t>.</a:t>
+            </a:r>
+          </a:p>
+          <a:p>
+            <a:r>
+              <a:rPr lang="pt-BR" dirty="0"/>
+              <a:t>Discutiremos adiante também algoritmos que resolvem problemas de regressão e classificação, como</a:t>
+            </a:r>
+          </a:p>
+          <a:p>
+            <a:pPr lvl="1">
+              <a:buFont typeface="Wingdings" panose="05000000000000000000" pitchFamily="2" charset="2"/>
+              <a:buChar char="§"/>
+            </a:pPr>
+            <a:r>
+              <a:rPr lang="pt-BR" dirty="0"/>
+              <a:t>Árvores de decisão</a:t>
+            </a:r>
+          </a:p>
+          <a:p>
+            <a:pPr lvl="2">
+              <a:buFont typeface="Courier New" panose="02070309020205020404" pitchFamily="49" charset="0"/>
+              <a:buChar char="o"/>
+            </a:pPr>
+            <a:r>
+              <a:rPr lang="pt-BR" dirty="0"/>
+              <a:t>Classificadores binários, multiclasses e </a:t>
+            </a:r>
+            <a:r>
+              <a:rPr lang="pt-BR" i="1" dirty="0"/>
+              <a:t>single-</a:t>
+            </a:r>
+            <a:r>
+              <a:rPr lang="pt-BR" i="1" dirty="0" err="1"/>
+              <a:t>label</a:t>
+            </a:r>
+            <a:endParaRPr lang="pt-BR" dirty="0"/>
+          </a:p>
+          <a:p>
+            <a:pPr lvl="1">
+              <a:buFont typeface="Wingdings" panose="05000000000000000000" pitchFamily="2" charset="2"/>
+              <a:buChar char="§"/>
+            </a:pPr>
+            <a:r>
+              <a:rPr lang="pt-BR" dirty="0"/>
+              <a:t>Redes neurais</a:t>
+            </a:r>
+          </a:p>
+          <a:p>
+            <a:pPr lvl="2">
+              <a:buFont typeface="Courier New" panose="02070309020205020404" pitchFamily="49" charset="0"/>
+              <a:buChar char="o"/>
+            </a:pPr>
+            <a:r>
+              <a:rPr lang="pt-BR" dirty="0"/>
+              <a:t>Classificadores binários, multiclasses, </a:t>
+            </a:r>
+            <a:r>
+              <a:rPr lang="pt-BR" i="1" dirty="0"/>
+              <a:t>single-</a:t>
+            </a:r>
+            <a:r>
+              <a:rPr lang="pt-BR" i="1" dirty="0" err="1"/>
+              <a:t>label</a:t>
+            </a:r>
+            <a:r>
+              <a:rPr lang="pt-BR" i="1" dirty="0"/>
+              <a:t> </a:t>
+            </a:r>
+            <a:r>
+              <a:rPr lang="pt-BR" dirty="0"/>
+              <a:t>e</a:t>
+            </a:r>
+            <a:r>
+              <a:rPr lang="pt-BR" i="1" dirty="0"/>
+              <a:t> </a:t>
+            </a:r>
+            <a:r>
+              <a:rPr lang="pt-BR" i="1" dirty="0" err="1"/>
+              <a:t>multilabel</a:t>
+            </a:r>
+            <a:endParaRPr lang="pt-BR" dirty="0"/>
           </a:p>
         </p:txBody>
       </p:sp>
     </p:spTree>
     <p:extLst>
       <p:ext uri="{BB962C8B-B14F-4D97-AF65-F5344CB8AC3E}">
-        <p14:creationId xmlns:p14="http://schemas.microsoft.com/office/powerpoint/2010/main" val="3601469261"/>
+        <p14:creationId xmlns:p14="http://schemas.microsoft.com/office/powerpoint/2010/main" val="1795313321"/>
       </p:ext>
     </p:extLst>
   </p:cSld>
@@ -4997,64 +8009,47 @@
       </p:grpSpPr>
       <p:sp>
         <p:nvSpPr>
-          <p:cNvPr id="4" name="Título 1">
+          <p:cNvPr id="3" name="Content Placeholder 2">
             <a:extLst>
               <a:ext uri="{FF2B5EF4-FFF2-40B4-BE49-F238E27FC236}">
-                <a16:creationId xmlns="" xmlns:a16="http://schemas.microsoft.com/office/drawing/2014/main" id="{32666AC8-2E17-4DB4-B0F5-60C640CCFD2E}"/>
+                <a16:creationId xmlns:a16="http://schemas.microsoft.com/office/drawing/2014/main" id="{D30302BD-A868-44A9-D6B7-B33026A62A80}"/>
               </a:ext>
             </a:extLst>
           </p:cNvPr>
-          <p:cNvSpPr txBox="1">
-            <a:spLocks/>
-          </p:cNvSpPr>
-          <p:nvPr/>
+          <p:cNvSpPr>
+            <a:spLocks noGrp="1"/>
+          </p:cNvSpPr>
+          <p:nvPr>
+            <p:ph idx="1"/>
+          </p:nvPr>
         </p:nvSpPr>
         <p:spPr>
           <a:xfrm>
-            <a:off x="1431533" y="2720526"/>
-            <a:ext cx="9144000" cy="1029541"/>
+            <a:off x="838200" y="2927463"/>
+            <a:ext cx="10515600" cy="1003074"/>
           </a:xfrm>
-          <a:prstGeom prst="rect">
-            <a:avLst/>
-          </a:prstGeom>
         </p:spPr>
         <p:txBody>
-          <a:bodyPr vert="horz" lIns="91440" tIns="45720" rIns="91440" bIns="45720" rtlCol="0" anchor="ctr">
+          <a:bodyPr>
             <a:normAutofit/>
           </a:bodyPr>
-          <a:lstStyle>
-            <a:lvl1pPr algn="l" defTabSz="914400" rtl="0" eaLnBrk="1" latinLnBrk="0" hangingPunct="1">
-              <a:lnSpc>
-                <a:spcPct val="90000"/>
-              </a:lnSpc>
-              <a:spcBef>
-                <a:spcPct val="0"/>
-              </a:spcBef>
+          <a:lstStyle/>
+          <a:p>
+            <a:pPr marL="0" indent="0" algn="ctr">
               <a:buNone/>
-              <a:defRPr sz="4400" kern="1200">
-                <a:solidFill>
-                  <a:schemeClr val="tx1"/>
-                </a:solidFill>
-                <a:latin typeface="+mj-lt"/>
-                <a:ea typeface="+mj-ea"/>
-                <a:cs typeface="+mj-cs"/>
-              </a:defRPr>
-            </a:lvl1pPr>
-          </a:lstStyle>
-          <a:p>
-            <a:pPr algn="ctr"/>
-            <a:r>
-              <a:rPr lang="pt-BR" sz="6600" dirty="0"/>
-              <a:t>Perguntas?</a:t>
-            </a:r>
-            <a:endParaRPr lang="pt-BR" sz="6600" b="1" i="1" dirty="0"/>
+            </a:pPr>
+            <a:r>
+              <a:rPr lang="pt-BR" sz="6000" i="1" dirty="0"/>
+              <a:t>Como representamos os rótulos?</a:t>
+            </a:r>
+            <a:endParaRPr lang="en-US" sz="6000" i="1" dirty="0"/>
           </a:p>
         </p:txBody>
       </p:sp>
     </p:spTree>
     <p:extLst>
       <p:ext uri="{BB962C8B-B14F-4D97-AF65-F5344CB8AC3E}">
-        <p14:creationId xmlns:p14="http://schemas.microsoft.com/office/powerpoint/2010/main" val="3773005660"/>
+        <p14:creationId xmlns:p14="http://schemas.microsoft.com/office/powerpoint/2010/main" val="3833417080"/>
       </p:ext>
     </p:extLst>
   </p:cSld>
